--- a/DataPilot_Hackathon.pptx
+++ b/DataPilot_Hackathon.pptx
@@ -122,7 +122,7 @@
 <file path=ppt/revisionInfo.xml><?xml version="1.0" encoding="utf-8"?>
 <p1510:revInfo xmlns:a="http://schemas.openxmlformats.org/drawingml/2006/main" xmlns:r="http://schemas.openxmlformats.org/officeDocument/2006/relationships" xmlns:p1510="http://schemas.microsoft.com/office/powerpoint/2015/10/main">
   <p1510:revLst>
-    <p1510:client id="{EA8B9F26-FADD-45BD-BDCC-DC880AF7E700}" v="1" dt="2026-04-01T13:01:01.340"/>
+    <p1510:client id="{EA8B9F26-FADD-45BD-BDCC-DC880AF7E700}" v="10" dt="2026-04-03T04:48:34.711"/>
   </p1510:revLst>
 </p1510:revInfo>
 </file>
@@ -131,42 +131,50 @@
 <pc:chgInfo xmlns:a="http://schemas.openxmlformats.org/drawingml/2006/main" xmlns:r="http://schemas.openxmlformats.org/officeDocument/2006/relationships" xmlns:ac="http://schemas.microsoft.com/office/drawing/2013/main/command" xmlns:pc="http://schemas.microsoft.com/office/powerpoint/2013/main/command">
   <pc:docChgLst>
     <pc:chgData name="Pankhuri Trikha" userId="6c20738c73399015" providerId="LiveId" clId="{269E12B7-76CD-436A-B9F5-31677DFC7E33}"/>
-    <pc:docChg chg="custSel modSld">
-      <pc:chgData name="Pankhuri Trikha" userId="6c20738c73399015" providerId="LiveId" clId="{269E12B7-76CD-436A-B9F5-31677DFC7E33}" dt="2026-04-01T17:56:29.172" v="10" actId="14100"/>
+    <pc:docChg chg="undo custSel modSld">
+      <pc:chgData name="Pankhuri Trikha" userId="6c20738c73399015" providerId="LiveId" clId="{269E12B7-76CD-436A-B9F5-31677DFC7E33}" dt="2026-04-03T04:51:07.399" v="467" actId="478"/>
       <pc:docMkLst>
         <pc:docMk/>
       </pc:docMkLst>
       <pc:sldChg chg="delSp mod">
-        <pc:chgData name="Pankhuri Trikha" userId="6c20738c73399015" providerId="LiveId" clId="{269E12B7-76CD-436A-B9F5-31677DFC7E33}" dt="2026-04-01T12:59:28.587" v="1" actId="478"/>
+        <pc:chgData name="Pankhuri Trikha" userId="6c20738c73399015" providerId="LiveId" clId="{269E12B7-76CD-436A-B9F5-31677DFC7E33}" dt="2026-04-02T13:28:40.073" v="0" actId="478"/>
         <pc:sldMkLst>
           <pc:docMk/>
           <pc:sldMk cId="0" sldId="256"/>
         </pc:sldMkLst>
         <pc:spChg chg="del">
-          <ac:chgData name="Pankhuri Trikha" userId="6c20738c73399015" providerId="LiveId" clId="{269E12B7-76CD-436A-B9F5-31677DFC7E33}" dt="2026-04-01T12:59:26.035" v="0" actId="478"/>
+          <ac:chgData name="Pankhuri Trikha" userId="6c20738c73399015" providerId="LiveId" clId="{269E12B7-76CD-436A-B9F5-31677DFC7E33}" dt="2026-04-02T13:28:40.073" v="0" actId="478"/>
           <ac:spMkLst>
             <pc:docMk/>
             <pc:sldMk cId="0" sldId="256"/>
-            <ac:spMk id="2" creationId="{00000000-0000-0000-0000-000000000000}"/>
-          </ac:spMkLst>
-        </pc:spChg>
-        <pc:spChg chg="del">
-          <ac:chgData name="Pankhuri Trikha" userId="6c20738c73399015" providerId="LiveId" clId="{269E12B7-76CD-436A-B9F5-31677DFC7E33}" dt="2026-04-01T12:59:28.587" v="1" actId="478"/>
-          <ac:spMkLst>
-            <pc:docMk/>
-            <pc:sldMk cId="0" sldId="256"/>
-            <ac:spMk id="6" creationId="{00000000-0000-0000-0000-000000000000}"/>
+            <ac:spMk id="4" creationId="{00000000-0000-0000-0000-000000000000}"/>
           </ac:spMkLst>
         </pc:spChg>
       </pc:sldChg>
-      <pc:sldChg chg="modSp mod">
-        <pc:chgData name="Pankhuri Trikha" userId="6c20738c73399015" providerId="LiveId" clId="{269E12B7-76CD-436A-B9F5-31677DFC7E33}" dt="2026-04-01T17:56:29.172" v="10" actId="14100"/>
+      <pc:sldChg chg="addSp delSp modSp mod">
+        <pc:chgData name="Pankhuri Trikha" userId="6c20738c73399015" providerId="LiveId" clId="{269E12B7-76CD-436A-B9F5-31677DFC7E33}" dt="2026-04-02T16:58:09.262" v="372" actId="20577"/>
         <pc:sldMkLst>
           <pc:docMk/>
           <pc:sldMk cId="0" sldId="257"/>
         </pc:sldMkLst>
         <pc:spChg chg="mod">
-          <ac:chgData name="Pankhuri Trikha" userId="6c20738c73399015" providerId="LiveId" clId="{269E12B7-76CD-436A-B9F5-31677DFC7E33}" dt="2026-04-01T17:56:23.224" v="9" actId="1076"/>
+          <ac:chgData name="Pankhuri Trikha" userId="6c20738c73399015" providerId="LiveId" clId="{269E12B7-76CD-436A-B9F5-31677DFC7E33}" dt="2026-04-02T16:57:10.525" v="304" actId="1076"/>
+          <ac:spMkLst>
+            <pc:docMk/>
+            <pc:sldMk cId="0" sldId="257"/>
+            <ac:spMk id="2" creationId="{00000000-0000-0000-0000-000000000000}"/>
+          </ac:spMkLst>
+        </pc:spChg>
+        <pc:spChg chg="mod">
+          <ac:chgData name="Pankhuri Trikha" userId="6c20738c73399015" providerId="LiveId" clId="{269E12B7-76CD-436A-B9F5-31677DFC7E33}" dt="2026-04-02T13:57:56.478" v="1" actId="14100"/>
+          <ac:spMkLst>
+            <pc:docMk/>
+            <pc:sldMk cId="0" sldId="257"/>
+            <ac:spMk id="4" creationId="{00000000-0000-0000-0000-000000000000}"/>
+          </ac:spMkLst>
+        </pc:spChg>
+        <pc:spChg chg="mod">
+          <ac:chgData name="Pankhuri Trikha" userId="6c20738c73399015" providerId="LiveId" clId="{269E12B7-76CD-436A-B9F5-31677DFC7E33}" dt="2026-04-02T16:54:28.664" v="287" actId="1076"/>
           <ac:spMkLst>
             <pc:docMk/>
             <pc:sldMk cId="0" sldId="257"/>
@@ -174,7 +182,7 @@
           </ac:spMkLst>
         </pc:spChg>
         <pc:spChg chg="mod">
-          <ac:chgData name="Pankhuri Trikha" userId="6c20738c73399015" providerId="LiveId" clId="{269E12B7-76CD-436A-B9F5-31677DFC7E33}" dt="2026-04-01T17:56:29.172" v="10" actId="14100"/>
+          <ac:chgData name="Pankhuri Trikha" userId="6c20738c73399015" providerId="LiveId" clId="{269E12B7-76CD-436A-B9F5-31677DFC7E33}" dt="2026-04-02T16:54:32.668" v="288" actId="14100"/>
           <ac:spMkLst>
             <pc:docMk/>
             <pc:sldMk cId="0" sldId="257"/>
@@ -182,37 +190,259 @@
           </ac:spMkLst>
         </pc:spChg>
         <pc:spChg chg="mod">
-          <ac:chgData name="Pankhuri Trikha" userId="6c20738c73399015" providerId="LiveId" clId="{269E12B7-76CD-436A-B9F5-31677DFC7E33}" dt="2026-04-01T17:53:52.648" v="8" actId="1076"/>
+          <ac:chgData name="Pankhuri Trikha" userId="6c20738c73399015" providerId="LiveId" clId="{269E12B7-76CD-436A-B9F5-31677DFC7E33}" dt="2026-04-02T16:54:22.517" v="286" actId="14100"/>
           <ac:spMkLst>
             <pc:docMk/>
             <pc:sldMk cId="0" sldId="257"/>
+            <ac:spMk id="8" creationId="{00000000-0000-0000-0000-000000000000}"/>
+          </ac:spMkLst>
+        </pc:spChg>
+        <pc:spChg chg="mod">
+          <ac:chgData name="Pankhuri Trikha" userId="6c20738c73399015" providerId="LiveId" clId="{269E12B7-76CD-436A-B9F5-31677DFC7E33}" dt="2026-04-02T16:54:38.314" v="289" actId="1076"/>
+          <ac:spMkLst>
+            <pc:docMk/>
+            <pc:sldMk cId="0" sldId="257"/>
+            <ac:spMk id="9" creationId="{00000000-0000-0000-0000-000000000000}"/>
+          </ac:spMkLst>
+        </pc:spChg>
+        <pc:spChg chg="mod">
+          <ac:chgData name="Pankhuri Trikha" userId="6c20738c73399015" providerId="LiveId" clId="{269E12B7-76CD-436A-B9F5-31677DFC7E33}" dt="2026-04-02T16:54:55.528" v="290" actId="14100"/>
+          <ac:spMkLst>
+            <pc:docMk/>
+            <pc:sldMk cId="0" sldId="257"/>
+            <ac:spMk id="10" creationId="{00000000-0000-0000-0000-000000000000}"/>
+          </ac:spMkLst>
+        </pc:spChg>
+        <pc:spChg chg="mod">
+          <ac:chgData name="Pankhuri Trikha" userId="6c20738c73399015" providerId="LiveId" clId="{269E12B7-76CD-436A-B9F5-31677DFC7E33}" dt="2026-04-02T16:55:00.566" v="291" actId="1076"/>
+          <ac:spMkLst>
+            <pc:docMk/>
+            <pc:sldMk cId="0" sldId="257"/>
+            <ac:spMk id="11" creationId="{00000000-0000-0000-0000-000000000000}"/>
+          </ac:spMkLst>
+        </pc:spChg>
+        <pc:spChg chg="mod">
+          <ac:chgData name="Pankhuri Trikha" userId="6c20738c73399015" providerId="LiveId" clId="{269E12B7-76CD-436A-B9F5-31677DFC7E33}" dt="2026-04-02T16:55:06.161" v="292" actId="14100"/>
+          <ac:spMkLst>
+            <pc:docMk/>
+            <pc:sldMk cId="0" sldId="257"/>
+            <ac:spMk id="12" creationId="{00000000-0000-0000-0000-000000000000}"/>
+          </ac:spMkLst>
+        </pc:spChg>
+        <pc:spChg chg="add mod">
+          <ac:chgData name="Pankhuri Trikha" userId="6c20738c73399015" providerId="LiveId" clId="{269E12B7-76CD-436A-B9F5-31677DFC7E33}" dt="2026-04-02T16:55:45.076" v="294" actId="1076"/>
+          <ac:spMkLst>
+            <pc:docMk/>
+            <pc:sldMk cId="0" sldId="257"/>
+            <ac:spMk id="28" creationId="{CE49B4A1-D391-17BB-F6C5-95B563CC5A6D}"/>
+          </ac:spMkLst>
+        </pc:spChg>
+        <pc:spChg chg="add del mod">
+          <ac:chgData name="Pankhuri Trikha" userId="6c20738c73399015" providerId="LiveId" clId="{269E12B7-76CD-436A-B9F5-31677DFC7E33}" dt="2026-04-02T16:55:54.953" v="296" actId="478"/>
+          <ac:spMkLst>
+            <pc:docMk/>
+            <pc:sldMk cId="0" sldId="257"/>
+            <ac:spMk id="29" creationId="{60D5F30C-D1B0-8F13-49B7-332C64A5F042}"/>
+          </ac:spMkLst>
+        </pc:spChg>
+        <pc:spChg chg="add del mod">
+          <ac:chgData name="Pankhuri Trikha" userId="6c20738c73399015" providerId="LiveId" clId="{269E12B7-76CD-436A-B9F5-31677DFC7E33}" dt="2026-04-02T16:56:07.629" v="299" actId="478"/>
+          <ac:spMkLst>
+            <pc:docMk/>
+            <pc:sldMk cId="0" sldId="257"/>
+            <ac:spMk id="30" creationId="{41EB5CCF-18CD-E6B5-3AD6-59E18D1C8437}"/>
+          </ac:spMkLst>
+        </pc:spChg>
+        <pc:spChg chg="add del mod">
+          <ac:chgData name="Pankhuri Trikha" userId="6c20738c73399015" providerId="LiveId" clId="{269E12B7-76CD-436A-B9F5-31677DFC7E33}" dt="2026-04-02T16:56:45.307" v="301" actId="478"/>
+          <ac:spMkLst>
+            <pc:docMk/>
+            <pc:sldMk cId="0" sldId="257"/>
+            <ac:spMk id="31" creationId="{9CCCBC80-2678-EABD-6E41-95021B024D74}"/>
+          </ac:spMkLst>
+        </pc:spChg>
+        <pc:spChg chg="add del mod">
+          <ac:chgData name="Pankhuri Trikha" userId="6c20738c73399015" providerId="LiveId" clId="{269E12B7-76CD-436A-B9F5-31677DFC7E33}" dt="2026-04-02T16:57:34.051" v="309" actId="478"/>
+          <ac:spMkLst>
+            <pc:docMk/>
+            <pc:sldMk cId="0" sldId="257"/>
+            <ac:spMk id="32" creationId="{0D7585C9-AEFD-E4A6-C5C3-125F7209B6E2}"/>
+          </ac:spMkLst>
+        </pc:spChg>
+        <pc:spChg chg="add mod">
+          <ac:chgData name="Pankhuri Trikha" userId="6c20738c73399015" providerId="LiveId" clId="{269E12B7-76CD-436A-B9F5-31677DFC7E33}" dt="2026-04-02T16:58:09.262" v="372" actId="20577"/>
+          <ac:spMkLst>
+            <pc:docMk/>
+            <pc:sldMk cId="0" sldId="257"/>
+            <ac:spMk id="33" creationId="{CD1DC683-4AF4-4D5F-3B2F-A21DDB747BA6}"/>
+          </ac:spMkLst>
+        </pc:spChg>
+      </pc:sldChg>
+      <pc:sldChg chg="modSp mod">
+        <pc:chgData name="Pankhuri Trikha" userId="6c20738c73399015" providerId="LiveId" clId="{269E12B7-76CD-436A-B9F5-31677DFC7E33}" dt="2026-04-03T04:48:54.293" v="465" actId="20577"/>
+        <pc:sldMkLst>
+          <pc:docMk/>
+          <pc:sldMk cId="0" sldId="259"/>
+        </pc:sldMkLst>
+        <pc:spChg chg="mod">
+          <ac:chgData name="Pankhuri Trikha" userId="6c20738c73399015" providerId="LiveId" clId="{269E12B7-76CD-436A-B9F5-31677DFC7E33}" dt="2026-04-03T04:48:54.293" v="465" actId="20577"/>
+          <ac:spMkLst>
+            <pc:docMk/>
+            <pc:sldMk cId="0" sldId="259"/>
             <ac:spMk id="7" creationId="{00000000-0000-0000-0000-000000000000}"/>
           </ac:spMkLst>
         </pc:spChg>
       </pc:sldChg>
-      <pc:sldChg chg="addSp delSp modSp mod">
-        <pc:chgData name="Pankhuri Trikha" userId="6c20738c73399015" providerId="LiveId" clId="{269E12B7-76CD-436A-B9F5-31677DFC7E33}" dt="2026-04-01T13:01:09.618" v="6" actId="478"/>
+      <pc:sldChg chg="modSp mod">
+        <pc:chgData name="Pankhuri Trikha" userId="6c20738c73399015" providerId="LiveId" clId="{269E12B7-76CD-436A-B9F5-31677DFC7E33}" dt="2026-04-03T03:36:45.592" v="461" actId="20577"/>
         <pc:sldMkLst>
           <pc:docMk/>
-          <pc:sldMk cId="0" sldId="258"/>
+          <pc:sldMk cId="0" sldId="261"/>
         </pc:sldMkLst>
-        <pc:spChg chg="add del mod">
-          <ac:chgData name="Pankhuri Trikha" userId="6c20738c73399015" providerId="LiveId" clId="{269E12B7-76CD-436A-B9F5-31677DFC7E33}" dt="2026-04-01T13:01:09.618" v="6" actId="478"/>
+        <pc:spChg chg="mod">
+          <ac:chgData name="Pankhuri Trikha" userId="6c20738c73399015" providerId="LiveId" clId="{269E12B7-76CD-436A-B9F5-31677DFC7E33}" dt="2026-04-02T14:33:50.670" v="14" actId="5793"/>
           <ac:spMkLst>
             <pc:docMk/>
-            <pc:sldMk cId="0" sldId="258"/>
-            <ac:spMk id="55" creationId="{F5BD2E23-4EA0-0909-0B90-5F07E5672081}"/>
+            <pc:sldMk cId="0" sldId="261"/>
+            <ac:spMk id="11" creationId="{00000000-0000-0000-0000-000000000000}"/>
+          </ac:spMkLst>
+        </pc:spChg>
+        <pc:spChg chg="mod">
+          <ac:chgData name="Pankhuri Trikha" userId="6c20738c73399015" providerId="LiveId" clId="{269E12B7-76CD-436A-B9F5-31677DFC7E33}" dt="2026-04-02T14:34:12.978" v="18" actId="14100"/>
+          <ac:spMkLst>
+            <pc:docMk/>
+            <pc:sldMk cId="0" sldId="261"/>
+            <ac:spMk id="12" creationId="{00000000-0000-0000-0000-000000000000}"/>
+          </ac:spMkLst>
+        </pc:spChg>
+        <pc:spChg chg="mod">
+          <ac:chgData name="Pankhuri Trikha" userId="6c20738c73399015" providerId="LiveId" clId="{269E12B7-76CD-436A-B9F5-31677DFC7E33}" dt="2026-04-02T14:34:46.585" v="24" actId="20577"/>
+          <ac:spMkLst>
+            <pc:docMk/>
+            <pc:sldMk cId="0" sldId="261"/>
+            <ac:spMk id="16" creationId="{00000000-0000-0000-0000-000000000000}"/>
+          </ac:spMkLst>
+        </pc:spChg>
+        <pc:spChg chg="mod">
+          <ac:chgData name="Pankhuri Trikha" userId="6c20738c73399015" providerId="LiveId" clId="{269E12B7-76CD-436A-B9F5-31677DFC7E33}" dt="2026-04-02T14:35:04.780" v="29" actId="20577"/>
+          <ac:spMkLst>
+            <pc:docMk/>
+            <pc:sldMk cId="0" sldId="261"/>
+            <ac:spMk id="17" creationId="{00000000-0000-0000-0000-000000000000}"/>
+          </ac:spMkLst>
+        </pc:spChg>
+        <pc:spChg chg="mod">
+          <ac:chgData name="Pankhuri Trikha" userId="6c20738c73399015" providerId="LiveId" clId="{269E12B7-76CD-436A-B9F5-31677DFC7E33}" dt="2026-04-02T14:35:53.177" v="31" actId="14100"/>
+          <ac:spMkLst>
+            <pc:docMk/>
+            <pc:sldMk cId="0" sldId="261"/>
+            <ac:spMk id="18" creationId="{00000000-0000-0000-0000-000000000000}"/>
+          </ac:spMkLst>
+        </pc:spChg>
+        <pc:spChg chg="mod">
+          <ac:chgData name="Pankhuri Trikha" userId="6c20738c73399015" providerId="LiveId" clId="{269E12B7-76CD-436A-B9F5-31677DFC7E33}" dt="2026-04-02T14:35:59.767" v="33" actId="14100"/>
+          <ac:spMkLst>
+            <pc:docMk/>
+            <pc:sldMk cId="0" sldId="261"/>
+            <ac:spMk id="19" creationId="{00000000-0000-0000-0000-000000000000}"/>
+          </ac:spMkLst>
+        </pc:spChg>
+        <pc:spChg chg="mod">
+          <ac:chgData name="Pankhuri Trikha" userId="6c20738c73399015" providerId="LiveId" clId="{269E12B7-76CD-436A-B9F5-31677DFC7E33}" dt="2026-04-02T14:37:20.074" v="35" actId="14100"/>
+          <ac:spMkLst>
+            <pc:docMk/>
+            <pc:sldMk cId="0" sldId="261"/>
+            <ac:spMk id="20" creationId="{00000000-0000-0000-0000-000000000000}"/>
+          </ac:spMkLst>
+        </pc:spChg>
+        <pc:spChg chg="mod">
+          <ac:chgData name="Pankhuri Trikha" userId="6c20738c73399015" providerId="LiveId" clId="{269E12B7-76CD-436A-B9F5-31677DFC7E33}" dt="2026-04-02T14:37:35.847" v="38" actId="14100"/>
+          <ac:spMkLst>
+            <pc:docMk/>
+            <pc:sldMk cId="0" sldId="261"/>
+            <ac:spMk id="21" creationId="{00000000-0000-0000-0000-000000000000}"/>
+          </ac:spMkLst>
+        </pc:spChg>
+        <pc:spChg chg="mod">
+          <ac:chgData name="Pankhuri Trikha" userId="6c20738c73399015" providerId="LiveId" clId="{269E12B7-76CD-436A-B9F5-31677DFC7E33}" dt="2026-04-02T14:37:41.797" v="40" actId="14100"/>
+          <ac:spMkLst>
+            <pc:docMk/>
+            <pc:sldMk cId="0" sldId="261"/>
+            <ac:spMk id="22" creationId="{00000000-0000-0000-0000-000000000000}"/>
+          </ac:spMkLst>
+        </pc:spChg>
+        <pc:spChg chg="mod">
+          <ac:chgData name="Pankhuri Trikha" userId="6c20738c73399015" providerId="LiveId" clId="{269E12B7-76CD-436A-B9F5-31677DFC7E33}" dt="2026-04-03T03:36:45.592" v="461" actId="20577"/>
+          <ac:spMkLst>
+            <pc:docMk/>
+            <pc:sldMk cId="0" sldId="261"/>
+            <ac:spMk id="34" creationId="{00000000-0000-0000-0000-000000000000}"/>
+          </ac:spMkLst>
+        </pc:spChg>
+        <pc:spChg chg="mod">
+          <ac:chgData name="Pankhuri Trikha" userId="6c20738c73399015" providerId="LiveId" clId="{269E12B7-76CD-436A-B9F5-31677DFC7E33}" dt="2026-04-02T14:42:55.571" v="46" actId="5793"/>
+          <ac:spMkLst>
+            <pc:docMk/>
+            <pc:sldMk cId="0" sldId="261"/>
+            <ac:spMk id="37" creationId="{00000000-0000-0000-0000-000000000000}"/>
+          </ac:spMkLst>
+        </pc:spChg>
+        <pc:spChg chg="mod">
+          <ac:chgData name="Pankhuri Trikha" userId="6c20738c73399015" providerId="LiveId" clId="{269E12B7-76CD-436A-B9F5-31677DFC7E33}" dt="2026-04-02T14:43:15.906" v="97" actId="20577"/>
+          <ac:spMkLst>
+            <pc:docMk/>
+            <pc:sldMk cId="0" sldId="261"/>
+            <ac:spMk id="38" creationId="{00000000-0000-0000-0000-000000000000}"/>
+          </ac:spMkLst>
+        </pc:spChg>
+        <pc:spChg chg="mod">
+          <ac:chgData name="Pankhuri Trikha" userId="6c20738c73399015" providerId="LiveId" clId="{269E12B7-76CD-436A-B9F5-31677DFC7E33}" dt="2026-04-03T03:20:04.717" v="424" actId="20577"/>
+          <ac:spMkLst>
+            <pc:docMk/>
+            <pc:sldMk cId="0" sldId="261"/>
+            <ac:spMk id="48" creationId="{00000000-0000-0000-0000-000000000000}"/>
+          </ac:spMkLst>
+        </pc:spChg>
+      </pc:sldChg>
+      <pc:sldChg chg="delSp modSp mod">
+        <pc:chgData name="Pankhuri Trikha" userId="6c20738c73399015" providerId="LiveId" clId="{269E12B7-76CD-436A-B9F5-31677DFC7E33}" dt="2026-04-02T17:00:39.464" v="382" actId="207"/>
+        <pc:sldMkLst>
+          <pc:docMk/>
+          <pc:sldMk cId="0" sldId="262"/>
+        </pc:sldMkLst>
+        <pc:spChg chg="mod">
+          <ac:chgData name="Pankhuri Trikha" userId="6c20738c73399015" providerId="LiveId" clId="{269E12B7-76CD-436A-B9F5-31677DFC7E33}" dt="2026-04-02T17:00:39.464" v="382" actId="207"/>
+          <ac:spMkLst>
+            <pc:docMk/>
+            <pc:sldMk cId="0" sldId="262"/>
+            <ac:spMk id="9" creationId="{00000000-0000-0000-0000-000000000000}"/>
+          </ac:spMkLst>
+        </pc:spChg>
+        <pc:spChg chg="del">
+          <ac:chgData name="Pankhuri Trikha" userId="6c20738c73399015" providerId="LiveId" clId="{269E12B7-76CD-436A-B9F5-31677DFC7E33}" dt="2026-04-02T16:58:43.450" v="380" actId="478"/>
+          <ac:spMkLst>
+            <pc:docMk/>
+            <pc:sldMk cId="0" sldId="262"/>
+            <ac:spMk id="28" creationId="{00000000-0000-0000-0000-000000000000}"/>
+          </ac:spMkLst>
+        </pc:spChg>
+        <pc:spChg chg="mod">
+          <ac:chgData name="Pankhuri Trikha" userId="6c20738c73399015" providerId="LiveId" clId="{269E12B7-76CD-436A-B9F5-31677DFC7E33}" dt="2026-04-02T16:58:40.365" v="379" actId="20577"/>
+          <ac:spMkLst>
+            <pc:docMk/>
+            <pc:sldMk cId="0" sldId="262"/>
+            <ac:spMk id="29" creationId="{00000000-0000-0000-0000-000000000000}"/>
           </ac:spMkLst>
         </pc:spChg>
       </pc:sldChg>
       <pc:sldChg chg="delSp mod">
-        <pc:chgData name="Pankhuri Trikha" userId="6c20738c73399015" providerId="LiveId" clId="{269E12B7-76CD-436A-B9F5-31677DFC7E33}" dt="2026-04-01T12:59:57.502" v="3" actId="478"/>
+        <pc:chgData name="Pankhuri Trikha" userId="6c20738c73399015" providerId="LiveId" clId="{269E12B7-76CD-436A-B9F5-31677DFC7E33}" dt="2026-04-03T04:51:07.399" v="467" actId="478"/>
         <pc:sldMkLst>
           <pc:docMk/>
           <pc:sldMk cId="0" sldId="263"/>
         </pc:sldMkLst>
         <pc:spChg chg="del">
-          <ac:chgData name="Pankhuri Trikha" userId="6c20738c73399015" providerId="LiveId" clId="{269E12B7-76CD-436A-B9F5-31677DFC7E33}" dt="2026-04-01T12:59:55.198" v="2" actId="478"/>
+          <ac:chgData name="Pankhuri Trikha" userId="6c20738c73399015" providerId="LiveId" clId="{269E12B7-76CD-436A-B9F5-31677DFC7E33}" dt="2026-04-03T04:50:47.500" v="466" actId="478"/>
           <ac:spMkLst>
             <pc:docMk/>
             <pc:sldMk cId="0" sldId="263"/>
@@ -220,7 +450,7 @@
           </ac:spMkLst>
         </pc:spChg>
         <pc:spChg chg="del">
-          <ac:chgData name="Pankhuri Trikha" userId="6c20738c73399015" providerId="LiveId" clId="{269E12B7-76CD-436A-B9F5-31677DFC7E33}" dt="2026-04-01T12:59:57.502" v="3" actId="478"/>
+          <ac:chgData name="Pankhuri Trikha" userId="6c20738c73399015" providerId="LiveId" clId="{269E12B7-76CD-436A-B9F5-31677DFC7E33}" dt="2026-04-03T04:51:07.399" v="467" actId="478"/>
           <ac:spMkLst>
             <pc:docMk/>
             <pc:sldMk cId="0" sldId="263"/>
@@ -258,7 +488,7 @@
     </p:spTree>
     <p:extLst>
       <p:ext uri="{BB962C8B-B14F-4D97-AF65-F5344CB8AC3E}">
-        <p14:creationId xmlns:p14="http://schemas.microsoft.com/office/powerpoint/2010/main" val="811410086"/>
+        <p14:creationId xmlns:p14="http://schemas.microsoft.com/office/powerpoint/2010/main" val="219809454"/>
       </p:ext>
     </p:extLst>
   </p:cSld>
@@ -1369,36 +1599,7 @@
       </p:grpSpPr>
       <p:sp>
         <p:nvSpPr>
-          <p:cNvPr id="3" name="Shape 1"/>
-          <p:cNvSpPr/>
-          <p:nvPr/>
-        </p:nvSpPr>
-        <p:spPr>
-          <a:xfrm>
-            <a:off x="7315200" y="-365760"/>
-            <a:ext cx="2286000" cy="2286000"/>
-          </a:xfrm>
-          <a:prstGeom prst="ellipse">
-            <a:avLst/>
-          </a:prstGeom>
-          <a:solidFill>
-            <a:srgbClr val="06B6D4">
-              <a:alpha val="20000"/>
-            </a:srgbClr>
-          </a:solidFill>
-          <a:ln w="12700">
-            <a:solidFill>
-              <a:srgbClr val="06B6D4">
-                <a:alpha val="20000"/>
-              </a:srgbClr>
-            </a:solidFill>
-            <a:prstDash val="solid"/>
-          </a:ln>
-        </p:spPr>
-      </p:sp>
-      <p:sp>
-        <p:nvSpPr>
-          <p:cNvPr id="4" name="Shape 2"/>
+          <p:cNvPr id="2" name="Shape 0"/>
           <p:cNvSpPr/>
           <p:nvPr/>
         </p:nvSpPr>
@@ -1423,7 +1624,7 @@
       </p:sp>
       <p:sp>
         <p:nvSpPr>
-          <p:cNvPr id="5" name="Text 3"/>
+          <p:cNvPr id="3" name="Text 1"/>
           <p:cNvSpPr/>
           <p:nvPr/>
         </p:nvSpPr>
@@ -1462,7 +1663,7 @@
       </p:sp>
       <p:sp>
         <p:nvSpPr>
-          <p:cNvPr id="7" name="Text 5"/>
+          <p:cNvPr id="5" name="Text 3"/>
           <p:cNvSpPr/>
           <p:nvPr/>
         </p:nvSpPr>
@@ -1501,7 +1702,7 @@
       </p:sp>
       <p:sp>
         <p:nvSpPr>
-          <p:cNvPr id="8" name="Text 6"/>
+          <p:cNvPr id="6" name="Text 4"/>
           <p:cNvSpPr/>
           <p:nvPr/>
         </p:nvSpPr>
@@ -1540,7 +1741,7 @@
       </p:sp>
       <p:sp>
         <p:nvSpPr>
-          <p:cNvPr id="9" name="Text 7"/>
+          <p:cNvPr id="7" name="Text 5"/>
           <p:cNvSpPr/>
           <p:nvPr/>
         </p:nvSpPr>
@@ -1579,7 +1780,7 @@
       </p:sp>
       <p:sp>
         <p:nvSpPr>
-          <p:cNvPr id="10" name="Shape 8"/>
+          <p:cNvPr id="8" name="Shape 6"/>
           <p:cNvSpPr/>
           <p:nvPr/>
         </p:nvSpPr>
@@ -1604,7 +1805,7 @@
       </p:sp>
       <p:sp>
         <p:nvSpPr>
-          <p:cNvPr id="11" name="Text 9"/>
+          <p:cNvPr id="9" name="Text 7"/>
           <p:cNvSpPr/>
           <p:nvPr/>
         </p:nvSpPr>
@@ -1643,7 +1844,7 @@
       </p:sp>
       <p:sp>
         <p:nvSpPr>
-          <p:cNvPr id="12" name="Text 10"/>
+          <p:cNvPr id="10" name="Text 8"/>
           <p:cNvSpPr/>
           <p:nvPr/>
         </p:nvSpPr>
@@ -1682,7 +1883,7 @@
       </p:sp>
       <p:sp>
         <p:nvSpPr>
-          <p:cNvPr id="13" name="Text 11"/>
+          <p:cNvPr id="11" name="Text 9"/>
           <p:cNvSpPr/>
           <p:nvPr/>
         </p:nvSpPr>
@@ -1783,6 +1984,13 @@
             </a:outerShdw>
           </a:effectLst>
         </p:spPr>
+        <p:txBody>
+          <a:bodyPr/>
+          <a:lstStyle/>
+          <a:p>
+            <a:endParaRPr lang="en-IN" dirty="0"/>
+          </a:p>
+        </p:txBody>
       </p:sp>
       <p:sp>
         <p:nvSpPr>
@@ -1831,20 +2039,20 @@
         </p:nvSpPr>
         <p:spPr>
           <a:xfrm>
-            <a:off x="457200" y="822960"/>
-            <a:ext cx="3657600" cy="1005840"/>
-          </a:xfrm>
-          <a:prstGeom prst="rect">
-            <a:avLst/>
-          </a:prstGeom>
-          <a:noFill/>
-          <a:ln/>
-        </p:spPr>
-        <p:txBody>
-          <a:bodyPr wrap="square" rtlCol="0" anchor="ctr"/>
-          <a:lstStyle/>
-          <a:p>
-            <a:pPr marL="0" indent="0" algn="l">
+            <a:off x="457200" y="914400"/>
+            <a:ext cx="3657600" cy="850392"/>
+          </a:xfrm>
+          <a:prstGeom prst="rect">
+            <a:avLst/>
+          </a:prstGeom>
+          <a:noFill/>
+          <a:ln/>
+        </p:spPr>
+        <p:txBody>
+          <a:bodyPr wrap="square" rtlCol="0" anchor="ctr"/>
+          <a:lstStyle/>
+          <a:p>
+            <a:pPr marL="0" indent="0">
               <a:buNone/>
             </a:pPr>
             <a:r>
@@ -1861,7 +2069,7 @@
             <a:endParaRPr lang="en-US" sz="3200" dirty="0"/>
           </a:p>
           <a:p>
-            <a:pPr marL="0" indent="0" algn="l">
+            <a:pPr marL="0" indent="0">
               <a:buNone/>
             </a:pPr>
             <a:r>
@@ -1887,8 +2095,8 @@
         </p:nvSpPr>
         <p:spPr>
           <a:xfrm>
-            <a:off x="457200" y="2116836"/>
-            <a:ext cx="256032" cy="256032"/>
+            <a:off x="457200" y="2113529"/>
+            <a:ext cx="237744" cy="237744"/>
           </a:xfrm>
           <a:prstGeom prst="ellipse">
             <a:avLst/>
@@ -1912,20 +2120,20 @@
         </p:nvSpPr>
         <p:spPr>
           <a:xfrm>
-            <a:off x="822960" y="1965960"/>
-            <a:ext cx="3474720" cy="475488"/>
-          </a:xfrm>
-          <a:prstGeom prst="rect">
-            <a:avLst/>
-          </a:prstGeom>
-          <a:noFill/>
-          <a:ln/>
-        </p:spPr>
-        <p:txBody>
-          <a:bodyPr wrap="square" rtlCol="0" anchor="ctr"/>
-          <a:lstStyle/>
-          <a:p>
-            <a:pPr marL="0" indent="0" algn="l">
+            <a:off x="804672" y="2011680"/>
+            <a:ext cx="3520440" cy="457200"/>
+          </a:xfrm>
+          <a:prstGeom prst="rect">
+            <a:avLst/>
+          </a:prstGeom>
+          <a:noFill/>
+          <a:ln/>
+        </p:spPr>
+        <p:txBody>
+          <a:bodyPr wrap="square" rtlCol="0" anchor="ctr"/>
+          <a:lstStyle/>
+          <a:p>
+            <a:pPr marL="0" indent="0">
               <a:buNone/>
             </a:pPr>
             <a:r>
@@ -1951,8 +2159,8 @@
         </p:nvSpPr>
         <p:spPr>
           <a:xfrm>
-            <a:off x="457200" y="2568913"/>
-            <a:ext cx="256032" cy="256032"/>
+            <a:off x="457200" y="2468880"/>
+            <a:ext cx="237744" cy="237744"/>
           </a:xfrm>
           <a:prstGeom prst="ellipse">
             <a:avLst/>
@@ -1976,34 +2184,36 @@
         </p:nvSpPr>
         <p:spPr>
           <a:xfrm>
-            <a:off x="822960" y="2441448"/>
-            <a:ext cx="3474720" cy="365760"/>
-          </a:xfrm>
-          <a:prstGeom prst="rect">
-            <a:avLst/>
-          </a:prstGeom>
-          <a:noFill/>
-          <a:ln/>
-        </p:spPr>
-        <p:txBody>
-          <a:bodyPr wrap="square" rtlCol="0" anchor="ctr"/>
-          <a:lstStyle/>
-          <a:p>
-            <a:pPr marL="0" indent="0" algn="l">
-              <a:buNone/>
-            </a:pPr>
-            <a:r>
-              <a:rPr lang="en-US" sz="1300" dirty="0">
-                <a:solidFill>
-                  <a:srgbClr val="CBD5E1"/>
-                </a:solidFill>
-                <a:latin typeface="Calibri" pitchFamily="34" charset="0"/>
-                <a:ea typeface="Calibri" pitchFamily="34" charset="-122"/>
-                <a:cs typeface="Calibri" pitchFamily="34" charset="-120"/>
-              </a:rPr>
-              <a:t>Business users can't self-serve on warehouses</a:t>
-            </a:r>
-            <a:endParaRPr lang="en-US" sz="1300" dirty="0"/>
+            <a:off x="804672" y="2487167"/>
+            <a:ext cx="3520440" cy="740665"/>
+          </a:xfrm>
+          <a:prstGeom prst="rect">
+            <a:avLst/>
+          </a:prstGeom>
+          <a:noFill/>
+          <a:ln/>
+        </p:spPr>
+        <p:txBody>
+          <a:bodyPr wrap="square" rtlCol="0" anchor="ctr"/>
+          <a:lstStyle/>
+          <a:p>
+            <a:r>
+              <a:rPr lang="en-US" sz="1400" dirty="0">
+                <a:solidFill>
+                  <a:schemeClr val="bg1">
+                    <a:lumMod val="85000"/>
+                  </a:schemeClr>
+                </a:solidFill>
+              </a:rPr>
+              <a:t>Business intent often gets lost in translation when requirements move to downstream data teams, leading to delays, misalignment, and rework</a:t>
+            </a:r>
+            <a:endParaRPr lang="en-US" sz="1300" dirty="0">
+              <a:solidFill>
+                <a:schemeClr val="bg1">
+                  <a:lumMod val="85000"/>
+                </a:schemeClr>
+              </a:solidFill>
+            </a:endParaRPr>
           </a:p>
         </p:txBody>
       </p:sp>
@@ -2015,8 +2225,8 @@
         </p:nvSpPr>
         <p:spPr>
           <a:xfrm>
-            <a:off x="457200" y="2971800"/>
-            <a:ext cx="256032" cy="256032"/>
+            <a:off x="493776" y="3378709"/>
+            <a:ext cx="237744" cy="237744"/>
           </a:xfrm>
           <a:prstGeom prst="ellipse">
             <a:avLst/>
@@ -2031,6 +2241,13 @@
             <a:prstDash val="solid"/>
           </a:ln>
         </p:spPr>
+        <p:txBody>
+          <a:bodyPr/>
+          <a:lstStyle/>
+          <a:p>
+            <a:endParaRPr lang="en-IN" dirty="0"/>
+          </a:p>
+        </p:txBody>
       </p:sp>
       <p:sp>
         <p:nvSpPr>
@@ -2040,20 +2257,20 @@
         </p:nvSpPr>
         <p:spPr>
           <a:xfrm>
-            <a:off x="822960" y="2916936"/>
-            <a:ext cx="3474720" cy="365760"/>
-          </a:xfrm>
-          <a:prstGeom prst="rect">
-            <a:avLst/>
-          </a:prstGeom>
-          <a:noFill/>
-          <a:ln/>
-        </p:spPr>
-        <p:txBody>
-          <a:bodyPr wrap="square" rtlCol="0" anchor="ctr"/>
-          <a:lstStyle/>
-          <a:p>
-            <a:pPr marL="0" indent="0" algn="l">
+            <a:off x="804672" y="2871216"/>
+            <a:ext cx="3520440" cy="1316736"/>
+          </a:xfrm>
+          <a:prstGeom prst="rect">
+            <a:avLst/>
+          </a:prstGeom>
+          <a:noFill/>
+          <a:ln/>
+        </p:spPr>
+        <p:txBody>
+          <a:bodyPr wrap="square" rtlCol="0" anchor="ctr"/>
+          <a:lstStyle/>
+          <a:p>
+            <a:pPr marL="0" indent="0">
               <a:buNone/>
             </a:pPr>
             <a:r>
@@ -2079,8 +2296,8 @@
         </p:nvSpPr>
         <p:spPr>
           <a:xfrm>
-            <a:off x="457200" y="3447288"/>
-            <a:ext cx="256032" cy="256032"/>
+            <a:off x="493776" y="3813048"/>
+            <a:ext cx="237744" cy="237744"/>
           </a:xfrm>
           <a:prstGeom prst="ellipse">
             <a:avLst/>
@@ -2104,20 +2321,20 @@
         </p:nvSpPr>
         <p:spPr>
           <a:xfrm>
-            <a:off x="822960" y="3392424"/>
-            <a:ext cx="3474720" cy="365760"/>
-          </a:xfrm>
-          <a:prstGeom prst="rect">
-            <a:avLst/>
-          </a:prstGeom>
-          <a:noFill/>
-          <a:ln/>
-        </p:spPr>
-        <p:txBody>
-          <a:bodyPr wrap="square" rtlCol="0" anchor="ctr"/>
-          <a:lstStyle/>
-          <a:p>
-            <a:pPr marL="0" indent="0" algn="l">
+            <a:off x="804672" y="3346704"/>
+            <a:ext cx="3520440" cy="1160445"/>
+          </a:xfrm>
+          <a:prstGeom prst="rect">
+            <a:avLst/>
+          </a:prstGeom>
+          <a:noFill/>
+          <a:ln/>
+        </p:spPr>
+        <p:txBody>
+          <a:bodyPr wrap="square" rtlCol="0" anchor="ctr"/>
+          <a:lstStyle/>
+          <a:p>
+            <a:pPr marL="0" indent="0">
               <a:buNone/>
             </a:pPr>
             <a:r>
@@ -2129,7 +2346,7 @@
                 <a:ea typeface="Calibri" pitchFamily="34" charset="-122"/>
                 <a:cs typeface="Calibri" pitchFamily="34" charset="-120"/>
               </a:rPr>
-              <a:t>Questions get lost in Slack threads</a:t>
+              <a:t>Questions get lost in team's chat</a:t>
             </a:r>
             <a:endParaRPr lang="en-US" sz="1300" dirty="0"/>
           </a:p>
@@ -2168,7 +2385,7 @@
                 <a:ea typeface="Calibri" pitchFamily="34" charset="-122"/>
                 <a:cs typeface="Calibri" pitchFamily="34" charset="-120"/>
               </a:rPr>
-              <a:t>HOW BIG COMPANIES SOLVED IT</a:t>
+              <a:t>WHY THE GAP PERSISTS</a:t>
             </a:r>
             <a:endParaRPr lang="en-US" sz="1000" dirty="0"/>
           </a:p>
@@ -2182,8 +2399,8 @@
         </p:nvSpPr>
         <p:spPr>
           <a:xfrm>
-            <a:off x="4754880" y="868680"/>
-            <a:ext cx="3749040" cy="1097280"/>
+            <a:off x="4754880" y="841248"/>
+            <a:ext cx="3749040" cy="1078992"/>
           </a:xfrm>
           <a:prstGeom prst="rect">
             <a:avLst/>
@@ -2208,14 +2425,39 @@
       </p:sp>
       <p:sp>
         <p:nvSpPr>
-          <p:cNvPr id="15" name="Text 13"/>
-          <p:cNvSpPr/>
-          <p:nvPr/>
-        </p:nvSpPr>
-        <p:spPr>
-          <a:xfrm>
-            <a:off x="4937760" y="960120"/>
-            <a:ext cx="3383280" cy="274320"/>
+          <p:cNvPr id="15" name="Shape 13"/>
+          <p:cNvSpPr/>
+          <p:nvPr/>
+        </p:nvSpPr>
+        <p:spPr>
+          <a:xfrm>
+            <a:off x="4754880" y="841248"/>
+            <a:ext cx="54864" cy="1078992"/>
+          </a:xfrm>
+          <a:prstGeom prst="rect">
+            <a:avLst/>
+          </a:prstGeom>
+          <a:solidFill>
+            <a:srgbClr val="F59E0B"/>
+          </a:solidFill>
+          <a:ln w="12700">
+            <a:solidFill>
+              <a:srgbClr val="F59E0B"/>
+            </a:solidFill>
+            <a:prstDash val="solid"/>
+          </a:ln>
+        </p:spPr>
+      </p:sp>
+      <p:sp>
+        <p:nvSpPr>
+          <p:cNvPr id="16" name="Text 14"/>
+          <p:cNvSpPr/>
+          <p:nvPr/>
+        </p:nvSpPr>
+        <p:spPr>
+          <a:xfrm>
+            <a:off x="4937760" y="914400"/>
+            <a:ext cx="3383280" cy="402336"/>
           </a:xfrm>
           <a:prstGeom prst="rect">
             <a:avLst/>
@@ -2231,30 +2473,30 @@
               <a:buNone/>
             </a:pPr>
             <a:r>
-              <a:rPr lang="en-US" sz="1300" b="1" dirty="0">
-                <a:solidFill>
-                  <a:srgbClr val="FFFFFF"/>
-                </a:solidFill>
-                <a:latin typeface="Calibri" pitchFamily="34" charset="0"/>
-                <a:ea typeface="Calibri" pitchFamily="34" charset="-122"/>
-                <a:cs typeface="Calibri" pitchFamily="34" charset="-120"/>
-              </a:rPr>
-              <a:t>Uber</a:t>
-            </a:r>
-            <a:endParaRPr lang="en-US" sz="1300" dirty="0"/>
-          </a:p>
-        </p:txBody>
-      </p:sp>
-      <p:sp>
-        <p:nvSpPr>
-          <p:cNvPr id="16" name="Text 14"/>
-          <p:cNvSpPr/>
-          <p:nvPr/>
-        </p:nvSpPr>
-        <p:spPr>
-          <a:xfrm>
-            <a:off x="4937760" y="1252728"/>
-            <a:ext cx="3383280" cy="594360"/>
+              <a:rPr lang="en-US" sz="2600" b="1" dirty="0">
+                <a:solidFill>
+                  <a:srgbClr val="F59E0B"/>
+                </a:solidFill>
+                <a:latin typeface="Trebuchet MS" pitchFamily="34" charset="0"/>
+                <a:ea typeface="Trebuchet MS" pitchFamily="34" charset="-122"/>
+                <a:cs typeface="Trebuchet MS" pitchFamily="34" charset="-120"/>
+              </a:rPr>
+              <a:t>3–5 days</a:t>
+            </a:r>
+            <a:endParaRPr lang="en-US" sz="2600" dirty="0"/>
+          </a:p>
+        </p:txBody>
+      </p:sp>
+      <p:sp>
+        <p:nvSpPr>
+          <p:cNvPr id="17" name="Text 15"/>
+          <p:cNvSpPr/>
+          <p:nvPr/>
+        </p:nvSpPr>
+        <p:spPr>
+          <a:xfrm>
+            <a:off x="4937760" y="1335024"/>
+            <a:ext cx="3383280" cy="512064"/>
           </a:xfrm>
           <a:prstGeom prst="rect">
             <a:avLst/>
@@ -2278,22 +2520,39 @@
                 <a:ea typeface="Calibri" pitchFamily="34" charset="-122"/>
                 <a:cs typeface="Calibri" pitchFamily="34" charset="-120"/>
               </a:rPr>
-              <a:t>Built QueryGPT — internal NL-to-SQL over Presto/Hive; reduced analyst query time by ~40%</a:t>
+              <a:t>average time to fulfil a business data request</a:t>
             </a:r>
             <a:endParaRPr lang="en-US" sz="1100" dirty="0"/>
           </a:p>
-        </p:txBody>
-      </p:sp>
-      <p:sp>
-        <p:nvSpPr>
-          <p:cNvPr id="17" name="Shape 15"/>
-          <p:cNvSpPr/>
-          <p:nvPr/>
-        </p:nvSpPr>
-        <p:spPr>
-          <a:xfrm>
-            <a:off x="4754880" y="2057400"/>
-            <a:ext cx="3749040" cy="1097280"/>
+          <a:p>
+            <a:pPr marL="0" indent="0">
+              <a:buNone/>
+            </a:pPr>
+            <a:r>
+              <a:rPr lang="en-US" sz="1100" dirty="0">
+                <a:solidFill>
+                  <a:srgbClr val="94A3B8"/>
+                </a:solidFill>
+                <a:latin typeface="Calibri" pitchFamily="34" charset="0"/>
+                <a:ea typeface="Calibri" pitchFamily="34" charset="-122"/>
+                <a:cs typeface="Calibri" pitchFamily="34" charset="-120"/>
+              </a:rPr>
+              <a:t>via the engineering queue</a:t>
+            </a:r>
+            <a:endParaRPr lang="en-US" sz="1100" dirty="0"/>
+          </a:p>
+        </p:txBody>
+      </p:sp>
+      <p:sp>
+        <p:nvSpPr>
+          <p:cNvPr id="18" name="Shape 16"/>
+          <p:cNvSpPr/>
+          <p:nvPr/>
+        </p:nvSpPr>
+        <p:spPr>
+          <a:xfrm>
+            <a:off x="4754880" y="2011680"/>
+            <a:ext cx="3749040" cy="1078992"/>
           </a:xfrm>
           <a:prstGeom prst="rect">
             <a:avLst/>
@@ -2318,14 +2577,39 @@
       </p:sp>
       <p:sp>
         <p:nvSpPr>
-          <p:cNvPr id="18" name="Text 16"/>
-          <p:cNvSpPr/>
-          <p:nvPr/>
-        </p:nvSpPr>
-        <p:spPr>
-          <a:xfrm>
-            <a:off x="4937760" y="2148840"/>
-            <a:ext cx="3383280" cy="274320"/>
+          <p:cNvPr id="19" name="Shape 17"/>
+          <p:cNvSpPr/>
+          <p:nvPr/>
+        </p:nvSpPr>
+        <p:spPr>
+          <a:xfrm>
+            <a:off x="4754880" y="2011680"/>
+            <a:ext cx="54864" cy="1078992"/>
+          </a:xfrm>
+          <a:prstGeom prst="rect">
+            <a:avLst/>
+          </a:prstGeom>
+          <a:solidFill>
+            <a:srgbClr val="8B5CF6"/>
+          </a:solidFill>
+          <a:ln w="12700">
+            <a:solidFill>
+              <a:srgbClr val="8B5CF6"/>
+            </a:solidFill>
+            <a:prstDash val="solid"/>
+          </a:ln>
+        </p:spPr>
+      </p:sp>
+      <p:sp>
+        <p:nvSpPr>
+          <p:cNvPr id="20" name="Text 18"/>
+          <p:cNvSpPr/>
+          <p:nvPr/>
+        </p:nvSpPr>
+        <p:spPr>
+          <a:xfrm>
+            <a:off x="4937760" y="2084832"/>
+            <a:ext cx="3383280" cy="402336"/>
           </a:xfrm>
           <a:prstGeom prst="rect">
             <a:avLst/>
@@ -2341,30 +2625,30 @@
               <a:buNone/>
             </a:pPr>
             <a:r>
-              <a:rPr lang="en-US" sz="1300" b="1" dirty="0">
-                <a:solidFill>
-                  <a:srgbClr val="FFFFFF"/>
-                </a:solidFill>
-                <a:latin typeface="Calibri" pitchFamily="34" charset="0"/>
-                <a:ea typeface="Calibri" pitchFamily="34" charset="-122"/>
-                <a:cs typeface="Calibri" pitchFamily="34" charset="-120"/>
-              </a:rPr>
-              <a:t>Airbnb</a:t>
-            </a:r>
-            <a:endParaRPr lang="en-US" sz="1300" dirty="0"/>
-          </a:p>
-        </p:txBody>
-      </p:sp>
-      <p:sp>
-        <p:nvSpPr>
-          <p:cNvPr id="19" name="Text 17"/>
-          <p:cNvSpPr/>
-          <p:nvPr/>
-        </p:nvSpPr>
-        <p:spPr>
-          <a:xfrm>
-            <a:off x="4937760" y="2441448"/>
-            <a:ext cx="3383280" cy="594360"/>
+              <a:rPr lang="en-US" sz="2600" b="1" dirty="0">
+                <a:solidFill>
+                  <a:srgbClr val="8B5CF6"/>
+                </a:solidFill>
+                <a:latin typeface="Trebuchet MS" pitchFamily="34" charset="0"/>
+                <a:ea typeface="Trebuchet MS" pitchFamily="34" charset="-122"/>
+                <a:cs typeface="Trebuchet MS" pitchFamily="34" charset="-120"/>
+              </a:rPr>
+              <a:t>80%</a:t>
+            </a:r>
+            <a:endParaRPr lang="en-US" sz="2600" dirty="0"/>
+          </a:p>
+        </p:txBody>
+      </p:sp>
+      <p:sp>
+        <p:nvSpPr>
+          <p:cNvPr id="21" name="Text 19"/>
+          <p:cNvSpPr/>
+          <p:nvPr/>
+        </p:nvSpPr>
+        <p:spPr>
+          <a:xfrm>
+            <a:off x="4937760" y="2505456"/>
+            <a:ext cx="3383280" cy="512064"/>
           </a:xfrm>
           <a:prstGeom prst="rect">
             <a:avLst/>
@@ -2388,22 +2672,39 @@
                 <a:ea typeface="Calibri" pitchFamily="34" charset="-122"/>
                 <a:cs typeface="Calibri" pitchFamily="34" charset="-120"/>
               </a:rPr>
-              <a:t>Built Minerva — semantic layer + NL query interface; democratized data access for non-engineers</a:t>
+              <a:t>of business users cannot query their warehouse</a:t>
             </a:r>
             <a:endParaRPr lang="en-US" sz="1100" dirty="0"/>
           </a:p>
-        </p:txBody>
-      </p:sp>
-      <p:sp>
-        <p:nvSpPr>
-          <p:cNvPr id="20" name="Shape 18"/>
-          <p:cNvSpPr/>
-          <p:nvPr/>
-        </p:nvSpPr>
-        <p:spPr>
-          <a:xfrm>
-            <a:off x="4754880" y="3246120"/>
-            <a:ext cx="3749040" cy="1097280"/>
+          <a:p>
+            <a:pPr marL="0" indent="0">
+              <a:buNone/>
+            </a:pPr>
+            <a:r>
+              <a:rPr lang="en-US" sz="1100" dirty="0">
+                <a:solidFill>
+                  <a:srgbClr val="94A3B8"/>
+                </a:solidFill>
+                <a:latin typeface="Calibri" pitchFamily="34" charset="0"/>
+                <a:ea typeface="Calibri" pitchFamily="34" charset="-122"/>
+                <a:cs typeface="Calibri" pitchFamily="34" charset="-120"/>
+              </a:rPr>
+              <a:t>directly without SQL expertise</a:t>
+            </a:r>
+            <a:endParaRPr lang="en-US" sz="1100" dirty="0"/>
+          </a:p>
+        </p:txBody>
+      </p:sp>
+      <p:sp>
+        <p:nvSpPr>
+          <p:cNvPr id="22" name="Shape 20"/>
+          <p:cNvSpPr/>
+          <p:nvPr/>
+        </p:nvSpPr>
+        <p:spPr>
+          <a:xfrm>
+            <a:off x="4754880" y="3182112"/>
+            <a:ext cx="3749040" cy="1078992"/>
           </a:xfrm>
           <a:prstGeom prst="rect">
             <a:avLst/>
@@ -2428,14 +2729,39 @@
       </p:sp>
       <p:sp>
         <p:nvSpPr>
-          <p:cNvPr id="21" name="Text 19"/>
-          <p:cNvSpPr/>
-          <p:nvPr/>
-        </p:nvSpPr>
-        <p:spPr>
-          <a:xfrm>
-            <a:off x="4937760" y="3337560"/>
-            <a:ext cx="3383280" cy="274320"/>
+          <p:cNvPr id="23" name="Shape 21"/>
+          <p:cNvSpPr/>
+          <p:nvPr/>
+        </p:nvSpPr>
+        <p:spPr>
+          <a:xfrm>
+            <a:off x="4754880" y="3182112"/>
+            <a:ext cx="54864" cy="1078992"/>
+          </a:xfrm>
+          <a:prstGeom prst="rect">
+            <a:avLst/>
+          </a:prstGeom>
+          <a:solidFill>
+            <a:srgbClr val="EF4444"/>
+          </a:solidFill>
+          <a:ln w="12700">
+            <a:solidFill>
+              <a:srgbClr val="EF4444"/>
+            </a:solidFill>
+            <a:prstDash val="solid"/>
+          </a:ln>
+        </p:spPr>
+      </p:sp>
+      <p:sp>
+        <p:nvSpPr>
+          <p:cNvPr id="24" name="Text 22"/>
+          <p:cNvSpPr/>
+          <p:nvPr/>
+        </p:nvSpPr>
+        <p:spPr>
+          <a:xfrm>
+            <a:off x="4937760" y="3255264"/>
+            <a:ext cx="3383280" cy="402336"/>
           </a:xfrm>
           <a:prstGeom prst="rect">
             <a:avLst/>
@@ -2451,30 +2777,30 @@
               <a:buNone/>
             </a:pPr>
             <a:r>
-              <a:rPr lang="en-US" sz="1300" b="1" dirty="0">
-                <a:solidFill>
-                  <a:srgbClr val="FFFFFF"/>
-                </a:solidFill>
-                <a:latin typeface="Calibri" pitchFamily="34" charset="0"/>
-                <a:ea typeface="Calibri" pitchFamily="34" charset="-122"/>
-                <a:cs typeface="Calibri" pitchFamily="34" charset="-120"/>
-              </a:rPr>
-              <a:t>LinkedIn</a:t>
-            </a:r>
-            <a:endParaRPr lang="en-US" sz="1300" dirty="0"/>
-          </a:p>
-        </p:txBody>
-      </p:sp>
-      <p:sp>
-        <p:nvSpPr>
-          <p:cNvPr id="22" name="Text 20"/>
-          <p:cNvSpPr/>
-          <p:nvPr/>
-        </p:nvSpPr>
-        <p:spPr>
-          <a:xfrm>
-            <a:off x="4937760" y="3630168"/>
-            <a:ext cx="3383280" cy="594360"/>
+              <a:rPr lang="en-US" sz="2600" b="1" dirty="0">
+                <a:solidFill>
+                  <a:srgbClr val="EF4444"/>
+                </a:solidFill>
+                <a:latin typeface="Trebuchet MS" pitchFamily="34" charset="0"/>
+                <a:ea typeface="Trebuchet MS" pitchFamily="34" charset="-122"/>
+                <a:cs typeface="Trebuchet MS" pitchFamily="34" charset="-120"/>
+              </a:rPr>
+              <a:t>60%+</a:t>
+            </a:r>
+            <a:endParaRPr lang="en-US" sz="2600" dirty="0"/>
+          </a:p>
+        </p:txBody>
+      </p:sp>
+      <p:sp>
+        <p:nvSpPr>
+          <p:cNvPr id="25" name="Text 23"/>
+          <p:cNvSpPr/>
+          <p:nvPr/>
+        </p:nvSpPr>
+        <p:spPr>
+          <a:xfrm>
+            <a:off x="4937760" y="3675888"/>
+            <a:ext cx="3383280" cy="512064"/>
           </a:xfrm>
           <a:prstGeom prst="rect">
             <a:avLst/>
@@ -2498,22 +2824,39 @@
                 <a:ea typeface="Calibri" pitchFamily="34" charset="-122"/>
                 <a:cs typeface="Calibri" pitchFamily="34" charset="-120"/>
               </a:rPr>
-              <a:t>Built ThirdEye + DARWIN — self-serve analytics with NL queries over their warehouse</a:t>
+              <a:t>of data team bandwidth consumed by ad-hoc</a:t>
             </a:r>
             <a:endParaRPr lang="en-US" sz="1100" dirty="0"/>
           </a:p>
-        </p:txBody>
-      </p:sp>
-      <p:sp>
-        <p:nvSpPr>
-          <p:cNvPr id="23" name="Shape 21"/>
-          <p:cNvSpPr/>
-          <p:nvPr/>
-        </p:nvSpPr>
-        <p:spPr>
-          <a:xfrm>
-            <a:off x="4754880" y="4160520"/>
-            <a:ext cx="3749040" cy="548640"/>
+          <a:p>
+            <a:pPr marL="0" indent="0">
+              <a:buNone/>
+            </a:pPr>
+            <a:r>
+              <a:rPr lang="en-US" sz="1100" dirty="0">
+                <a:solidFill>
+                  <a:srgbClr val="94A3B8"/>
+                </a:solidFill>
+                <a:latin typeface="Calibri" pitchFamily="34" charset="0"/>
+                <a:ea typeface="Calibri" pitchFamily="34" charset="-122"/>
+                <a:cs typeface="Calibri" pitchFamily="34" charset="-120"/>
+              </a:rPr>
+              <a:t>report requests vs. strategic work</a:t>
+            </a:r>
+            <a:endParaRPr lang="en-US" sz="1100" dirty="0"/>
+          </a:p>
+        </p:txBody>
+      </p:sp>
+      <p:sp>
+        <p:nvSpPr>
+          <p:cNvPr id="26" name="Shape 24"/>
+          <p:cNvSpPr/>
+          <p:nvPr/>
+        </p:nvSpPr>
+        <p:spPr>
+          <a:xfrm>
+            <a:off x="4754880" y="4352544"/>
+            <a:ext cx="3749040" cy="502920"/>
           </a:xfrm>
           <a:prstGeom prst="rect">
             <a:avLst/>
@@ -2538,14 +2881,14 @@
       </p:sp>
       <p:sp>
         <p:nvSpPr>
-          <p:cNvPr id="24" name="Text 22"/>
-          <p:cNvSpPr/>
-          <p:nvPr/>
-        </p:nvSpPr>
-        <p:spPr>
-          <a:xfrm>
-            <a:off x="4846320" y="4206240"/>
-            <a:ext cx="3566160" cy="457200"/>
+          <p:cNvPr id="27" name="Text 25"/>
+          <p:cNvSpPr/>
+          <p:nvPr/>
+        </p:nvSpPr>
+        <p:spPr>
+          <a:xfrm>
+            <a:off x="4846320" y="4379976"/>
+            <a:ext cx="3566160" cy="438912"/>
           </a:xfrm>
           <a:prstGeom prst="rect">
             <a:avLst/>
@@ -2569,9 +2912,83 @@
                 <a:ea typeface="Calibri" pitchFamily="34" charset="-122"/>
                 <a:cs typeface="Calibri" pitchFamily="34" charset="-120"/>
               </a:rPr>
-              <a:t>"DataPilot brings this to any warehouse — out of the box."</a:t>
+              <a:t>"DataPilot brings self-serve analytics to any warehouse — out of the box."</a:t>
             </a:r>
             <a:endParaRPr lang="en-US" sz="1200" dirty="0"/>
+          </a:p>
+        </p:txBody>
+      </p:sp>
+      <p:sp>
+        <p:nvSpPr>
+          <p:cNvPr id="28" name="Shape 3">
+            <a:extLst>
+              <a:ext uri="{FF2B5EF4-FFF2-40B4-BE49-F238E27FC236}">
+                <a16:creationId xmlns:a16="http://schemas.microsoft.com/office/drawing/2014/main" id="{CE49B4A1-D391-17BB-F6C5-95B563CC5A6D}"/>
+              </a:ext>
+            </a:extLst>
+          </p:cNvPr>
+          <p:cNvSpPr/>
+          <p:nvPr/>
+        </p:nvSpPr>
+        <p:spPr>
+          <a:xfrm>
+            <a:off x="509600" y="4233672"/>
+            <a:ext cx="237744" cy="237744"/>
+          </a:xfrm>
+          <a:prstGeom prst="ellipse">
+            <a:avLst/>
+          </a:prstGeom>
+          <a:solidFill>
+            <a:srgbClr val="F59E0B"/>
+          </a:solidFill>
+          <a:ln w="12700">
+            <a:solidFill>
+              <a:srgbClr val="F59E0B"/>
+            </a:solidFill>
+            <a:prstDash val="solid"/>
+          </a:ln>
+        </p:spPr>
+      </p:sp>
+      <p:sp>
+        <p:nvSpPr>
+          <p:cNvPr id="33" name="Text 4">
+            <a:extLst>
+              <a:ext uri="{FF2B5EF4-FFF2-40B4-BE49-F238E27FC236}">
+                <a16:creationId xmlns:a16="http://schemas.microsoft.com/office/drawing/2014/main" id="{CD1DC683-4AF4-4D5F-3B2F-A21DDB747BA6}"/>
+              </a:ext>
+            </a:extLst>
+          </p:cNvPr>
+          <p:cNvSpPr/>
+          <p:nvPr/>
+        </p:nvSpPr>
+        <p:spPr>
+          <a:xfrm>
+            <a:off x="820496" y="4187952"/>
+            <a:ext cx="3657016" cy="319197"/>
+          </a:xfrm>
+          <a:prstGeom prst="rect">
+            <a:avLst/>
+          </a:prstGeom>
+          <a:noFill/>
+          <a:ln/>
+        </p:spPr>
+        <p:txBody>
+          <a:bodyPr wrap="square" rtlCol="0" anchor="ctr"/>
+          <a:lstStyle/>
+          <a:p>
+            <a:pPr marL="0" indent="0">
+              <a:buNone/>
+            </a:pPr>
+            <a:r>
+              <a:rPr lang="en-US" sz="1300" dirty="0">
+                <a:solidFill>
+                  <a:schemeClr val="bg1">
+                    <a:lumMod val="85000"/>
+                  </a:schemeClr>
+                </a:solidFill>
+              </a:rPr>
+              <a:t>Security concerns on providing access to multiple teams</a:t>
+            </a:r>
           </a:p>
         </p:txBody>
       </p:sp>
@@ -2617,7 +3034,7 @@
         <p:spPr>
           <a:xfrm>
             <a:off x="365760" y="182880"/>
-            <a:ext cx="6400800" cy="411480"/>
+            <a:ext cx="8412480" cy="384048"/>
           </a:xfrm>
           <a:prstGeom prst="rect">
             <a:avLst/>
@@ -2655,8 +3072,8 @@
         </p:nvSpPr>
         <p:spPr>
           <a:xfrm>
-            <a:off x="365760" y="621792"/>
-            <a:ext cx="7315200" cy="256032"/>
+            <a:off x="365760" y="594360"/>
+            <a:ext cx="8412480" cy="237744"/>
           </a:xfrm>
           <a:prstGeom prst="rect">
             <a:avLst/>
@@ -2672,7 +3089,7 @@
               <a:buNone/>
             </a:pPr>
             <a:r>
-              <a:rPr lang="en-US" sz="1200" dirty="0">
+              <a:rPr lang="en-US" sz="1100" dirty="0">
                 <a:solidFill>
                   <a:srgbClr val="64748B"/>
                 </a:solidFill>
@@ -2680,9 +3097,9 @@
                 <a:ea typeface="Calibri" pitchFamily="34" charset="-122"/>
                 <a:cs typeface="Calibri" pitchFamily="34" charset="-120"/>
               </a:rPr>
-              <a:t>A 6-node LangGraph pipeline with memory, guardrails &amp; human-in-the-loop</a:t>
-            </a:r>
-            <a:endParaRPr lang="en-US" sz="1200" dirty="0"/>
+              <a:t>Hub-and-spoke: Orchestrator (LLM) decides which agent runs next — no hardcoded routing paths</a:t>
+            </a:r>
+            <a:endParaRPr lang="en-US" sz="1100" dirty="0"/>
           </a:p>
         </p:txBody>
       </p:sp>
@@ -2694,14 +3111,149 @@
         </p:nvSpPr>
         <p:spPr>
           <a:xfrm>
-            <a:off x="457200" y="749808"/>
-            <a:ext cx="1828800" cy="502920"/>
-          </a:xfrm>
-          <a:prstGeom prst="rect">
-            <a:avLst/>
-          </a:prstGeom>
-          <a:solidFill>
-            <a:srgbClr val="1E1040"/>
+            <a:off x="3520440" y="1755648"/>
+            <a:ext cx="2103120" cy="868680"/>
+          </a:xfrm>
+          <a:prstGeom prst="rect">
+            <a:avLst/>
+          </a:prstGeom>
+          <a:solidFill>
+            <a:srgbClr val="101C35"/>
+          </a:solidFill>
+          <a:ln w="12700">
+            <a:solidFill>
+              <a:srgbClr val="06B6D4"/>
+            </a:solidFill>
+            <a:prstDash val="solid"/>
+          </a:ln>
+          <a:effectLst>
+            <a:outerShdw blurRad="101600" dist="38100" dir="8100000" algn="bl" rotWithShape="0">
+              <a:srgbClr val="000000">
+                <a:alpha val="25000"/>
+              </a:srgbClr>
+            </a:outerShdw>
+          </a:effectLst>
+        </p:spPr>
+      </p:sp>
+      <p:sp>
+        <p:nvSpPr>
+          <p:cNvPr id="5" name="Shape 3"/>
+          <p:cNvSpPr/>
+          <p:nvPr/>
+        </p:nvSpPr>
+        <p:spPr>
+          <a:xfrm>
+            <a:off x="3520440" y="1755648"/>
+            <a:ext cx="73152" cy="868680"/>
+          </a:xfrm>
+          <a:prstGeom prst="rect">
+            <a:avLst/>
+          </a:prstGeom>
+          <a:solidFill>
+            <a:srgbClr val="06B6D4"/>
+          </a:solidFill>
+          <a:ln w="12700">
+            <a:solidFill>
+              <a:srgbClr val="06B6D4"/>
+            </a:solidFill>
+            <a:prstDash val="solid"/>
+          </a:ln>
+        </p:spPr>
+      </p:sp>
+      <p:sp>
+        <p:nvSpPr>
+          <p:cNvPr id="6" name="Text 4"/>
+          <p:cNvSpPr/>
+          <p:nvPr/>
+        </p:nvSpPr>
+        <p:spPr>
+          <a:xfrm>
+            <a:off x="3648456" y="1847088"/>
+            <a:ext cx="1938528" cy="292608"/>
+          </a:xfrm>
+          <a:prstGeom prst="rect">
+            <a:avLst/>
+          </a:prstGeom>
+          <a:noFill/>
+          <a:ln/>
+        </p:spPr>
+        <p:txBody>
+          <a:bodyPr wrap="square" rtlCol="0" anchor="ctr"/>
+          <a:lstStyle/>
+          <a:p>
+            <a:pPr marL="0" indent="0">
+              <a:buNone/>
+            </a:pPr>
+            <a:r>
+              <a:rPr lang="en-US" sz="1400" b="1" dirty="0">
+                <a:solidFill>
+                  <a:srgbClr val="FFFFFF"/>
+                </a:solidFill>
+                <a:latin typeface="Calibri" pitchFamily="34" charset="0"/>
+                <a:ea typeface="Calibri" pitchFamily="34" charset="-122"/>
+                <a:cs typeface="Calibri" pitchFamily="34" charset="-120"/>
+              </a:rPr>
+              <a:t>Orchestrator</a:t>
+            </a:r>
+            <a:endParaRPr lang="en-US" sz="1400" dirty="0"/>
+          </a:p>
+        </p:txBody>
+      </p:sp>
+      <p:sp>
+        <p:nvSpPr>
+          <p:cNvPr id="7" name="Text 5"/>
+          <p:cNvSpPr/>
+          <p:nvPr/>
+        </p:nvSpPr>
+        <p:spPr>
+          <a:xfrm>
+            <a:off x="3648456" y="2194560"/>
+            <a:ext cx="1938528" cy="292608"/>
+          </a:xfrm>
+          <a:prstGeom prst="rect">
+            <a:avLst/>
+          </a:prstGeom>
+          <a:noFill/>
+          <a:ln/>
+        </p:spPr>
+        <p:txBody>
+          <a:bodyPr wrap="square" rtlCol="0" anchor="ctr"/>
+          <a:lstStyle/>
+          <a:p>
+            <a:pPr marL="0" indent="0">
+              <a:buNone/>
+            </a:pPr>
+            <a:r>
+              <a:rPr lang="en-US" sz="1000" dirty="0">
+                <a:solidFill>
+                  <a:srgbClr val="06B6D4"/>
+                </a:solidFill>
+                <a:latin typeface="Calibri" pitchFamily="34" charset="0"/>
+                <a:ea typeface="Calibri" pitchFamily="34" charset="-122"/>
+                <a:cs typeface="Calibri" pitchFamily="34" charset="-120"/>
+              </a:rPr>
+              <a:t>LLM-powered dynamic router</a:t>
+            </a:r>
+            <a:endParaRPr lang="en-US" sz="1000" dirty="0"/>
+          </a:p>
+        </p:txBody>
+      </p:sp>
+      <p:sp>
+        <p:nvSpPr>
+          <p:cNvPr id="8" name="Shape 6"/>
+          <p:cNvSpPr/>
+          <p:nvPr/>
+        </p:nvSpPr>
+        <p:spPr>
+          <a:xfrm>
+            <a:off x="228600" y="841248"/>
+            <a:ext cx="1463040" cy="475488"/>
+          </a:xfrm>
+          <a:prstGeom prst="rect">
+            <a:avLst/>
+          </a:prstGeom>
+          <a:solidFill>
+            <a:srgbClr val="1E2D4F"/>
           </a:solidFill>
           <a:ln w="12700">
             <a:solidFill>
@@ -2720,92 +3272,14 @@
       </p:sp>
       <p:sp>
         <p:nvSpPr>
-          <p:cNvPr id="5" name="Text 3"/>
-          <p:cNvSpPr/>
-          <p:nvPr/>
-        </p:nvSpPr>
-        <p:spPr>
-          <a:xfrm>
-            <a:off x="502920" y="795528"/>
-            <a:ext cx="1737360" cy="201168"/>
-          </a:xfrm>
-          <a:prstGeom prst="rect">
-            <a:avLst/>
-          </a:prstGeom>
-          <a:noFill/>
-          <a:ln/>
-        </p:spPr>
-        <p:txBody>
-          <a:bodyPr wrap="square" rtlCol="0" anchor="ctr"/>
-          <a:lstStyle/>
-          <a:p>
-            <a:pPr marL="0" indent="0">
-              <a:buNone/>
-            </a:pPr>
-            <a:r>
-              <a:rPr lang="en-US" sz="1000" b="1" dirty="0">
-                <a:solidFill>
-                  <a:srgbClr val="8B5CF6"/>
-                </a:solidFill>
-                <a:latin typeface="Calibri" pitchFamily="34" charset="0"/>
-                <a:ea typeface="Calibri" pitchFamily="34" charset="-122"/>
-                <a:cs typeface="Calibri" pitchFamily="34" charset="-120"/>
-              </a:rPr>
-              <a:t>pgvector Query KB</a:t>
-            </a:r>
-            <a:endParaRPr lang="en-US" sz="1000" dirty="0"/>
-          </a:p>
-        </p:txBody>
-      </p:sp>
-      <p:sp>
-        <p:nvSpPr>
-          <p:cNvPr id="6" name="Text 4"/>
-          <p:cNvSpPr/>
-          <p:nvPr/>
-        </p:nvSpPr>
-        <p:spPr>
-          <a:xfrm>
-            <a:off x="502920" y="996696"/>
-            <a:ext cx="1737360" cy="201168"/>
-          </a:xfrm>
-          <a:prstGeom prst="rect">
-            <a:avLst/>
-          </a:prstGeom>
-          <a:noFill/>
-          <a:ln/>
-        </p:spPr>
-        <p:txBody>
-          <a:bodyPr wrap="square" rtlCol="0" anchor="ctr"/>
-          <a:lstStyle/>
-          <a:p>
-            <a:pPr marL="0" indent="0">
-              <a:buNone/>
-            </a:pPr>
-            <a:r>
-              <a:rPr lang="en-US" sz="900" dirty="0">
-                <a:solidFill>
-                  <a:srgbClr val="94A3B8"/>
-                </a:solidFill>
-                <a:latin typeface="Calibri" pitchFamily="34" charset="0"/>
-                <a:ea typeface="Calibri" pitchFamily="34" charset="-122"/>
-                <a:cs typeface="Calibri" pitchFamily="34" charset="-120"/>
-              </a:rPr>
-              <a:t>Match → Interrupt → Re-use</a:t>
-            </a:r>
-            <a:endParaRPr lang="en-US" sz="900" dirty="0"/>
-          </a:p>
-        </p:txBody>
-      </p:sp>
-      <p:sp>
-        <p:nvSpPr>
-          <p:cNvPr id="7" name="Shape 5"/>
-          <p:cNvSpPr/>
-          <p:nvPr/>
-        </p:nvSpPr>
-        <p:spPr>
-          <a:xfrm>
-            <a:off x="886968" y="1252728"/>
-            <a:ext cx="27432" cy="530352"/>
+          <p:cNvPr id="9" name="Shape 7"/>
+          <p:cNvSpPr/>
+          <p:nvPr/>
+        </p:nvSpPr>
+        <p:spPr>
+          <a:xfrm>
+            <a:off x="228600" y="841248"/>
+            <a:ext cx="45720" cy="475488"/>
           </a:xfrm>
           <a:prstGeom prst="rect">
             <a:avLst/>
@@ -2823,39 +3297,14 @@
       </p:sp>
       <p:sp>
         <p:nvSpPr>
-          <p:cNvPr id="8" name="Shape 6"/>
-          <p:cNvSpPr/>
-          <p:nvPr/>
-        </p:nvSpPr>
-        <p:spPr>
-          <a:xfrm>
-            <a:off x="886968" y="1252728"/>
-            <a:ext cx="1216152" cy="27432"/>
-          </a:xfrm>
-          <a:prstGeom prst="rect">
-            <a:avLst/>
-          </a:prstGeom>
-          <a:solidFill>
-            <a:srgbClr val="8B5CF6"/>
-          </a:solidFill>
-          <a:ln w="12700">
-            <a:solidFill>
-              <a:srgbClr val="8B5CF6"/>
-            </a:solidFill>
-            <a:prstDash val="solid"/>
-          </a:ln>
-        </p:spPr>
-      </p:sp>
-      <p:sp>
-        <p:nvSpPr>
-          <p:cNvPr id="9" name="Text 7"/>
-          <p:cNvSpPr/>
-          <p:nvPr/>
-        </p:nvSpPr>
-        <p:spPr>
-          <a:xfrm>
-            <a:off x="960120" y="1078992"/>
-            <a:ext cx="1097280" cy="182880"/>
+          <p:cNvPr id="10" name="Text 8"/>
+          <p:cNvSpPr/>
+          <p:nvPr/>
+        </p:nvSpPr>
+        <p:spPr>
+          <a:xfrm>
+            <a:off x="320040" y="886968"/>
+            <a:ext cx="1344168" cy="219456"/>
           </a:xfrm>
           <a:prstGeom prst="rect">
             <a:avLst/>
@@ -2871,30 +3320,69 @@
               <a:buNone/>
             </a:pPr>
             <a:r>
-              <a:rPr lang="en-US" sz="900" i="1" dirty="0">
-                <a:solidFill>
-                  <a:srgbClr val="8B5CF6"/>
-                </a:solidFill>
-                <a:latin typeface="Calibri" pitchFamily="34" charset="0"/>
-                <a:ea typeface="Calibri" pitchFamily="34" charset="-122"/>
-                <a:cs typeface="Calibri" pitchFamily="34" charset="-120"/>
-              </a:rPr>
-              <a:t>Cache hit?</a:t>
-            </a:r>
-            <a:endParaRPr lang="en-US" sz="900" dirty="0"/>
-          </a:p>
-        </p:txBody>
-      </p:sp>
-      <p:sp>
-        <p:nvSpPr>
-          <p:cNvPr id="10" name="Shape 8"/>
-          <p:cNvSpPr/>
-          <p:nvPr/>
-        </p:nvSpPr>
-        <p:spPr>
-          <a:xfrm>
-            <a:off x="365760" y="1783080"/>
-            <a:ext cx="1005840" cy="640080"/>
+              <a:rPr lang="en-US" sz="1000" b="1" dirty="0">
+                <a:solidFill>
+                  <a:srgbClr val="FFFFFF"/>
+                </a:solidFill>
+                <a:latin typeface="Calibri" pitchFamily="34" charset="0"/>
+                <a:ea typeface="Calibri" pitchFamily="34" charset="-122"/>
+                <a:cs typeface="Calibri" pitchFamily="34" charset="-120"/>
+              </a:rPr>
+              <a:t>Query KB</a:t>
+            </a:r>
+            <a:endParaRPr lang="en-US" sz="1000" dirty="0"/>
+          </a:p>
+        </p:txBody>
+      </p:sp>
+      <p:sp>
+        <p:nvSpPr>
+          <p:cNvPr id="11" name="Text 9"/>
+          <p:cNvSpPr/>
+          <p:nvPr/>
+        </p:nvSpPr>
+        <p:spPr>
+          <a:xfrm>
+            <a:off x="320040" y="1106424"/>
+            <a:ext cx="1344168" cy="182880"/>
+          </a:xfrm>
+          <a:prstGeom prst="rect">
+            <a:avLst/>
+          </a:prstGeom>
+          <a:noFill/>
+          <a:ln/>
+        </p:spPr>
+        <p:txBody>
+          <a:bodyPr wrap="square" rtlCol="0" anchor="ctr"/>
+          <a:lstStyle/>
+          <a:p>
+            <a:pPr marL="0" indent="0">
+              <a:buNone/>
+            </a:pPr>
+            <a:r>
+              <a:rPr lang="en-US" sz="800" dirty="0">
+                <a:solidFill>
+                  <a:srgbClr val="94A3B8"/>
+                </a:solidFill>
+                <a:latin typeface="Calibri" pitchFamily="34" charset="0"/>
+                <a:ea typeface="Calibri" pitchFamily="34" charset="-122"/>
+                <a:cs typeface="Calibri" pitchFamily="34" charset="-120"/>
+              </a:rPr>
+              <a:t>pgvector semantic cache</a:t>
+            </a:r>
+            <a:endParaRPr lang="en-US" sz="800" dirty="0"/>
+          </a:p>
+        </p:txBody>
+      </p:sp>
+      <p:sp>
+        <p:nvSpPr>
+          <p:cNvPr id="12" name="Shape 10"/>
+          <p:cNvSpPr/>
+          <p:nvPr/>
+        </p:nvSpPr>
+        <p:spPr>
+          <a:xfrm>
+            <a:off x="228600" y="1517904"/>
+            <a:ext cx="1463040" cy="475488"/>
           </a:xfrm>
           <a:prstGeom prst="rect">
             <a:avLst/>
@@ -2919,14 +3407,14 @@
       </p:sp>
       <p:sp>
         <p:nvSpPr>
-          <p:cNvPr id="11" name="Shape 9"/>
-          <p:cNvSpPr/>
-          <p:nvPr/>
-        </p:nvSpPr>
-        <p:spPr>
-          <a:xfrm>
-            <a:off x="365760" y="1783080"/>
-            <a:ext cx="54864" cy="640080"/>
+          <p:cNvPr id="13" name="Shape 11"/>
+          <p:cNvSpPr/>
+          <p:nvPr/>
+        </p:nvSpPr>
+        <p:spPr>
+          <a:xfrm>
+            <a:off x="228600" y="1517904"/>
+            <a:ext cx="45720" cy="475488"/>
           </a:xfrm>
           <a:prstGeom prst="rect">
             <a:avLst/>
@@ -2944,14 +3432,14 @@
       </p:sp>
       <p:sp>
         <p:nvSpPr>
-          <p:cNvPr id="12" name="Text 10"/>
-          <p:cNvSpPr/>
-          <p:nvPr/>
-        </p:nvSpPr>
-        <p:spPr>
-          <a:xfrm>
-            <a:off x="457200" y="1856232"/>
-            <a:ext cx="896112" cy="274320"/>
+          <p:cNvPr id="14" name="Text 12"/>
+          <p:cNvSpPr/>
+          <p:nvPr/>
+        </p:nvSpPr>
+        <p:spPr>
+          <a:xfrm>
+            <a:off x="320040" y="1563624"/>
+            <a:ext cx="1344168" cy="219456"/>
           </a:xfrm>
           <a:prstGeom prst="rect">
             <a:avLst/>
@@ -2967,7 +3455,7 @@
               <a:buNone/>
             </a:pPr>
             <a:r>
-              <a:rPr lang="en-US" sz="1100" b="1" dirty="0">
+              <a:rPr lang="en-US" sz="1000" b="1" dirty="0">
                 <a:solidFill>
                   <a:srgbClr val="FFFFFF"/>
                 </a:solidFill>
@@ -2977,20 +3465,20 @@
               </a:rPr>
               <a:t>Planner</a:t>
             </a:r>
-            <a:endParaRPr lang="en-US" sz="1100" dirty="0"/>
-          </a:p>
-        </p:txBody>
-      </p:sp>
-      <p:sp>
-        <p:nvSpPr>
-          <p:cNvPr id="13" name="Text 11"/>
-          <p:cNvSpPr/>
-          <p:nvPr/>
-        </p:nvSpPr>
-        <p:spPr>
-          <a:xfrm>
-            <a:off x="457200" y="2130552"/>
-            <a:ext cx="896112" cy="228600"/>
+            <a:endParaRPr lang="en-US" sz="1000" dirty="0"/>
+          </a:p>
+        </p:txBody>
+      </p:sp>
+      <p:sp>
+        <p:nvSpPr>
+          <p:cNvPr id="15" name="Text 13"/>
+          <p:cNvSpPr/>
+          <p:nvPr/>
+        </p:nvSpPr>
+        <p:spPr>
+          <a:xfrm>
+            <a:off x="320040" y="1783080"/>
+            <a:ext cx="1344168" cy="182880"/>
           </a:xfrm>
           <a:prstGeom prst="rect">
             <a:avLst/>
@@ -3006,7 +3494,7 @@
               <a:buNone/>
             </a:pPr>
             <a:r>
-              <a:rPr lang="en-US" sz="900" dirty="0">
+              <a:rPr lang="en-US" sz="800" dirty="0">
                 <a:solidFill>
                   <a:srgbClr val="94A3B8"/>
                 </a:solidFill>
@@ -3014,47 +3502,22 @@
                 <a:ea typeface="Calibri" pitchFamily="34" charset="-122"/>
                 <a:cs typeface="Calibri" pitchFamily="34" charset="-120"/>
               </a:rPr>
-              <a:t>Scope &amp; intent</a:t>
-            </a:r>
-            <a:endParaRPr lang="en-US" sz="900" dirty="0"/>
-          </a:p>
-        </p:txBody>
-      </p:sp>
-      <p:sp>
-        <p:nvSpPr>
-          <p:cNvPr id="14" name="Shape 12"/>
-          <p:cNvSpPr/>
-          <p:nvPr/>
-        </p:nvSpPr>
-        <p:spPr>
-          <a:xfrm>
-            <a:off x="1371600" y="2089404"/>
-            <a:ext cx="594360" cy="27432"/>
-          </a:xfrm>
-          <a:prstGeom prst="rect">
-            <a:avLst/>
-          </a:prstGeom>
-          <a:solidFill>
-            <a:srgbClr val="3B82F6"/>
-          </a:solidFill>
-          <a:ln w="12700">
-            <a:solidFill>
-              <a:srgbClr val="3B82F6"/>
-            </a:solidFill>
-            <a:prstDash val="solid"/>
-          </a:ln>
-        </p:spPr>
-      </p:sp>
-      <p:sp>
-        <p:nvSpPr>
-          <p:cNvPr id="15" name="Shape 13"/>
-          <p:cNvSpPr/>
-          <p:nvPr/>
-        </p:nvSpPr>
-        <p:spPr>
-          <a:xfrm>
-            <a:off x="1600200" y="1783080"/>
-            <a:ext cx="1005840" cy="640080"/>
+              <a:t>Intent &amp; scope</a:t>
+            </a:r>
+            <a:endParaRPr lang="en-US" sz="800" dirty="0"/>
+          </a:p>
+        </p:txBody>
+      </p:sp>
+      <p:sp>
+        <p:nvSpPr>
+          <p:cNvPr id="16" name="Shape 14"/>
+          <p:cNvSpPr/>
+          <p:nvPr/>
+        </p:nvSpPr>
+        <p:spPr>
+          <a:xfrm>
+            <a:off x="228600" y="2194560"/>
+            <a:ext cx="1463040" cy="475488"/>
           </a:xfrm>
           <a:prstGeom prst="rect">
             <a:avLst/>
@@ -3079,14 +3542,14 @@
       </p:sp>
       <p:sp>
         <p:nvSpPr>
-          <p:cNvPr id="16" name="Shape 14"/>
-          <p:cNvSpPr/>
-          <p:nvPr/>
-        </p:nvSpPr>
-        <p:spPr>
-          <a:xfrm>
-            <a:off x="1600200" y="1783080"/>
-            <a:ext cx="54864" cy="640080"/>
+          <p:cNvPr id="17" name="Shape 15"/>
+          <p:cNvSpPr/>
+          <p:nvPr/>
+        </p:nvSpPr>
+        <p:spPr>
+          <a:xfrm>
+            <a:off x="228600" y="2194560"/>
+            <a:ext cx="45720" cy="475488"/>
           </a:xfrm>
           <a:prstGeom prst="rect">
             <a:avLst/>
@@ -3104,14 +3567,14 @@
       </p:sp>
       <p:sp>
         <p:nvSpPr>
-          <p:cNvPr id="17" name="Text 15"/>
-          <p:cNvSpPr/>
-          <p:nvPr/>
-        </p:nvSpPr>
-        <p:spPr>
-          <a:xfrm>
-            <a:off x="1691640" y="1856232"/>
-            <a:ext cx="896112" cy="274320"/>
+          <p:cNvPr id="18" name="Text 16"/>
+          <p:cNvSpPr/>
+          <p:nvPr/>
+        </p:nvSpPr>
+        <p:spPr>
+          <a:xfrm>
+            <a:off x="320040" y="2240280"/>
+            <a:ext cx="1344168" cy="219456"/>
           </a:xfrm>
           <a:prstGeom prst="rect">
             <a:avLst/>
@@ -3127,7 +3590,7 @@
               <a:buNone/>
             </a:pPr>
             <a:r>
-              <a:rPr lang="en-US" sz="1100" b="1" dirty="0">
+              <a:rPr lang="en-US" sz="1000" b="1" dirty="0">
                 <a:solidFill>
                   <a:srgbClr val="FFFFFF"/>
                 </a:solidFill>
@@ -3137,20 +3600,20 @@
               </a:rPr>
               <a:t>Discovery</a:t>
             </a:r>
-            <a:endParaRPr lang="en-US" sz="1100" dirty="0"/>
-          </a:p>
-        </p:txBody>
-      </p:sp>
-      <p:sp>
-        <p:nvSpPr>
-          <p:cNvPr id="18" name="Text 16"/>
-          <p:cNvSpPr/>
-          <p:nvPr/>
-        </p:nvSpPr>
-        <p:spPr>
-          <a:xfrm>
-            <a:off x="1691640" y="2130552"/>
-            <a:ext cx="896112" cy="228600"/>
+            <a:endParaRPr lang="en-US" sz="1000" dirty="0"/>
+          </a:p>
+        </p:txBody>
+      </p:sp>
+      <p:sp>
+        <p:nvSpPr>
+          <p:cNvPr id="19" name="Text 17"/>
+          <p:cNvSpPr/>
+          <p:nvPr/>
+        </p:nvSpPr>
+        <p:spPr>
+          <a:xfrm>
+            <a:off x="320040" y="2459736"/>
+            <a:ext cx="1344168" cy="182880"/>
           </a:xfrm>
           <a:prstGeom prst="rect">
             <a:avLst/>
@@ -3166,7 +3629,7 @@
               <a:buNone/>
             </a:pPr>
             <a:r>
-              <a:rPr lang="en-US" sz="900" dirty="0">
+              <a:rPr lang="en-US" sz="800" dirty="0">
                 <a:solidFill>
                   <a:srgbClr val="94A3B8"/>
                 </a:solidFill>
@@ -3174,36 +3637,11 @@
                 <a:ea typeface="Calibri" pitchFamily="34" charset="-122"/>
                 <a:cs typeface="Calibri" pitchFamily="34" charset="-120"/>
               </a:rPr>
-              <a:t>Schema + data_range</a:t>
-            </a:r>
-            <a:endParaRPr lang="en-US" sz="900" dirty="0"/>
-          </a:p>
-        </p:txBody>
-      </p:sp>
-      <p:sp>
-        <p:nvSpPr>
-          <p:cNvPr id="19" name="Shape 17"/>
-          <p:cNvSpPr/>
-          <p:nvPr/>
-        </p:nvSpPr>
-        <p:spPr>
-          <a:xfrm>
-            <a:off x="2606040" y="2089404"/>
-            <a:ext cx="594360" cy="27432"/>
-          </a:xfrm>
-          <a:prstGeom prst="rect">
-            <a:avLst/>
-          </a:prstGeom>
-          <a:solidFill>
-            <a:srgbClr val="3B82F6"/>
-          </a:solidFill>
-          <a:ln w="12700">
-            <a:solidFill>
-              <a:srgbClr val="3B82F6"/>
-            </a:solidFill>
-            <a:prstDash val="solid"/>
-          </a:ln>
-        </p:spPr>
+              <a:t>Schema feasibility</a:t>
+            </a:r>
+            <a:endParaRPr lang="en-US" sz="800" dirty="0"/>
+          </a:p>
+        </p:txBody>
       </p:sp>
       <p:sp>
         <p:nvSpPr>
@@ -3213,8 +3651,8 @@
         </p:nvSpPr>
         <p:spPr>
           <a:xfrm>
-            <a:off x="2834640" y="1783080"/>
-            <a:ext cx="1005840" cy="640080"/>
+            <a:off x="228600" y="2871216"/>
+            <a:ext cx="1463040" cy="475488"/>
           </a:xfrm>
           <a:prstGeom prst="rect">
             <a:avLst/>
@@ -3245,8 +3683,8 @@
         </p:nvSpPr>
         <p:spPr>
           <a:xfrm>
-            <a:off x="2834640" y="1783080"/>
-            <a:ext cx="54864" cy="640080"/>
+            <a:off x="228600" y="2871216"/>
+            <a:ext cx="45720" cy="475488"/>
           </a:xfrm>
           <a:prstGeom prst="rect">
             <a:avLst/>
@@ -3270,8 +3708,8 @@
         </p:nvSpPr>
         <p:spPr>
           <a:xfrm>
-            <a:off x="2926080" y="1856232"/>
-            <a:ext cx="896112" cy="274320"/>
+            <a:off x="320040" y="2916936"/>
+            <a:ext cx="1344168" cy="219456"/>
           </a:xfrm>
           <a:prstGeom prst="rect">
             <a:avLst/>
@@ -3287,7 +3725,7 @@
               <a:buNone/>
             </a:pPr>
             <a:r>
-              <a:rPr lang="en-US" sz="1100" b="1" dirty="0">
+              <a:rPr lang="en-US" sz="1000" b="1" dirty="0">
                 <a:solidFill>
                   <a:srgbClr val="FFFFFF"/>
                 </a:solidFill>
@@ -3295,9 +3733,9 @@
                 <a:ea typeface="Calibri" pitchFamily="34" charset="-122"/>
                 <a:cs typeface="Calibri" pitchFamily="34" charset="-120"/>
               </a:rPr>
-              <a:t>Optimizer</a:t>
-            </a:r>
-            <a:endParaRPr lang="en-US" sz="1100" dirty="0"/>
+              <a:t>Optimizer Prepare</a:t>
+            </a:r>
+            <a:endParaRPr lang="en-US" sz="1000" dirty="0"/>
           </a:p>
         </p:txBody>
       </p:sp>
@@ -3309,8 +3747,8 @@
         </p:nvSpPr>
         <p:spPr>
           <a:xfrm>
-            <a:off x="2926080" y="2130552"/>
-            <a:ext cx="896112" cy="228600"/>
+            <a:off x="320040" y="3136392"/>
+            <a:ext cx="1344168" cy="182880"/>
           </a:xfrm>
           <a:prstGeom prst="rect">
             <a:avLst/>
@@ -3326,7 +3764,7 @@
               <a:buNone/>
             </a:pPr>
             <a:r>
-              <a:rPr lang="en-US" sz="900" dirty="0">
+              <a:rPr lang="en-US" sz="800" dirty="0">
                 <a:solidFill>
                   <a:srgbClr val="94A3B8"/>
                 </a:solidFill>
@@ -3334,9 +3772,9 @@
                 <a:ea typeface="Calibri" pitchFamily="34" charset="-122"/>
                 <a:cs typeface="Calibri" pitchFamily="34" charset="-120"/>
               </a:rPr>
-              <a:t>SQL + cost est.</a:t>
-            </a:r>
-            <a:endParaRPr lang="en-US" sz="900" dirty="0"/>
+              <a:t>SQL + cost estimate</a:t>
+            </a:r>
+            <a:endParaRPr lang="en-US" sz="800" dirty="0"/>
           </a:p>
         </p:txBody>
       </p:sp>
@@ -3348,33 +3786,8 @@
         </p:nvSpPr>
         <p:spPr>
           <a:xfrm>
-            <a:off x="3840480" y="2089404"/>
-            <a:ext cx="594360" cy="27432"/>
-          </a:xfrm>
-          <a:prstGeom prst="rect">
-            <a:avLst/>
-          </a:prstGeom>
-          <a:solidFill>
-            <a:srgbClr val="3B82F6"/>
-          </a:solidFill>
-          <a:ln w="12700">
-            <a:solidFill>
-              <a:srgbClr val="3B82F6"/>
-            </a:solidFill>
-            <a:prstDash val="solid"/>
-          </a:ln>
-        </p:spPr>
-      </p:sp>
-      <p:sp>
-        <p:nvSpPr>
-          <p:cNvPr id="25" name="Shape 23"/>
-          <p:cNvSpPr/>
-          <p:nvPr/>
-        </p:nvSpPr>
-        <p:spPr>
-          <a:xfrm>
-            <a:off x="4069080" y="1783080"/>
-            <a:ext cx="1005840" cy="640080"/>
+            <a:off x="7452360" y="841248"/>
+            <a:ext cx="1463040" cy="475488"/>
           </a:xfrm>
           <a:prstGeom prst="rect">
             <a:avLst/>
@@ -3399,14 +3812,14 @@
       </p:sp>
       <p:sp>
         <p:nvSpPr>
-          <p:cNvPr id="26" name="Shape 24"/>
-          <p:cNvSpPr/>
-          <p:nvPr/>
-        </p:nvSpPr>
-        <p:spPr>
-          <a:xfrm>
-            <a:off x="4069080" y="1783080"/>
-            <a:ext cx="54864" cy="640080"/>
+          <p:cNvPr id="25" name="Shape 23"/>
+          <p:cNvSpPr/>
+          <p:nvPr/>
+        </p:nvSpPr>
+        <p:spPr>
+          <a:xfrm>
+            <a:off x="7452360" y="841248"/>
+            <a:ext cx="45720" cy="475488"/>
           </a:xfrm>
           <a:prstGeom prst="rect">
             <a:avLst/>
@@ -3424,14 +3837,53 @@
       </p:sp>
       <p:sp>
         <p:nvSpPr>
+          <p:cNvPr id="26" name="Text 24"/>
+          <p:cNvSpPr/>
+          <p:nvPr/>
+        </p:nvSpPr>
+        <p:spPr>
+          <a:xfrm>
+            <a:off x="7543800" y="886968"/>
+            <a:ext cx="1344168" cy="219456"/>
+          </a:xfrm>
+          <a:prstGeom prst="rect">
+            <a:avLst/>
+          </a:prstGeom>
+          <a:noFill/>
+          <a:ln/>
+        </p:spPr>
+        <p:txBody>
+          <a:bodyPr wrap="square" rtlCol="0" anchor="ctr"/>
+          <a:lstStyle/>
+          <a:p>
+            <a:pPr marL="0" indent="0">
+              <a:buNone/>
+            </a:pPr>
+            <a:r>
+              <a:rPr lang="en-US" sz="1000" b="1" dirty="0">
+                <a:solidFill>
+                  <a:srgbClr val="FFFFFF"/>
+                </a:solidFill>
+                <a:latin typeface="Calibri" pitchFamily="34" charset="0"/>
+                <a:ea typeface="Calibri" pitchFamily="34" charset="-122"/>
+                <a:cs typeface="Calibri" pitchFamily="34" charset="-120"/>
+              </a:rPr>
+              <a:t>Optimizer Gate</a:t>
+            </a:r>
+            <a:endParaRPr lang="en-US" sz="1000" dirty="0"/>
+          </a:p>
+        </p:txBody>
+      </p:sp>
+      <p:sp>
+        <p:nvSpPr>
           <p:cNvPr id="27" name="Text 25"/>
           <p:cNvSpPr/>
           <p:nvPr/>
         </p:nvSpPr>
         <p:spPr>
           <a:xfrm>
-            <a:off x="4160520" y="1856232"/>
-            <a:ext cx="896112" cy="274320"/>
+            <a:off x="7543800" y="1106424"/>
+            <a:ext cx="1344168" cy="182880"/>
           </a:xfrm>
           <a:prstGeom prst="rect">
             <a:avLst/>
@@ -3447,46 +3899,7 @@
               <a:buNone/>
             </a:pPr>
             <a:r>
-              <a:rPr lang="en-US" sz="1100" b="1" dirty="0">
-                <a:solidFill>
-                  <a:srgbClr val="FFFFFF"/>
-                </a:solidFill>
-                <a:latin typeface="Calibri" pitchFamily="34" charset="0"/>
-                <a:ea typeface="Calibri" pitchFamily="34" charset="-122"/>
-                <a:cs typeface="Calibri" pitchFamily="34" charset="-120"/>
-              </a:rPr>
-              <a:t>Executor</a:t>
-            </a:r>
-            <a:endParaRPr lang="en-US" sz="1100" dirty="0"/>
-          </a:p>
-        </p:txBody>
-      </p:sp>
-      <p:sp>
-        <p:nvSpPr>
-          <p:cNvPr id="28" name="Text 26"/>
-          <p:cNvSpPr/>
-          <p:nvPr/>
-        </p:nvSpPr>
-        <p:spPr>
-          <a:xfrm>
-            <a:off x="4160520" y="2130552"/>
-            <a:ext cx="896112" cy="228600"/>
-          </a:xfrm>
-          <a:prstGeom prst="rect">
-            <a:avLst/>
-          </a:prstGeom>
-          <a:noFill/>
-          <a:ln/>
-        </p:spPr>
-        <p:txBody>
-          <a:bodyPr wrap="square" rtlCol="0" anchor="ctr"/>
-          <a:lstStyle/>
-          <a:p>
-            <a:pPr marL="0" indent="0">
-              <a:buNone/>
-            </a:pPr>
-            <a:r>
-              <a:rPr lang="en-US" sz="900" dirty="0">
+              <a:rPr lang="en-US" sz="800" dirty="0">
                 <a:solidFill>
                   <a:srgbClr val="94A3B8"/>
                 </a:solidFill>
@@ -3494,47 +3907,157 @@
                 <a:ea typeface="Calibri" pitchFamily="34" charset="-122"/>
                 <a:cs typeface="Calibri" pitchFamily="34" charset="-120"/>
               </a:rPr>
-              <a:t>Runs on BQ/PG</a:t>
-            </a:r>
-            <a:endParaRPr lang="en-US" sz="900" dirty="0"/>
-          </a:p>
-        </p:txBody>
-      </p:sp>
-      <p:sp>
-        <p:nvSpPr>
-          <p:cNvPr id="29" name="Shape 27"/>
-          <p:cNvSpPr/>
-          <p:nvPr/>
-        </p:nvSpPr>
-        <p:spPr>
-          <a:xfrm>
-            <a:off x="5074920" y="2089404"/>
-            <a:ext cx="594360" cy="27432"/>
-          </a:xfrm>
-          <a:prstGeom prst="rect">
-            <a:avLst/>
-          </a:prstGeom>
-          <a:solidFill>
-            <a:srgbClr val="3B82F6"/>
+              <a:t>HITL SQL approval</a:t>
+            </a:r>
+            <a:endParaRPr lang="en-US" sz="800" dirty="0"/>
+          </a:p>
+        </p:txBody>
+      </p:sp>
+      <p:sp>
+        <p:nvSpPr>
+          <p:cNvPr id="28" name="Shape 26"/>
+          <p:cNvSpPr/>
+          <p:nvPr/>
+        </p:nvSpPr>
+        <p:spPr>
+          <a:xfrm>
+            <a:off x="7452360" y="1517904"/>
+            <a:ext cx="1463040" cy="475488"/>
+          </a:xfrm>
+          <a:prstGeom prst="rect">
+            <a:avLst/>
+          </a:prstGeom>
+          <a:solidFill>
+            <a:srgbClr val="1E2D4F"/>
           </a:solidFill>
           <a:ln w="12700">
             <a:solidFill>
-              <a:srgbClr val="3B82F6"/>
+              <a:srgbClr val="F59E0B"/>
             </a:solidFill>
             <a:prstDash val="solid"/>
           </a:ln>
-        </p:spPr>
-      </p:sp>
-      <p:sp>
-        <p:nvSpPr>
-          <p:cNvPr id="30" name="Shape 28"/>
-          <p:cNvSpPr/>
-          <p:nvPr/>
-        </p:nvSpPr>
-        <p:spPr>
-          <a:xfrm>
-            <a:off x="5303520" y="1783080"/>
-            <a:ext cx="1005840" cy="640080"/>
+          <a:effectLst>
+            <a:outerShdw blurRad="101600" dist="38100" dir="8100000" algn="bl" rotWithShape="0">
+              <a:srgbClr val="000000">
+                <a:alpha val="25000"/>
+              </a:srgbClr>
+            </a:outerShdw>
+          </a:effectLst>
+        </p:spPr>
+      </p:sp>
+      <p:sp>
+        <p:nvSpPr>
+          <p:cNvPr id="29" name="Shape 27"/>
+          <p:cNvSpPr/>
+          <p:nvPr/>
+        </p:nvSpPr>
+        <p:spPr>
+          <a:xfrm>
+            <a:off x="7452360" y="1517904"/>
+            <a:ext cx="45720" cy="475488"/>
+          </a:xfrm>
+          <a:prstGeom prst="rect">
+            <a:avLst/>
+          </a:prstGeom>
+          <a:solidFill>
+            <a:srgbClr val="F59E0B"/>
+          </a:solidFill>
+          <a:ln w="12700">
+            <a:solidFill>
+              <a:srgbClr val="F59E0B"/>
+            </a:solidFill>
+            <a:prstDash val="solid"/>
+          </a:ln>
+        </p:spPr>
+      </p:sp>
+      <p:sp>
+        <p:nvSpPr>
+          <p:cNvPr id="30" name="Text 28"/>
+          <p:cNvSpPr/>
+          <p:nvPr/>
+        </p:nvSpPr>
+        <p:spPr>
+          <a:xfrm>
+            <a:off x="7543800" y="1563624"/>
+            <a:ext cx="1344168" cy="219456"/>
+          </a:xfrm>
+          <a:prstGeom prst="rect">
+            <a:avLst/>
+          </a:prstGeom>
+          <a:noFill/>
+          <a:ln/>
+        </p:spPr>
+        <p:txBody>
+          <a:bodyPr wrap="square" rtlCol="0" anchor="ctr"/>
+          <a:lstStyle/>
+          <a:p>
+            <a:pPr marL="0" indent="0">
+              <a:buNone/>
+            </a:pPr>
+            <a:r>
+              <a:rPr lang="en-US" sz="1000" b="1" dirty="0">
+                <a:solidFill>
+                  <a:srgbClr val="FFFFFF"/>
+                </a:solidFill>
+                <a:latin typeface="Calibri" pitchFamily="34" charset="0"/>
+                <a:ea typeface="Calibri" pitchFamily="34" charset="-122"/>
+                <a:cs typeface="Calibri" pitchFamily="34" charset="-120"/>
+              </a:rPr>
+              <a:t>Executor</a:t>
+            </a:r>
+            <a:endParaRPr lang="en-US" sz="1000" dirty="0"/>
+          </a:p>
+        </p:txBody>
+      </p:sp>
+      <p:sp>
+        <p:nvSpPr>
+          <p:cNvPr id="31" name="Text 29"/>
+          <p:cNvSpPr/>
+          <p:nvPr/>
+        </p:nvSpPr>
+        <p:spPr>
+          <a:xfrm>
+            <a:off x="7543800" y="1783080"/>
+            <a:ext cx="1344168" cy="182880"/>
+          </a:xfrm>
+          <a:prstGeom prst="rect">
+            <a:avLst/>
+          </a:prstGeom>
+          <a:noFill/>
+          <a:ln/>
+        </p:spPr>
+        <p:txBody>
+          <a:bodyPr wrap="square" rtlCol="0" anchor="ctr"/>
+          <a:lstStyle/>
+          <a:p>
+            <a:pPr marL="0" indent="0">
+              <a:buNone/>
+            </a:pPr>
+            <a:r>
+              <a:rPr lang="en-US" sz="800" dirty="0">
+                <a:solidFill>
+                  <a:srgbClr val="94A3B8"/>
+                </a:solidFill>
+                <a:latin typeface="Calibri" pitchFamily="34" charset="0"/>
+                <a:ea typeface="Calibri" pitchFamily="34" charset="-122"/>
+                <a:cs typeface="Calibri" pitchFamily="34" charset="-120"/>
+              </a:rPr>
+              <a:t>Runs SQL on BQ / PG</a:t>
+            </a:r>
+            <a:endParaRPr lang="en-US" sz="800" dirty="0"/>
+          </a:p>
+        </p:txBody>
+      </p:sp>
+      <p:sp>
+        <p:nvSpPr>
+          <p:cNvPr id="32" name="Shape 30"/>
+          <p:cNvSpPr/>
+          <p:nvPr/>
+        </p:nvSpPr>
+        <p:spPr>
+          <a:xfrm>
+            <a:off x="7452360" y="2194560"/>
+            <a:ext cx="1463040" cy="475488"/>
           </a:xfrm>
           <a:prstGeom prst="rect">
             <a:avLst/>
@@ -3559,14 +4082,14 @@
       </p:sp>
       <p:sp>
         <p:nvSpPr>
-          <p:cNvPr id="31" name="Shape 29"/>
-          <p:cNvSpPr/>
-          <p:nvPr/>
-        </p:nvSpPr>
-        <p:spPr>
-          <a:xfrm>
-            <a:off x="5303520" y="1783080"/>
-            <a:ext cx="54864" cy="640080"/>
+          <p:cNvPr id="33" name="Shape 31"/>
+          <p:cNvSpPr/>
+          <p:nvPr/>
+        </p:nvSpPr>
+        <p:spPr>
+          <a:xfrm>
+            <a:off x="7452360" y="2194560"/>
+            <a:ext cx="45720" cy="475488"/>
           </a:xfrm>
           <a:prstGeom prst="rect">
             <a:avLst/>
@@ -3584,14 +4107,14 @@
       </p:sp>
       <p:sp>
         <p:nvSpPr>
-          <p:cNvPr id="32" name="Text 30"/>
-          <p:cNvSpPr/>
-          <p:nvPr/>
-        </p:nvSpPr>
-        <p:spPr>
-          <a:xfrm>
-            <a:off x="5394960" y="1856232"/>
-            <a:ext cx="896112" cy="274320"/>
+          <p:cNvPr id="34" name="Text 32"/>
+          <p:cNvSpPr/>
+          <p:nvPr/>
+        </p:nvSpPr>
+        <p:spPr>
+          <a:xfrm>
+            <a:off x="7543800" y="2240280"/>
+            <a:ext cx="1344168" cy="219456"/>
           </a:xfrm>
           <a:prstGeom prst="rect">
             <a:avLst/>
@@ -3607,7 +4130,7 @@
               <a:buNone/>
             </a:pPr>
             <a:r>
-              <a:rPr lang="en-US" sz="1100" b="1" dirty="0">
+              <a:rPr lang="en-US" sz="1000" b="1" dirty="0">
                 <a:solidFill>
                   <a:srgbClr val="FFFFFF"/>
                 </a:solidFill>
@@ -3617,20 +4140,20 @@
               </a:rPr>
               <a:t>Validator</a:t>
             </a:r>
-            <a:endParaRPr lang="en-US" sz="1100" dirty="0"/>
-          </a:p>
-        </p:txBody>
-      </p:sp>
-      <p:sp>
-        <p:nvSpPr>
-          <p:cNvPr id="33" name="Text 31"/>
-          <p:cNvSpPr/>
-          <p:nvPr/>
-        </p:nvSpPr>
-        <p:spPr>
-          <a:xfrm>
-            <a:off x="5394960" y="2130552"/>
-            <a:ext cx="896112" cy="228600"/>
+            <a:endParaRPr lang="en-US" sz="1000" dirty="0"/>
+          </a:p>
+        </p:txBody>
+      </p:sp>
+      <p:sp>
+        <p:nvSpPr>
+          <p:cNvPr id="35" name="Text 33"/>
+          <p:cNvSpPr/>
+          <p:nvPr/>
+        </p:nvSpPr>
+        <p:spPr>
+          <a:xfrm>
+            <a:off x="7543800" y="2459736"/>
+            <a:ext cx="1344168" cy="182880"/>
           </a:xfrm>
           <a:prstGeom prst="rect">
             <a:avLst/>
@@ -3646,7 +4169,7 @@
               <a:buNone/>
             </a:pPr>
             <a:r>
-              <a:rPr lang="en-US" sz="900" dirty="0">
+              <a:rPr lang="en-US" sz="800" dirty="0">
                 <a:solidFill>
                   <a:srgbClr val="94A3B8"/>
                 </a:solidFill>
@@ -3654,47 +4177,22 @@
                 <a:ea typeface="Calibri" pitchFamily="34" charset="-122"/>
                 <a:cs typeface="Calibri" pitchFamily="34" charset="-120"/>
               </a:rPr>
-              <a:t>Result quality</a:t>
-            </a:r>
-            <a:endParaRPr lang="en-US" sz="900" dirty="0"/>
-          </a:p>
-        </p:txBody>
-      </p:sp>
-      <p:sp>
-        <p:nvSpPr>
-          <p:cNvPr id="34" name="Shape 32"/>
-          <p:cNvSpPr/>
-          <p:nvPr/>
-        </p:nvSpPr>
-        <p:spPr>
-          <a:xfrm>
-            <a:off x="6309360" y="2089404"/>
-            <a:ext cx="594360" cy="27432"/>
-          </a:xfrm>
-          <a:prstGeom prst="rect">
-            <a:avLst/>
-          </a:prstGeom>
-          <a:solidFill>
-            <a:srgbClr val="3B82F6"/>
-          </a:solidFill>
-          <a:ln w="12700">
-            <a:solidFill>
-              <a:srgbClr val="3B82F6"/>
-            </a:solidFill>
-            <a:prstDash val="solid"/>
-          </a:ln>
-        </p:spPr>
-      </p:sp>
-      <p:sp>
-        <p:nvSpPr>
-          <p:cNvPr id="35" name="Shape 33"/>
-          <p:cNvSpPr/>
-          <p:nvPr/>
-        </p:nvSpPr>
-        <p:spPr>
-          <a:xfrm>
-            <a:off x="6537960" y="1783080"/>
-            <a:ext cx="1005840" cy="640080"/>
+              <a:t>Relevance check (LLM)</a:t>
+            </a:r>
+            <a:endParaRPr lang="en-US" sz="800" dirty="0"/>
+          </a:p>
+        </p:txBody>
+      </p:sp>
+      <p:sp>
+        <p:nvSpPr>
+          <p:cNvPr id="36" name="Shape 34"/>
+          <p:cNvSpPr/>
+          <p:nvPr/>
+        </p:nvSpPr>
+        <p:spPr>
+          <a:xfrm>
+            <a:off x="7452360" y="2871216"/>
+            <a:ext cx="1463040" cy="475488"/>
           </a:xfrm>
           <a:prstGeom prst="rect">
             <a:avLst/>
@@ -3719,14 +4217,14 @@
       </p:sp>
       <p:sp>
         <p:nvSpPr>
-          <p:cNvPr id="36" name="Shape 34"/>
-          <p:cNvSpPr/>
-          <p:nvPr/>
-        </p:nvSpPr>
-        <p:spPr>
-          <a:xfrm>
-            <a:off x="6537960" y="1783080"/>
-            <a:ext cx="54864" cy="640080"/>
+          <p:cNvPr id="37" name="Shape 35"/>
+          <p:cNvSpPr/>
+          <p:nvPr/>
+        </p:nvSpPr>
+        <p:spPr>
+          <a:xfrm>
+            <a:off x="7452360" y="2871216"/>
+            <a:ext cx="45720" cy="475488"/>
           </a:xfrm>
           <a:prstGeom prst="rect">
             <a:avLst/>
@@ -3744,14 +4242,14 @@
       </p:sp>
       <p:sp>
         <p:nvSpPr>
-          <p:cNvPr id="37" name="Text 35"/>
-          <p:cNvSpPr/>
-          <p:nvPr/>
-        </p:nvSpPr>
-        <p:spPr>
-          <a:xfrm>
-            <a:off x="6629400" y="1856232"/>
-            <a:ext cx="896112" cy="274320"/>
+          <p:cNvPr id="38" name="Text 36"/>
+          <p:cNvSpPr/>
+          <p:nvPr/>
+        </p:nvSpPr>
+        <p:spPr>
+          <a:xfrm>
+            <a:off x="7543800" y="2916936"/>
+            <a:ext cx="1344168" cy="219456"/>
           </a:xfrm>
           <a:prstGeom prst="rect">
             <a:avLst/>
@@ -3767,7 +4265,7 @@
               <a:buNone/>
             </a:pPr>
             <a:r>
-              <a:rPr lang="en-US" sz="1100" b="1" dirty="0">
+              <a:rPr lang="en-US" sz="1000" b="1" dirty="0">
                 <a:solidFill>
                   <a:srgbClr val="FFFFFF"/>
                 </a:solidFill>
@@ -3777,20 +4275,20 @@
               </a:rPr>
               <a:t>Visualization</a:t>
             </a:r>
-            <a:endParaRPr lang="en-US" sz="1100" dirty="0"/>
-          </a:p>
-        </p:txBody>
-      </p:sp>
-      <p:sp>
-        <p:nvSpPr>
-          <p:cNvPr id="38" name="Text 36"/>
-          <p:cNvSpPr/>
-          <p:nvPr/>
-        </p:nvSpPr>
-        <p:spPr>
-          <a:xfrm>
-            <a:off x="6629400" y="2130552"/>
-            <a:ext cx="896112" cy="228600"/>
+            <a:endParaRPr lang="en-US" sz="1000" dirty="0"/>
+          </a:p>
+        </p:txBody>
+      </p:sp>
+      <p:sp>
+        <p:nvSpPr>
+          <p:cNvPr id="39" name="Text 37"/>
+          <p:cNvSpPr/>
+          <p:nvPr/>
+        </p:nvSpPr>
+        <p:spPr>
+          <a:xfrm>
+            <a:off x="7543800" y="3136392"/>
+            <a:ext cx="1344168" cy="182880"/>
           </a:xfrm>
           <a:prstGeom prst="rect">
             <a:avLst/>
@@ -3806,7 +4304,7 @@
               <a:buNone/>
             </a:pPr>
             <a:r>
-              <a:rPr lang="en-US" sz="900" dirty="0">
+              <a:rPr lang="en-US" sz="800" dirty="0">
                 <a:solidFill>
                   <a:srgbClr val="94A3B8"/>
                 </a:solidFill>
@@ -3814,22 +4312,272 @@
                 <a:ea typeface="Calibri" pitchFamily="34" charset="-122"/>
                 <a:cs typeface="Calibri" pitchFamily="34" charset="-120"/>
               </a:rPr>
-              <a:t>Chart + explain</a:t>
-            </a:r>
-            <a:endParaRPr lang="en-US" sz="900" dirty="0"/>
-          </a:p>
-        </p:txBody>
-      </p:sp>
-      <p:sp>
-        <p:nvSpPr>
-          <p:cNvPr id="39" name="Shape 37"/>
-          <p:cNvSpPr/>
-          <p:nvPr/>
-        </p:nvSpPr>
-        <p:spPr>
-          <a:xfrm>
-            <a:off x="4558284" y="2423160"/>
-            <a:ext cx="27432" cy="548640"/>
+              <a:t>Chart + explanation</a:t>
+            </a:r>
+            <a:endParaRPr lang="en-US" sz="800" dirty="0"/>
+          </a:p>
+        </p:txBody>
+      </p:sp>
+      <p:sp>
+        <p:nvSpPr>
+          <p:cNvPr id="40" name="Shape 38"/>
+          <p:cNvSpPr/>
+          <p:nvPr/>
+        </p:nvSpPr>
+        <p:spPr>
+          <a:xfrm>
+            <a:off x="2226564" y="1078992"/>
+            <a:ext cx="27432" cy="2029968"/>
+          </a:xfrm>
+          <a:prstGeom prst="rect">
+            <a:avLst/>
+          </a:prstGeom>
+          <a:solidFill>
+            <a:srgbClr val="475569"/>
+          </a:solidFill>
+          <a:ln w="12700">
+            <a:solidFill>
+              <a:srgbClr val="475569"/>
+            </a:solidFill>
+            <a:prstDash val="solid"/>
+          </a:ln>
+        </p:spPr>
+      </p:sp>
+      <p:sp>
+        <p:nvSpPr>
+          <p:cNvPr id="41" name="Shape 39"/>
+          <p:cNvSpPr/>
+          <p:nvPr/>
+        </p:nvSpPr>
+        <p:spPr>
+          <a:xfrm>
+            <a:off x="6890004" y="1078992"/>
+            <a:ext cx="27432" cy="2029968"/>
+          </a:xfrm>
+          <a:prstGeom prst="rect">
+            <a:avLst/>
+          </a:prstGeom>
+          <a:solidFill>
+            <a:srgbClr val="475569"/>
+          </a:solidFill>
+          <a:ln w="12700">
+            <a:solidFill>
+              <a:srgbClr val="475569"/>
+            </a:solidFill>
+            <a:prstDash val="solid"/>
+          </a:ln>
+        </p:spPr>
+      </p:sp>
+      <p:sp>
+        <p:nvSpPr>
+          <p:cNvPr id="42" name="Shape 40"/>
+          <p:cNvSpPr/>
+          <p:nvPr/>
+        </p:nvSpPr>
+        <p:spPr>
+          <a:xfrm>
+            <a:off x="1691640" y="1065276"/>
+            <a:ext cx="548640" cy="27432"/>
+          </a:xfrm>
+          <a:prstGeom prst="rect">
+            <a:avLst/>
+          </a:prstGeom>
+          <a:solidFill>
+            <a:srgbClr val="8B5CF6"/>
+          </a:solidFill>
+          <a:ln w="12700">
+            <a:solidFill>
+              <a:srgbClr val="8B5CF6"/>
+            </a:solidFill>
+            <a:prstDash val="solid"/>
+          </a:ln>
+        </p:spPr>
+      </p:sp>
+      <p:sp>
+        <p:nvSpPr>
+          <p:cNvPr id="43" name="Shape 41"/>
+          <p:cNvSpPr/>
+          <p:nvPr/>
+        </p:nvSpPr>
+        <p:spPr>
+          <a:xfrm>
+            <a:off x="2185416" y="1024128"/>
+            <a:ext cx="109728" cy="109728"/>
+          </a:xfrm>
+          <a:prstGeom prst="ellipse">
+            <a:avLst/>
+          </a:prstGeom>
+          <a:solidFill>
+            <a:srgbClr val="8B5CF6"/>
+          </a:solidFill>
+          <a:ln w="12700">
+            <a:solidFill>
+              <a:srgbClr val="8B5CF6"/>
+            </a:solidFill>
+            <a:prstDash val="solid"/>
+          </a:ln>
+        </p:spPr>
+      </p:sp>
+      <p:sp>
+        <p:nvSpPr>
+          <p:cNvPr id="44" name="Shape 42"/>
+          <p:cNvSpPr/>
+          <p:nvPr/>
+        </p:nvSpPr>
+        <p:spPr>
+          <a:xfrm>
+            <a:off x="1691640" y="1741932"/>
+            <a:ext cx="548640" cy="27432"/>
+          </a:xfrm>
+          <a:prstGeom prst="rect">
+            <a:avLst/>
+          </a:prstGeom>
+          <a:solidFill>
+            <a:srgbClr val="3B82F6"/>
+          </a:solidFill>
+          <a:ln w="12700">
+            <a:solidFill>
+              <a:srgbClr val="3B82F6"/>
+            </a:solidFill>
+            <a:prstDash val="solid"/>
+          </a:ln>
+        </p:spPr>
+      </p:sp>
+      <p:sp>
+        <p:nvSpPr>
+          <p:cNvPr id="45" name="Shape 43"/>
+          <p:cNvSpPr/>
+          <p:nvPr/>
+        </p:nvSpPr>
+        <p:spPr>
+          <a:xfrm>
+            <a:off x="2185416" y="1700784"/>
+            <a:ext cx="109728" cy="109728"/>
+          </a:xfrm>
+          <a:prstGeom prst="ellipse">
+            <a:avLst/>
+          </a:prstGeom>
+          <a:solidFill>
+            <a:srgbClr val="3B82F6"/>
+          </a:solidFill>
+          <a:ln w="12700">
+            <a:solidFill>
+              <a:srgbClr val="3B82F6"/>
+            </a:solidFill>
+            <a:prstDash val="solid"/>
+          </a:ln>
+        </p:spPr>
+      </p:sp>
+      <p:sp>
+        <p:nvSpPr>
+          <p:cNvPr id="46" name="Shape 44"/>
+          <p:cNvSpPr/>
+          <p:nvPr/>
+        </p:nvSpPr>
+        <p:spPr>
+          <a:xfrm>
+            <a:off x="1691640" y="2418588"/>
+            <a:ext cx="548640" cy="27432"/>
+          </a:xfrm>
+          <a:prstGeom prst="rect">
+            <a:avLst/>
+          </a:prstGeom>
+          <a:solidFill>
+            <a:srgbClr val="06B6D4"/>
+          </a:solidFill>
+          <a:ln w="12700">
+            <a:solidFill>
+              <a:srgbClr val="06B6D4"/>
+            </a:solidFill>
+            <a:prstDash val="solid"/>
+          </a:ln>
+        </p:spPr>
+      </p:sp>
+      <p:sp>
+        <p:nvSpPr>
+          <p:cNvPr id="47" name="Shape 45"/>
+          <p:cNvSpPr/>
+          <p:nvPr/>
+        </p:nvSpPr>
+        <p:spPr>
+          <a:xfrm>
+            <a:off x="2185416" y="2377440"/>
+            <a:ext cx="109728" cy="109728"/>
+          </a:xfrm>
+          <a:prstGeom prst="ellipse">
+            <a:avLst/>
+          </a:prstGeom>
+          <a:solidFill>
+            <a:srgbClr val="06B6D4"/>
+          </a:solidFill>
+          <a:ln w="12700">
+            <a:solidFill>
+              <a:srgbClr val="06B6D4"/>
+            </a:solidFill>
+            <a:prstDash val="solid"/>
+          </a:ln>
+        </p:spPr>
+      </p:sp>
+      <p:sp>
+        <p:nvSpPr>
+          <p:cNvPr id="48" name="Shape 46"/>
+          <p:cNvSpPr/>
+          <p:nvPr/>
+        </p:nvSpPr>
+        <p:spPr>
+          <a:xfrm>
+            <a:off x="1691640" y="3095244"/>
+            <a:ext cx="548640" cy="27432"/>
+          </a:xfrm>
+          <a:prstGeom prst="rect">
+            <a:avLst/>
+          </a:prstGeom>
+          <a:solidFill>
+            <a:srgbClr val="8B5CF6"/>
+          </a:solidFill>
+          <a:ln w="12700">
+            <a:solidFill>
+              <a:srgbClr val="8B5CF6"/>
+            </a:solidFill>
+            <a:prstDash val="solid"/>
+          </a:ln>
+        </p:spPr>
+      </p:sp>
+      <p:sp>
+        <p:nvSpPr>
+          <p:cNvPr id="49" name="Shape 47"/>
+          <p:cNvSpPr/>
+          <p:nvPr/>
+        </p:nvSpPr>
+        <p:spPr>
+          <a:xfrm>
+            <a:off x="2185416" y="3054096"/>
+            <a:ext cx="109728" cy="109728"/>
+          </a:xfrm>
+          <a:prstGeom prst="ellipse">
+            <a:avLst/>
+          </a:prstGeom>
+          <a:solidFill>
+            <a:srgbClr val="8B5CF6"/>
+          </a:solidFill>
+          <a:ln w="12700">
+            <a:solidFill>
+              <a:srgbClr val="8B5CF6"/>
+            </a:solidFill>
+            <a:prstDash val="solid"/>
+          </a:ln>
+        </p:spPr>
+      </p:sp>
+      <p:sp>
+        <p:nvSpPr>
+          <p:cNvPr id="50" name="Shape 48"/>
+          <p:cNvSpPr/>
+          <p:nvPr/>
+        </p:nvSpPr>
+        <p:spPr>
+          <a:xfrm>
+            <a:off x="6903720" y="1065276"/>
+            <a:ext cx="548640" cy="27432"/>
           </a:xfrm>
           <a:prstGeom prst="rect">
             <a:avLst/>
@@ -3847,20 +4595,419 @@
       </p:sp>
       <p:sp>
         <p:nvSpPr>
-          <p:cNvPr id="40" name="Shape 38"/>
-          <p:cNvSpPr/>
-          <p:nvPr/>
-        </p:nvSpPr>
-        <p:spPr>
-          <a:xfrm>
-            <a:off x="3749040" y="3291840"/>
-            <a:ext cx="1645920" cy="502920"/>
-          </a:xfrm>
-          <a:prstGeom prst="rect">
-            <a:avLst/>
-          </a:prstGeom>
-          <a:solidFill>
-            <a:srgbClr val="2D1F0A"/>
+          <p:cNvPr id="51" name="Shape 49"/>
+          <p:cNvSpPr/>
+          <p:nvPr/>
+        </p:nvSpPr>
+        <p:spPr>
+          <a:xfrm>
+            <a:off x="6848856" y="1024128"/>
+            <a:ext cx="109728" cy="109728"/>
+          </a:xfrm>
+          <a:prstGeom prst="ellipse">
+            <a:avLst/>
+          </a:prstGeom>
+          <a:solidFill>
+            <a:srgbClr val="F59E0B"/>
+          </a:solidFill>
+          <a:ln w="12700">
+            <a:solidFill>
+              <a:srgbClr val="F59E0B"/>
+            </a:solidFill>
+            <a:prstDash val="solid"/>
+          </a:ln>
+        </p:spPr>
+      </p:sp>
+      <p:sp>
+        <p:nvSpPr>
+          <p:cNvPr id="52" name="Shape 50"/>
+          <p:cNvSpPr/>
+          <p:nvPr/>
+        </p:nvSpPr>
+        <p:spPr>
+          <a:xfrm>
+            <a:off x="6903720" y="1741932"/>
+            <a:ext cx="548640" cy="27432"/>
+          </a:xfrm>
+          <a:prstGeom prst="rect">
+            <a:avLst/>
+          </a:prstGeom>
+          <a:solidFill>
+            <a:srgbClr val="F59E0B"/>
+          </a:solidFill>
+          <a:ln w="12700">
+            <a:solidFill>
+              <a:srgbClr val="F59E0B"/>
+            </a:solidFill>
+            <a:prstDash val="solid"/>
+          </a:ln>
+        </p:spPr>
+      </p:sp>
+      <p:sp>
+        <p:nvSpPr>
+          <p:cNvPr id="53" name="Shape 51"/>
+          <p:cNvSpPr/>
+          <p:nvPr/>
+        </p:nvSpPr>
+        <p:spPr>
+          <a:xfrm>
+            <a:off x="6848856" y="1700784"/>
+            <a:ext cx="109728" cy="109728"/>
+          </a:xfrm>
+          <a:prstGeom prst="ellipse">
+            <a:avLst/>
+          </a:prstGeom>
+          <a:solidFill>
+            <a:srgbClr val="F59E0B"/>
+          </a:solidFill>
+          <a:ln w="12700">
+            <a:solidFill>
+              <a:srgbClr val="F59E0B"/>
+            </a:solidFill>
+            <a:prstDash val="solid"/>
+          </a:ln>
+        </p:spPr>
+      </p:sp>
+      <p:sp>
+        <p:nvSpPr>
+          <p:cNvPr id="54" name="Shape 52"/>
+          <p:cNvSpPr/>
+          <p:nvPr/>
+        </p:nvSpPr>
+        <p:spPr>
+          <a:xfrm>
+            <a:off x="6903720" y="2418588"/>
+            <a:ext cx="548640" cy="27432"/>
+          </a:xfrm>
+          <a:prstGeom prst="rect">
+            <a:avLst/>
+          </a:prstGeom>
+          <a:solidFill>
+            <a:srgbClr val="10B981"/>
+          </a:solidFill>
+          <a:ln w="12700">
+            <a:solidFill>
+              <a:srgbClr val="10B981"/>
+            </a:solidFill>
+            <a:prstDash val="solid"/>
+          </a:ln>
+        </p:spPr>
+      </p:sp>
+      <p:sp>
+        <p:nvSpPr>
+          <p:cNvPr id="55" name="Shape 53"/>
+          <p:cNvSpPr/>
+          <p:nvPr/>
+        </p:nvSpPr>
+        <p:spPr>
+          <a:xfrm>
+            <a:off x="6848856" y="2377440"/>
+            <a:ext cx="109728" cy="109728"/>
+          </a:xfrm>
+          <a:prstGeom prst="ellipse">
+            <a:avLst/>
+          </a:prstGeom>
+          <a:solidFill>
+            <a:srgbClr val="10B981"/>
+          </a:solidFill>
+          <a:ln w="12700">
+            <a:solidFill>
+              <a:srgbClr val="10B981"/>
+            </a:solidFill>
+            <a:prstDash val="solid"/>
+          </a:ln>
+        </p:spPr>
+      </p:sp>
+      <p:sp>
+        <p:nvSpPr>
+          <p:cNvPr id="56" name="Shape 54"/>
+          <p:cNvSpPr/>
+          <p:nvPr/>
+        </p:nvSpPr>
+        <p:spPr>
+          <a:xfrm>
+            <a:off x="6903720" y="3095244"/>
+            <a:ext cx="548640" cy="27432"/>
+          </a:xfrm>
+          <a:prstGeom prst="rect">
+            <a:avLst/>
+          </a:prstGeom>
+          <a:solidFill>
+            <a:srgbClr val="3B82F6"/>
+          </a:solidFill>
+          <a:ln w="12700">
+            <a:solidFill>
+              <a:srgbClr val="3B82F6"/>
+            </a:solidFill>
+            <a:prstDash val="solid"/>
+          </a:ln>
+        </p:spPr>
+      </p:sp>
+      <p:sp>
+        <p:nvSpPr>
+          <p:cNvPr id="57" name="Shape 55"/>
+          <p:cNvSpPr/>
+          <p:nvPr/>
+        </p:nvSpPr>
+        <p:spPr>
+          <a:xfrm>
+            <a:off x="6848856" y="3054096"/>
+            <a:ext cx="109728" cy="109728"/>
+          </a:xfrm>
+          <a:prstGeom prst="ellipse">
+            <a:avLst/>
+          </a:prstGeom>
+          <a:solidFill>
+            <a:srgbClr val="3B82F6"/>
+          </a:solidFill>
+          <a:ln w="12700">
+            <a:solidFill>
+              <a:srgbClr val="3B82F6"/>
+            </a:solidFill>
+            <a:prstDash val="solid"/>
+          </a:ln>
+        </p:spPr>
+      </p:sp>
+      <p:sp>
+        <p:nvSpPr>
+          <p:cNvPr id="58" name="Shape 56"/>
+          <p:cNvSpPr/>
+          <p:nvPr/>
+        </p:nvSpPr>
+        <p:spPr>
+          <a:xfrm>
+            <a:off x="2240280" y="2176272"/>
+            <a:ext cx="1280160" cy="27432"/>
+          </a:xfrm>
+          <a:prstGeom prst="rect">
+            <a:avLst/>
+          </a:prstGeom>
+          <a:solidFill>
+            <a:srgbClr val="06B6D4"/>
+          </a:solidFill>
+          <a:ln w="12700">
+            <a:solidFill>
+              <a:srgbClr val="06B6D4"/>
+            </a:solidFill>
+            <a:prstDash val="solid"/>
+          </a:ln>
+        </p:spPr>
+      </p:sp>
+      <p:sp>
+        <p:nvSpPr>
+          <p:cNvPr id="59" name="Shape 57"/>
+          <p:cNvSpPr/>
+          <p:nvPr/>
+        </p:nvSpPr>
+        <p:spPr>
+          <a:xfrm>
+            <a:off x="5623560" y="2176272"/>
+            <a:ext cx="1280160" cy="27432"/>
+          </a:xfrm>
+          <a:prstGeom prst="rect">
+            <a:avLst/>
+          </a:prstGeom>
+          <a:solidFill>
+            <a:srgbClr val="06B6D4"/>
+          </a:solidFill>
+          <a:ln w="12700">
+            <a:solidFill>
+              <a:srgbClr val="06B6D4"/>
+            </a:solidFill>
+            <a:prstDash val="solid"/>
+          </a:ln>
+        </p:spPr>
+      </p:sp>
+      <p:sp>
+        <p:nvSpPr>
+          <p:cNvPr id="60" name="Shape 58"/>
+          <p:cNvSpPr/>
+          <p:nvPr/>
+        </p:nvSpPr>
+        <p:spPr>
+          <a:xfrm>
+            <a:off x="228600" y="3675888"/>
+            <a:ext cx="8686800" cy="22860"/>
+          </a:xfrm>
+          <a:prstGeom prst="rect">
+            <a:avLst/>
+          </a:prstGeom>
+          <a:solidFill>
+            <a:srgbClr val="1E3A5F"/>
+          </a:solidFill>
+          <a:ln w="12700">
+            <a:solidFill>
+              <a:srgbClr val="1E3A5F"/>
+            </a:solidFill>
+            <a:prstDash val="solid"/>
+          </a:ln>
+        </p:spPr>
+      </p:sp>
+      <p:sp>
+        <p:nvSpPr>
+          <p:cNvPr id="61" name="Text 59"/>
+          <p:cNvSpPr/>
+          <p:nvPr/>
+        </p:nvSpPr>
+        <p:spPr>
+          <a:xfrm>
+            <a:off x="228600" y="3730752"/>
+            <a:ext cx="2743200" cy="182880"/>
+          </a:xfrm>
+          <a:prstGeom prst="rect">
+            <a:avLst/>
+          </a:prstGeom>
+          <a:noFill/>
+          <a:ln/>
+        </p:spPr>
+        <p:txBody>
+          <a:bodyPr wrap="square" rtlCol="0" anchor="ctr"/>
+          <a:lstStyle/>
+          <a:p>
+            <a:pPr marL="0" indent="0">
+              <a:buNone/>
+            </a:pPr>
+            <a:r>
+              <a:rPr lang="en-US" sz="900" b="1" kern="0" spc="100" dirty="0">
+                <a:solidFill>
+                  <a:srgbClr val="64748B"/>
+                </a:solidFill>
+                <a:latin typeface="Calibri" pitchFamily="34" charset="0"/>
+                <a:ea typeface="Calibri" pitchFamily="34" charset="-122"/>
+                <a:cs typeface="Calibri" pitchFamily="34" charset="-120"/>
+              </a:rPr>
+              <a:t>KEY FEEDBACK LOOPS</a:t>
+            </a:r>
+            <a:endParaRPr lang="en-US" sz="900" dirty="0"/>
+          </a:p>
+        </p:txBody>
+      </p:sp>
+      <p:sp>
+        <p:nvSpPr>
+          <p:cNvPr id="62" name="Shape 60"/>
+          <p:cNvSpPr/>
+          <p:nvPr/>
+        </p:nvSpPr>
+        <p:spPr>
+          <a:xfrm>
+            <a:off x="228600" y="3950208"/>
+            <a:ext cx="2743200" cy="658368"/>
+          </a:xfrm>
+          <a:prstGeom prst="rect">
+            <a:avLst/>
+          </a:prstGeom>
+          <a:solidFill>
+            <a:srgbClr val="1A2547"/>
+          </a:solidFill>
+          <a:ln w="12700">
+            <a:solidFill>
+              <a:srgbClr val="EF4444"/>
+            </a:solidFill>
+            <a:prstDash val="solid"/>
+          </a:ln>
+          <a:effectLst>
+            <a:outerShdw blurRad="101600" dist="38100" dir="8100000" algn="bl" rotWithShape="0">
+              <a:srgbClr val="000000">
+                <a:alpha val="25000"/>
+              </a:srgbClr>
+            </a:outerShdw>
+          </a:effectLst>
+        </p:spPr>
+      </p:sp>
+      <p:sp>
+        <p:nvSpPr>
+          <p:cNvPr id="63" name="Text 61"/>
+          <p:cNvSpPr/>
+          <p:nvPr/>
+        </p:nvSpPr>
+        <p:spPr>
+          <a:xfrm>
+            <a:off x="338328" y="3986784"/>
+            <a:ext cx="2523744" cy="228600"/>
+          </a:xfrm>
+          <a:prstGeom prst="rect">
+            <a:avLst/>
+          </a:prstGeom>
+          <a:noFill/>
+          <a:ln/>
+        </p:spPr>
+        <p:txBody>
+          <a:bodyPr wrap="square" rtlCol="0" anchor="ctr"/>
+          <a:lstStyle/>
+          <a:p>
+            <a:pPr marL="0" indent="0">
+              <a:buNone/>
+            </a:pPr>
+            <a:r>
+              <a:rPr lang="en-US" sz="1100" b="1" dirty="0">
+                <a:solidFill>
+                  <a:srgbClr val="EF4444"/>
+                </a:solidFill>
+                <a:latin typeface="Calibri" pitchFamily="34" charset="0"/>
+                <a:ea typeface="Calibri" pitchFamily="34" charset="-122"/>
+                <a:cs typeface="Calibri" pitchFamily="34" charset="-120"/>
+              </a:rPr>
+              <a:t>Relevance FAIL</a:t>
+            </a:r>
+            <a:endParaRPr lang="en-US" sz="1100" dirty="0"/>
+          </a:p>
+        </p:txBody>
+      </p:sp>
+      <p:sp>
+        <p:nvSpPr>
+          <p:cNvPr id="64" name="Text 62"/>
+          <p:cNvSpPr/>
+          <p:nvPr/>
+        </p:nvSpPr>
+        <p:spPr>
+          <a:xfrm>
+            <a:off x="338328" y="4224528"/>
+            <a:ext cx="2523744" cy="329184"/>
+          </a:xfrm>
+          <a:prstGeom prst="rect">
+            <a:avLst/>
+          </a:prstGeom>
+          <a:noFill/>
+          <a:ln/>
+        </p:spPr>
+        <p:txBody>
+          <a:bodyPr wrap="square" rtlCol="0" anchor="ctr"/>
+          <a:lstStyle/>
+          <a:p>
+            <a:pPr marL="0" indent="0">
+              <a:buNone/>
+            </a:pPr>
+            <a:r>
+              <a:rPr lang="en-US" sz="900" dirty="0">
+                <a:solidFill>
+                  <a:srgbClr val="94A3B8"/>
+                </a:solidFill>
+                <a:latin typeface="Calibri" pitchFamily="34" charset="0"/>
+                <a:ea typeface="Calibri" pitchFamily="34" charset="-122"/>
+                <a:cs typeface="Calibri" pitchFamily="34" charset="-120"/>
+              </a:rPr>
+              <a:t>Validator → Orchestrator → Optimizer rewrites SQL</a:t>
+            </a:r>
+            <a:endParaRPr lang="en-US" sz="900" dirty="0"/>
+          </a:p>
+        </p:txBody>
+      </p:sp>
+      <p:sp>
+        <p:nvSpPr>
+          <p:cNvPr id="65" name="Shape 63"/>
+          <p:cNvSpPr/>
+          <p:nvPr/>
+        </p:nvSpPr>
+        <p:spPr>
+          <a:xfrm>
+            <a:off x="3127248" y="3950208"/>
+            <a:ext cx="2743200" cy="658368"/>
+          </a:xfrm>
+          <a:prstGeom prst="rect">
+            <a:avLst/>
+          </a:prstGeom>
+          <a:solidFill>
+            <a:srgbClr val="1A2547"/>
           </a:solidFill>
           <a:ln w="12700">
             <a:solidFill>
@@ -3879,30 +5026,30 @@
       </p:sp>
       <p:sp>
         <p:nvSpPr>
-          <p:cNvPr id="41" name="Text 39"/>
-          <p:cNvSpPr/>
-          <p:nvPr/>
-        </p:nvSpPr>
-        <p:spPr>
-          <a:xfrm>
-            <a:off x="3749040" y="3310128"/>
-            <a:ext cx="1645920" cy="219456"/>
-          </a:xfrm>
-          <a:prstGeom prst="rect">
-            <a:avLst/>
-          </a:prstGeom>
-          <a:noFill/>
-          <a:ln/>
-        </p:spPr>
-        <p:txBody>
-          <a:bodyPr wrap="square" rtlCol="0" anchor="ctr"/>
-          <a:lstStyle/>
-          <a:p>
-            <a:pPr marL="0" indent="0" algn="ctr">
-              <a:buNone/>
-            </a:pPr>
-            <a:r>
-              <a:rPr lang="en-US" sz="1000" b="1" dirty="0">
+          <p:cNvPr id="66" name="Text 64"/>
+          <p:cNvSpPr/>
+          <p:nvPr/>
+        </p:nvSpPr>
+        <p:spPr>
+          <a:xfrm>
+            <a:off x="3236976" y="3986784"/>
+            <a:ext cx="2523744" cy="228600"/>
+          </a:xfrm>
+          <a:prstGeom prst="rect">
+            <a:avLst/>
+          </a:prstGeom>
+          <a:noFill/>
+          <a:ln/>
+        </p:spPr>
+        <p:txBody>
+          <a:bodyPr wrap="square" rtlCol="0" anchor="ctr"/>
+          <a:lstStyle/>
+          <a:p>
+            <a:pPr marL="0" indent="0">
+              <a:buNone/>
+            </a:pPr>
+            <a:r>
+              <a:rPr lang="en-US" sz="1100" b="1" dirty="0">
                 <a:solidFill>
                   <a:srgbClr val="F59E0B"/>
                 </a:solidFill>
@@ -3910,46 +5057,46 @@
                 <a:ea typeface="Calibri" pitchFamily="34" charset="-122"/>
                 <a:cs typeface="Calibri" pitchFamily="34" charset="-120"/>
               </a:rPr>
-              <a:t>⏸ Human Approval</a:t>
-            </a:r>
-            <a:endParaRPr lang="en-US" sz="1000" dirty="0"/>
-          </a:p>
-        </p:txBody>
-      </p:sp>
-      <p:sp>
-        <p:nvSpPr>
-          <p:cNvPr id="42" name="Text 40"/>
-          <p:cNvSpPr/>
-          <p:nvPr/>
-        </p:nvSpPr>
-        <p:spPr>
-          <a:xfrm>
-            <a:off x="3749040" y="3538728"/>
-            <a:ext cx="1645920" cy="201168"/>
-          </a:xfrm>
-          <a:prstGeom prst="rect">
-            <a:avLst/>
-          </a:prstGeom>
-          <a:noFill/>
-          <a:ln/>
-        </p:spPr>
-        <p:txBody>
-          <a:bodyPr wrap="square" rtlCol="0" anchor="ctr"/>
-          <a:lstStyle/>
-          <a:p>
-            <a:pPr marL="0" indent="0" algn="ctr">
+              <a:t>User Decline</a:t>
+            </a:r>
+            <a:endParaRPr lang="en-US" sz="1100" dirty="0"/>
+          </a:p>
+        </p:txBody>
+      </p:sp>
+      <p:sp>
+        <p:nvSpPr>
+          <p:cNvPr id="67" name="Text 65"/>
+          <p:cNvSpPr/>
+          <p:nvPr/>
+        </p:nvSpPr>
+        <p:spPr>
+          <a:xfrm>
+            <a:off x="3236976" y="4224528"/>
+            <a:ext cx="2523744" cy="329184"/>
+          </a:xfrm>
+          <a:prstGeom prst="rect">
+            <a:avLst/>
+          </a:prstGeom>
+          <a:noFill/>
+          <a:ln/>
+        </p:spPr>
+        <p:txBody>
+          <a:bodyPr wrap="square" rtlCol="0" anchor="ctr"/>
+          <a:lstStyle/>
+          <a:p>
+            <a:pPr marL="0" indent="0">
               <a:buNone/>
             </a:pPr>
             <a:r>
               <a:rPr lang="en-US" sz="900" dirty="0">
                 <a:solidFill>
-                  <a:srgbClr val="CBD5E1"/>
-                </a:solidFill>
-                <a:latin typeface="Calibri" pitchFamily="34" charset="0"/>
-                <a:ea typeface="Calibri" pitchFamily="34" charset="-122"/>
-                <a:cs typeface="Calibri" pitchFamily="34" charset="-120"/>
-              </a:rPr>
-              <a:t>Approve  ·  Decline &amp; Re-run</a:t>
+                  <a:srgbClr val="94A3B8"/>
+                </a:solidFill>
+                <a:latin typeface="Calibri" pitchFamily="34" charset="0"/>
+                <a:ea typeface="Calibri" pitchFamily="34" charset="-122"/>
+                <a:cs typeface="Calibri" pitchFamily="34" charset="-120"/>
+              </a:rPr>
+              <a:t>Optimizer Gate → Orchestrator → New SQL generated</a:t>
             </a:r>
             <a:endParaRPr lang="en-US" sz="900" dirty="0"/>
           </a:p>
@@ -3957,14 +5104,14 @@
       </p:sp>
       <p:sp>
         <p:nvSpPr>
-          <p:cNvPr id="43" name="Shape 41"/>
-          <p:cNvSpPr/>
-          <p:nvPr/>
-        </p:nvSpPr>
-        <p:spPr>
-          <a:xfrm>
-            <a:off x="7680960" y="1188720"/>
-            <a:ext cx="1280160" cy="594360"/>
+          <p:cNvPr id="68" name="Shape 66"/>
+          <p:cNvSpPr/>
+          <p:nvPr/>
+        </p:nvSpPr>
+        <p:spPr>
+          <a:xfrm>
+            <a:off x="6025896" y="3950208"/>
+            <a:ext cx="2743200" cy="658368"/>
           </a:xfrm>
           <a:prstGeom prst="rect">
             <a:avLst/>
@@ -3974,7 +5121,7 @@
           </a:solidFill>
           <a:ln w="12700">
             <a:solidFill>
-              <a:srgbClr val="1E3A5F"/>
+              <a:srgbClr val="8B5CF6"/>
             </a:solidFill>
             <a:prstDash val="solid"/>
           </a:ln>
@@ -3989,14 +5136,14 @@
       </p:sp>
       <p:sp>
         <p:nvSpPr>
-          <p:cNvPr id="44" name="Text 42"/>
-          <p:cNvSpPr/>
-          <p:nvPr/>
-        </p:nvSpPr>
-        <p:spPr>
-          <a:xfrm>
-            <a:off x="7772400" y="1243584"/>
-            <a:ext cx="1097280" cy="201168"/>
+          <p:cNvPr id="69" name="Text 67"/>
+          <p:cNvSpPr/>
+          <p:nvPr/>
+        </p:nvSpPr>
+        <p:spPr>
+          <a:xfrm>
+            <a:off x="6135624" y="3986784"/>
+            <a:ext cx="2523744" cy="228600"/>
           </a:xfrm>
           <a:prstGeom prst="rect">
             <a:avLst/>
@@ -4012,30 +5159,30 @@
               <a:buNone/>
             </a:pPr>
             <a:r>
-              <a:rPr lang="en-US" sz="1000" b="1" dirty="0">
-                <a:solidFill>
-                  <a:srgbClr val="06B6D4"/>
-                </a:solidFill>
-                <a:latin typeface="Calibri" pitchFamily="34" charset="0"/>
-                <a:ea typeface="Calibri" pitchFamily="34" charset="-122"/>
-                <a:cs typeface="Calibri" pitchFamily="34" charset="-120"/>
-              </a:rPr>
-              <a:t>LLM</a:t>
-            </a:r>
-            <a:endParaRPr lang="en-US" sz="1000" dirty="0"/>
-          </a:p>
-        </p:txBody>
-      </p:sp>
-      <p:sp>
-        <p:nvSpPr>
-          <p:cNvPr id="45" name="Text 43"/>
-          <p:cNvSpPr/>
-          <p:nvPr/>
-        </p:nvSpPr>
-        <p:spPr>
-          <a:xfrm>
-            <a:off x="7772400" y="1463040"/>
-            <a:ext cx="1097280" cy="228600"/>
+              <a:rPr lang="en-US" sz="1100" b="1" dirty="0">
+                <a:solidFill>
+                  <a:srgbClr val="8B5CF6"/>
+                </a:solidFill>
+                <a:latin typeface="Calibri" pitchFamily="34" charset="0"/>
+                <a:ea typeface="Calibri" pitchFamily="34" charset="-122"/>
+                <a:cs typeface="Calibri" pitchFamily="34" charset="-120"/>
+              </a:rPr>
+              <a:t>Executor ERROR</a:t>
+            </a:r>
+            <a:endParaRPr lang="en-US" sz="1100" dirty="0"/>
+          </a:p>
+        </p:txBody>
+      </p:sp>
+      <p:sp>
+        <p:nvSpPr>
+          <p:cNvPr id="70" name="Text 68"/>
+          <p:cNvSpPr/>
+          <p:nvPr/>
+        </p:nvSpPr>
+        <p:spPr>
+          <a:xfrm>
+            <a:off x="6135624" y="4224528"/>
+            <a:ext cx="2523744" cy="329184"/>
           </a:xfrm>
           <a:prstGeom prst="rect">
             <a:avLst/>
@@ -4051,181 +5198,7 @@
               <a:buNone/>
             </a:pPr>
             <a:r>
-              <a:rPr lang="en-US" sz="1100" dirty="0">
-                <a:solidFill>
-                  <a:srgbClr val="FFFFFF"/>
-                </a:solidFill>
-                <a:latin typeface="Calibri" pitchFamily="34" charset="0"/>
-                <a:ea typeface="Calibri" pitchFamily="34" charset="-122"/>
-                <a:cs typeface="Calibri" pitchFamily="34" charset="-120"/>
-              </a:rPr>
-              <a:t>Google Gemini</a:t>
-            </a:r>
-            <a:endParaRPr lang="en-US" sz="1100" dirty="0"/>
-          </a:p>
-        </p:txBody>
-      </p:sp>
-      <p:sp>
-        <p:nvSpPr>
-          <p:cNvPr id="46" name="Shape 44"/>
-          <p:cNvSpPr/>
-          <p:nvPr/>
-        </p:nvSpPr>
-        <p:spPr>
-          <a:xfrm>
-            <a:off x="7680960" y="1965960"/>
-            <a:ext cx="1280160" cy="594360"/>
-          </a:xfrm>
-          <a:prstGeom prst="rect">
-            <a:avLst/>
-          </a:prstGeom>
-          <a:solidFill>
-            <a:srgbClr val="1A2547"/>
-          </a:solidFill>
-          <a:ln w="12700">
-            <a:solidFill>
-              <a:srgbClr val="1E3A5F"/>
-            </a:solidFill>
-            <a:prstDash val="solid"/>
-          </a:ln>
-          <a:effectLst>
-            <a:outerShdw blurRad="101600" dist="38100" dir="8100000" algn="bl" rotWithShape="0">
-              <a:srgbClr val="000000">
-                <a:alpha val="25000"/>
-              </a:srgbClr>
-            </a:outerShdw>
-          </a:effectLst>
-        </p:spPr>
-      </p:sp>
-      <p:sp>
-        <p:nvSpPr>
-          <p:cNvPr id="47" name="Text 45"/>
-          <p:cNvSpPr/>
-          <p:nvPr/>
-        </p:nvSpPr>
-        <p:spPr>
-          <a:xfrm>
-            <a:off x="7772400" y="2020824"/>
-            <a:ext cx="1097280" cy="201168"/>
-          </a:xfrm>
-          <a:prstGeom prst="rect">
-            <a:avLst/>
-          </a:prstGeom>
-          <a:noFill/>
-          <a:ln/>
-        </p:spPr>
-        <p:txBody>
-          <a:bodyPr wrap="square" rtlCol="0" anchor="ctr"/>
-          <a:lstStyle/>
-          <a:p>
-            <a:pPr marL="0" indent="0">
-              <a:buNone/>
-            </a:pPr>
-            <a:r>
-              <a:rPr lang="en-US" sz="1000" b="1" dirty="0">
-                <a:solidFill>
-                  <a:srgbClr val="8B5CF6"/>
-                </a:solidFill>
-                <a:latin typeface="Calibri" pitchFamily="34" charset="0"/>
-                <a:ea typeface="Calibri" pitchFamily="34" charset="-122"/>
-                <a:cs typeface="Calibri" pitchFamily="34" charset="-120"/>
-              </a:rPr>
-              <a:t>Auth + Persist</a:t>
-            </a:r>
-            <a:endParaRPr lang="en-US" sz="1000" dirty="0"/>
-          </a:p>
-        </p:txBody>
-      </p:sp>
-      <p:sp>
-        <p:nvSpPr>
-          <p:cNvPr id="48" name="Text 46"/>
-          <p:cNvSpPr/>
-          <p:nvPr/>
-        </p:nvSpPr>
-        <p:spPr>
-          <a:xfrm>
-            <a:off x="7772400" y="2240280"/>
-            <a:ext cx="1097280" cy="228600"/>
-          </a:xfrm>
-          <a:prstGeom prst="rect">
-            <a:avLst/>
-          </a:prstGeom>
-          <a:noFill/>
-          <a:ln/>
-        </p:spPr>
-        <p:txBody>
-          <a:bodyPr wrap="square" rtlCol="0" anchor="ctr"/>
-          <a:lstStyle/>
-          <a:p>
-            <a:pPr marL="0" indent="0">
-              <a:buNone/>
-            </a:pPr>
-            <a:r>
-              <a:rPr lang="en-US" sz="1100" dirty="0">
-                <a:solidFill>
-                  <a:srgbClr val="FFFFFF"/>
-                </a:solidFill>
-                <a:latin typeface="Calibri" pitchFamily="34" charset="0"/>
-                <a:ea typeface="Calibri" pitchFamily="34" charset="-122"/>
-                <a:cs typeface="Calibri" pitchFamily="34" charset="-120"/>
-              </a:rPr>
-              <a:t>Supabase</a:t>
-            </a:r>
-            <a:endParaRPr lang="en-US" sz="1100" dirty="0"/>
-          </a:p>
-        </p:txBody>
-      </p:sp>
-      <p:sp>
-        <p:nvSpPr>
-          <p:cNvPr id="49" name="Shape 47"/>
-          <p:cNvSpPr/>
-          <p:nvPr/>
-        </p:nvSpPr>
-        <p:spPr>
-          <a:xfrm>
-            <a:off x="457200" y="4114800"/>
-            <a:ext cx="128016" cy="128016"/>
-          </a:xfrm>
-          <a:prstGeom prst="ellipse">
-            <a:avLst/>
-          </a:prstGeom>
-          <a:solidFill>
-            <a:srgbClr val="F59E0B"/>
-          </a:solidFill>
-          <a:ln w="12700">
-            <a:solidFill>
-              <a:srgbClr val="F59E0B"/>
-            </a:solidFill>
-            <a:prstDash val="solid"/>
-          </a:ln>
-        </p:spPr>
-      </p:sp>
-      <p:sp>
-        <p:nvSpPr>
-          <p:cNvPr id="50" name="Text 48"/>
-          <p:cNvSpPr/>
-          <p:nvPr/>
-        </p:nvSpPr>
-        <p:spPr>
-          <a:xfrm>
-            <a:off x="640080" y="4087368"/>
-            <a:ext cx="2286000" cy="201168"/>
-          </a:xfrm>
-          <a:prstGeom prst="rect">
-            <a:avLst/>
-          </a:prstGeom>
-          <a:noFill/>
-          <a:ln/>
-        </p:spPr>
-        <p:txBody>
-          <a:bodyPr wrap="square" rtlCol="0" anchor="ctr"/>
-          <a:lstStyle/>
-          <a:p>
-            <a:pPr marL="0" indent="0">
-              <a:buNone/>
-            </a:pPr>
-            <a:r>
-              <a:rPr lang="en-US" sz="1000" dirty="0">
+              <a:rPr lang="en-US" sz="900" dirty="0">
                 <a:solidFill>
                   <a:srgbClr val="94A3B8"/>
                 </a:solidFill>
@@ -4233,137 +5206,9 @@
                 <a:ea typeface="Calibri" pitchFamily="34" charset="-122"/>
                 <a:cs typeface="Calibri" pitchFamily="34" charset="-120"/>
               </a:rPr>
-              <a:t>Human-in-the-loop interrupt</a:t>
-            </a:r>
-            <a:endParaRPr lang="en-US" sz="1000" dirty="0"/>
-          </a:p>
-        </p:txBody>
-      </p:sp>
-      <p:sp>
-        <p:nvSpPr>
-          <p:cNvPr id="51" name="Shape 49"/>
-          <p:cNvSpPr/>
-          <p:nvPr/>
-        </p:nvSpPr>
-        <p:spPr>
-          <a:xfrm>
-            <a:off x="3108960" y="4114800"/>
-            <a:ext cx="128016" cy="128016"/>
-          </a:xfrm>
-          <a:prstGeom prst="ellipse">
-            <a:avLst/>
-          </a:prstGeom>
-          <a:solidFill>
-            <a:srgbClr val="8B5CF6"/>
-          </a:solidFill>
-          <a:ln w="12700">
-            <a:solidFill>
-              <a:srgbClr val="8B5CF6"/>
-            </a:solidFill>
-            <a:prstDash val="solid"/>
-          </a:ln>
-        </p:spPr>
-      </p:sp>
-      <p:sp>
-        <p:nvSpPr>
-          <p:cNvPr id="52" name="Text 50"/>
-          <p:cNvSpPr/>
-          <p:nvPr/>
-        </p:nvSpPr>
-        <p:spPr>
-          <a:xfrm>
-            <a:off x="3291840" y="4087368"/>
-            <a:ext cx="2286000" cy="201168"/>
-          </a:xfrm>
-          <a:prstGeom prst="rect">
-            <a:avLst/>
-          </a:prstGeom>
-          <a:noFill/>
-          <a:ln/>
-        </p:spPr>
-        <p:txBody>
-          <a:bodyPr wrap="square" rtlCol="0" anchor="ctr"/>
-          <a:lstStyle/>
-          <a:p>
-            <a:pPr marL="0" indent="0">
-              <a:buNone/>
-            </a:pPr>
-            <a:r>
-              <a:rPr lang="en-US" sz="1000" dirty="0">
-                <a:solidFill>
-                  <a:srgbClr val="94A3B8"/>
-                </a:solidFill>
-                <a:latin typeface="Calibri" pitchFamily="34" charset="0"/>
-                <a:ea typeface="Calibri" pitchFamily="34" charset="-122"/>
-                <a:cs typeface="Calibri" pitchFamily="34" charset="-120"/>
-              </a:rPr>
-              <a:t>Query Knowledge Base (pgvector)</a:t>
-            </a:r>
-            <a:endParaRPr lang="en-US" sz="1000" dirty="0"/>
-          </a:p>
-        </p:txBody>
-      </p:sp>
-      <p:sp>
-        <p:nvSpPr>
-          <p:cNvPr id="53" name="Shape 51"/>
-          <p:cNvSpPr/>
-          <p:nvPr/>
-        </p:nvSpPr>
-        <p:spPr>
-          <a:xfrm>
-            <a:off x="5760720" y="4114800"/>
-            <a:ext cx="128016" cy="128016"/>
-          </a:xfrm>
-          <a:prstGeom prst="ellipse">
-            <a:avLst/>
-          </a:prstGeom>
-          <a:solidFill>
-            <a:srgbClr val="06B6D4"/>
-          </a:solidFill>
-          <a:ln w="12700">
-            <a:solidFill>
-              <a:srgbClr val="06B6D4"/>
-            </a:solidFill>
-            <a:prstDash val="solid"/>
-          </a:ln>
-        </p:spPr>
-      </p:sp>
-      <p:sp>
-        <p:nvSpPr>
-          <p:cNvPr id="54" name="Text 52"/>
-          <p:cNvSpPr/>
-          <p:nvPr/>
-        </p:nvSpPr>
-        <p:spPr>
-          <a:xfrm>
-            <a:off x="5943600" y="4087368"/>
-            <a:ext cx="2286000" cy="201168"/>
-          </a:xfrm>
-          <a:prstGeom prst="rect">
-            <a:avLst/>
-          </a:prstGeom>
-          <a:noFill/>
-          <a:ln/>
-        </p:spPr>
-        <p:txBody>
-          <a:bodyPr wrap="square" rtlCol="0" anchor="ctr"/>
-          <a:lstStyle/>
-          <a:p>
-            <a:pPr marL="0" indent="0">
-              <a:buNone/>
-            </a:pPr>
-            <a:r>
-              <a:rPr lang="en-US" sz="1000" dirty="0">
-                <a:solidFill>
-                  <a:srgbClr val="94A3B8"/>
-                </a:solidFill>
-                <a:latin typeface="Calibri" pitchFamily="34" charset="0"/>
-                <a:ea typeface="Calibri" pitchFamily="34" charset="-122"/>
-                <a:cs typeface="Calibri" pitchFamily="34" charset="-120"/>
-              </a:rPr>
-              <a:t>Warehouse: BigQuery / PostgreSQL</a:t>
-            </a:r>
-            <a:endParaRPr lang="en-US" sz="1000" dirty="0"/>
+              <a:t>Executor → Orchestrator → Optimizer auto-rectifies</a:t>
+            </a:r>
+            <a:endParaRPr lang="en-US" sz="900" dirty="0"/>
           </a:p>
         </p:txBody>
       </p:sp>
@@ -4408,8 +5253,8 @@
         </p:nvSpPr>
         <p:spPr>
           <a:xfrm>
-            <a:off x="1371600" y="1188720"/>
-            <a:ext cx="6400800" cy="274320"/>
+            <a:off x="457200" y="201168"/>
+            <a:ext cx="8229600" cy="256032"/>
           </a:xfrm>
           <a:prstGeom prst="rect">
             <a:avLst/>
@@ -4447,8 +5292,8 @@
         </p:nvSpPr>
         <p:spPr>
           <a:xfrm>
-            <a:off x="1371600" y="1554480"/>
-            <a:ext cx="6400800" cy="731520"/>
+            <a:off x="457200" y="502920"/>
+            <a:ext cx="8229600" cy="566928"/>
           </a:xfrm>
           <a:prstGeom prst="rect">
             <a:avLst/>
@@ -4464,7 +5309,7 @@
               <a:buNone/>
             </a:pPr>
             <a:r>
-              <a:rPr lang="en-US" sz="4400" b="1" dirty="0">
+              <a:rPr lang="en-US" sz="3800" b="1" dirty="0">
                 <a:solidFill>
                   <a:srgbClr val="FFFFFF"/>
                 </a:solidFill>
@@ -4474,59 +5319,20 @@
               </a:rPr>
               <a:t>Let's Ask DataPilot</a:t>
             </a:r>
-            <a:endParaRPr lang="en-US" sz="4400" dirty="0"/>
-          </a:p>
-        </p:txBody>
-      </p:sp>
-      <p:sp>
-        <p:nvSpPr>
-          <p:cNvPr id="4" name="Text 2"/>
-          <p:cNvSpPr/>
-          <p:nvPr/>
-        </p:nvSpPr>
-        <p:spPr>
-          <a:xfrm>
-            <a:off x="1371600" y="2377440"/>
-            <a:ext cx="6400800" cy="365760"/>
-          </a:xfrm>
-          <a:prstGeom prst="rect">
-            <a:avLst/>
-          </a:prstGeom>
-          <a:noFill/>
-          <a:ln/>
-        </p:spPr>
-        <p:txBody>
-          <a:bodyPr wrap="square" rtlCol="0" anchor="ctr"/>
-          <a:lstStyle/>
-          <a:p>
-            <a:pPr marL="0" indent="0" algn="ctr">
-              <a:buNone/>
-            </a:pPr>
-            <a:r>
-              <a:rPr lang="en-US" sz="1600" i="1" dirty="0">
-                <a:solidFill>
-                  <a:srgbClr val="94A3B8"/>
-                </a:solidFill>
-                <a:latin typeface="Calibri" pitchFamily="34" charset="0"/>
-                <a:ea typeface="Calibri" pitchFamily="34" charset="-122"/>
-                <a:cs typeface="Calibri" pitchFamily="34" charset="-120"/>
-              </a:rPr>
-              <a:t>A real question. A real query. A real answer.</a:t>
-            </a:r>
-            <a:endParaRPr lang="en-US" sz="1600" dirty="0"/>
-          </a:p>
-        </p:txBody>
-      </p:sp>
-      <p:sp>
-        <p:nvSpPr>
-          <p:cNvPr id="5" name="Shape 3"/>
-          <p:cNvSpPr/>
-          <p:nvPr/>
-        </p:nvSpPr>
-        <p:spPr>
-          <a:xfrm>
-            <a:off x="640080" y="3291840"/>
-            <a:ext cx="2377440" cy="411480"/>
+            <a:endParaRPr lang="en-US" sz="3800" dirty="0"/>
+          </a:p>
+        </p:txBody>
+      </p:sp>
+      <p:sp>
+        <p:nvSpPr>
+          <p:cNvPr id="4" name="Shape 2"/>
+          <p:cNvSpPr/>
+          <p:nvPr/>
+        </p:nvSpPr>
+        <p:spPr>
+          <a:xfrm>
+            <a:off x="274320" y="1234440"/>
+            <a:ext cx="2743200" cy="3639312"/>
           </a:xfrm>
           <a:prstGeom prst="rect">
             <a:avLst/>
@@ -4536,7 +5342,7 @@
           </a:solidFill>
           <a:ln w="12700">
             <a:solidFill>
-              <a:srgbClr val="3B82F6"/>
+              <a:srgbClr val="06B6D4"/>
             </a:solidFill>
             <a:prstDash val="solid"/>
           </a:ln>
@@ -4551,63 +5357,288 @@
       </p:sp>
       <p:sp>
         <p:nvSpPr>
-          <p:cNvPr id="6" name="Text 4"/>
-          <p:cNvSpPr/>
-          <p:nvPr/>
-        </p:nvSpPr>
-        <p:spPr>
-          <a:xfrm>
-            <a:off x="640080" y="3291840"/>
-            <a:ext cx="2377440" cy="411480"/>
-          </a:xfrm>
-          <a:prstGeom prst="rect">
-            <a:avLst/>
-          </a:prstGeom>
-          <a:noFill/>
-          <a:ln/>
-        </p:spPr>
-        <p:txBody>
-          <a:bodyPr wrap="square" rtlCol="0" anchor="ctr"/>
-          <a:lstStyle/>
-          <a:p>
-            <a:pPr marL="0" indent="0" algn="ctr">
-              <a:buNone/>
-            </a:pPr>
-            <a:r>
-              <a:rPr lang="en-US" sz="1000" dirty="0">
-                <a:solidFill>
-                  <a:srgbClr val="94A3B8"/>
-                </a:solidFill>
-                <a:latin typeface="Calibri" pitchFamily="34" charset="0"/>
-                <a:ea typeface="Calibri" pitchFamily="34" charset="-122"/>
-                <a:cs typeface="Calibri" pitchFamily="34" charset="-120"/>
-              </a:rPr>
-              <a:t>Top sales rep last quarter?</a:t>
-            </a:r>
-            <a:endParaRPr lang="en-US" sz="1000" dirty="0"/>
-          </a:p>
-        </p:txBody>
-      </p:sp>
-      <p:sp>
-        <p:nvSpPr>
-          <p:cNvPr id="7" name="Shape 5"/>
-          <p:cNvSpPr/>
-          <p:nvPr/>
-        </p:nvSpPr>
-        <p:spPr>
-          <a:xfrm>
-            <a:off x="3383280" y="3291840"/>
-            <a:ext cx="2377440" cy="411480"/>
-          </a:xfrm>
-          <a:prstGeom prst="rect">
-            <a:avLst/>
-          </a:prstGeom>
-          <a:solidFill>
-            <a:srgbClr val="1E2D4F"/>
+          <p:cNvPr id="5" name="Shape 3"/>
+          <p:cNvSpPr/>
+          <p:nvPr/>
+        </p:nvSpPr>
+        <p:spPr>
+          <a:xfrm>
+            <a:off x="274320" y="1234440"/>
+            <a:ext cx="2743200" cy="54864"/>
+          </a:xfrm>
+          <a:prstGeom prst="rect">
+            <a:avLst/>
+          </a:prstGeom>
+          <a:solidFill>
+            <a:srgbClr val="06B6D4"/>
           </a:solidFill>
           <a:ln w="12700">
             <a:solidFill>
-              <a:srgbClr val="3B82F6"/>
+              <a:srgbClr val="06B6D4"/>
+            </a:solidFill>
+            <a:prstDash val="solid"/>
+          </a:ln>
+        </p:spPr>
+      </p:sp>
+      <p:sp>
+        <p:nvSpPr>
+          <p:cNvPr id="6" name="Text 4"/>
+          <p:cNvSpPr/>
+          <p:nvPr/>
+        </p:nvSpPr>
+        <p:spPr>
+          <a:xfrm>
+            <a:off x="384048" y="1335024"/>
+            <a:ext cx="2560320" cy="201168"/>
+          </a:xfrm>
+          <a:prstGeom prst="rect">
+            <a:avLst/>
+          </a:prstGeom>
+          <a:noFill/>
+          <a:ln/>
+        </p:spPr>
+        <p:txBody>
+          <a:bodyPr wrap="square" rtlCol="0" anchor="ctr"/>
+          <a:lstStyle/>
+          <a:p>
+            <a:pPr marL="0" indent="0">
+              <a:buNone/>
+            </a:pPr>
+            <a:r>
+              <a:rPr lang="en-US" sz="800" b="1" kern="0" spc="100" dirty="0">
+                <a:solidFill>
+                  <a:srgbClr val="06B6D4"/>
+                </a:solidFill>
+                <a:latin typeface="Calibri" pitchFamily="34" charset="0"/>
+                <a:ea typeface="Calibri" pitchFamily="34" charset="-122"/>
+                <a:cs typeface="Calibri" pitchFamily="34" charset="-120"/>
+              </a:rPr>
+              <a:t>BIGQUERY  ·  FIRST-TIME QUERY</a:t>
+            </a:r>
+            <a:endParaRPr lang="en-US" sz="800" dirty="0"/>
+          </a:p>
+        </p:txBody>
+      </p:sp>
+      <p:sp>
+        <p:nvSpPr>
+          <p:cNvPr id="7" name="Text 5"/>
+          <p:cNvSpPr/>
+          <p:nvPr/>
+        </p:nvSpPr>
+        <p:spPr>
+          <a:xfrm>
+            <a:off x="384048" y="1591056"/>
+            <a:ext cx="2560320" cy="914400"/>
+          </a:xfrm>
+          <a:prstGeom prst="rect">
+            <a:avLst/>
+          </a:prstGeom>
+          <a:noFill/>
+          <a:ln/>
+        </p:spPr>
+        <p:txBody>
+          <a:bodyPr wrap="square" rtlCol="0" anchor="ctr"/>
+          <a:lstStyle/>
+          <a:p>
+            <a:r>
+              <a:rPr lang="en-US" sz="1400" dirty="0">
+                <a:solidFill>
+                  <a:schemeClr val="bg1"/>
+                </a:solidFill>
+              </a:rPr>
+              <a:t>Show the top 10 brands by units sold</a:t>
+            </a:r>
+            <a:endParaRPr lang="en-US" sz="1400" dirty="0"/>
+          </a:p>
+        </p:txBody>
+      </p:sp>
+      <p:sp>
+        <p:nvSpPr>
+          <p:cNvPr id="8" name="Shape 6"/>
+          <p:cNvSpPr/>
+          <p:nvPr/>
+        </p:nvSpPr>
+        <p:spPr>
+          <a:xfrm>
+            <a:off x="384048" y="2624328"/>
+            <a:ext cx="2523744" cy="22860"/>
+          </a:xfrm>
+          <a:prstGeom prst="rect">
+            <a:avLst/>
+          </a:prstGeom>
+          <a:solidFill>
+            <a:srgbClr val="1E3A5F"/>
+          </a:solidFill>
+          <a:ln w="12700">
+            <a:solidFill>
+              <a:srgbClr val="1E3A5F"/>
+            </a:solidFill>
+            <a:prstDash val="solid"/>
+          </a:ln>
+        </p:spPr>
+      </p:sp>
+      <p:sp>
+        <p:nvSpPr>
+          <p:cNvPr id="9" name="Text 7"/>
+          <p:cNvSpPr/>
+          <p:nvPr/>
+        </p:nvSpPr>
+        <p:spPr>
+          <a:xfrm>
+            <a:off x="384048" y="2670048"/>
+            <a:ext cx="2560320" cy="182880"/>
+          </a:xfrm>
+          <a:prstGeom prst="rect">
+            <a:avLst/>
+          </a:prstGeom>
+          <a:noFill/>
+          <a:ln/>
+        </p:spPr>
+        <p:txBody>
+          <a:bodyPr wrap="square" rtlCol="0" anchor="ctr"/>
+          <a:lstStyle/>
+          <a:p>
+            <a:pPr marL="0" indent="0">
+              <a:buNone/>
+            </a:pPr>
+            <a:r>
+              <a:rPr lang="en-US" sz="800" b="1" kern="0" spc="100" dirty="0">
+                <a:solidFill>
+                  <a:srgbClr val="64748B"/>
+                </a:solidFill>
+                <a:latin typeface="Calibri" pitchFamily="34" charset="0"/>
+                <a:ea typeface="Calibri" pitchFamily="34" charset="-122"/>
+                <a:cs typeface="Calibri" pitchFamily="34" charset="-120"/>
+              </a:rPr>
+              <a:t>PIPELINE FLOW</a:t>
+            </a:r>
+            <a:endParaRPr lang="en-US" sz="800" dirty="0"/>
+          </a:p>
+        </p:txBody>
+      </p:sp>
+      <p:sp>
+        <p:nvSpPr>
+          <p:cNvPr id="10" name="Text 8"/>
+          <p:cNvSpPr/>
+          <p:nvPr/>
+        </p:nvSpPr>
+        <p:spPr>
+          <a:xfrm>
+            <a:off x="384048" y="2871216"/>
+            <a:ext cx="2560320" cy="822960"/>
+          </a:xfrm>
+          <a:prstGeom prst="rect">
+            <a:avLst/>
+          </a:prstGeom>
+          <a:noFill/>
+          <a:ln/>
+        </p:spPr>
+        <p:txBody>
+          <a:bodyPr wrap="square" rtlCol="0" anchor="ctr"/>
+          <a:lstStyle/>
+          <a:p>
+            <a:pPr marL="0" indent="0">
+              <a:buNone/>
+            </a:pPr>
+            <a:r>
+              <a:rPr lang="en-US" sz="900" dirty="0">
+                <a:solidFill>
+                  <a:srgbClr val="94A3B8"/>
+                </a:solidFill>
+                <a:latin typeface="Calibri" pitchFamily="34" charset="0"/>
+                <a:ea typeface="Calibri" pitchFamily="34" charset="-122"/>
+                <a:cs typeface="Calibri" pitchFamily="34" charset="-120"/>
+              </a:rPr>
+              <a:t>query_kb miss → planner → discovery → optimizer prepare → HITL approval → executor → validator → visualization</a:t>
+            </a:r>
+            <a:endParaRPr lang="en-US" sz="900" dirty="0"/>
+          </a:p>
+        </p:txBody>
+      </p:sp>
+      <p:sp>
+        <p:nvSpPr>
+          <p:cNvPr id="11" name="Shape 9"/>
+          <p:cNvSpPr/>
+          <p:nvPr/>
+        </p:nvSpPr>
+        <p:spPr>
+          <a:xfrm>
+            <a:off x="384048" y="3730752"/>
+            <a:ext cx="2523744" cy="22860"/>
+          </a:xfrm>
+          <a:prstGeom prst="rect">
+            <a:avLst/>
+          </a:prstGeom>
+          <a:solidFill>
+            <a:srgbClr val="1E3A5F"/>
+          </a:solidFill>
+          <a:ln w="12700">
+            <a:solidFill>
+              <a:srgbClr val="1E3A5F"/>
+            </a:solidFill>
+            <a:prstDash val="solid"/>
+          </a:ln>
+        </p:spPr>
+      </p:sp>
+      <p:sp>
+        <p:nvSpPr>
+          <p:cNvPr id="12" name="Text 10"/>
+          <p:cNvSpPr/>
+          <p:nvPr/>
+        </p:nvSpPr>
+        <p:spPr>
+          <a:xfrm>
+            <a:off x="384048" y="3776472"/>
+            <a:ext cx="2560320" cy="329184"/>
+          </a:xfrm>
+          <a:prstGeom prst="rect">
+            <a:avLst/>
+          </a:prstGeom>
+          <a:noFill/>
+          <a:ln/>
+        </p:spPr>
+        <p:txBody>
+          <a:bodyPr wrap="square" rtlCol="0" anchor="ctr"/>
+          <a:lstStyle/>
+          <a:p>
+            <a:pPr marL="0" indent="0">
+              <a:buNone/>
+            </a:pPr>
+            <a:r>
+              <a:rPr lang="en-US" sz="900" i="1" dirty="0">
+                <a:solidFill>
+                  <a:srgbClr val="06B6D4"/>
+                </a:solidFill>
+                <a:latin typeface="Calibri" pitchFamily="34" charset="0"/>
+                <a:ea typeface="Calibri" pitchFamily="34" charset="-122"/>
+                <a:cs typeface="Calibri" pitchFamily="34" charset="-120"/>
+              </a:rPr>
+              <a:t>Full pipeline. Every agent visible in the trace.</a:t>
+            </a:r>
+            <a:endParaRPr lang="en-US" sz="900" dirty="0"/>
+          </a:p>
+        </p:txBody>
+      </p:sp>
+      <p:sp>
+        <p:nvSpPr>
+          <p:cNvPr id="13" name="Shape 11"/>
+          <p:cNvSpPr/>
+          <p:nvPr/>
+        </p:nvSpPr>
+        <p:spPr>
+          <a:xfrm>
+            <a:off x="3246120" y="1234440"/>
+            <a:ext cx="2743200" cy="3639312"/>
+          </a:xfrm>
+          <a:prstGeom prst="rect">
+            <a:avLst/>
+          </a:prstGeom>
+          <a:solidFill>
+            <a:srgbClr val="1E2D4F"/>
+          </a:solidFill>
+          <a:ln w="12700">
+            <a:solidFill>
+              <a:srgbClr val="8B5CF6"/>
             </a:solidFill>
             <a:prstDash val="solid"/>
           </a:ln>
@@ -4622,63 +5653,294 @@
       </p:sp>
       <p:sp>
         <p:nvSpPr>
-          <p:cNvPr id="8" name="Text 6"/>
-          <p:cNvSpPr/>
-          <p:nvPr/>
-        </p:nvSpPr>
-        <p:spPr>
-          <a:xfrm>
-            <a:off x="3383280" y="3291840"/>
-            <a:ext cx="2377440" cy="411480"/>
-          </a:xfrm>
-          <a:prstGeom prst="rect">
-            <a:avLst/>
-          </a:prstGeom>
-          <a:noFill/>
-          <a:ln/>
-        </p:spPr>
-        <p:txBody>
-          <a:bodyPr wrap="square" rtlCol="0" anchor="ctr"/>
-          <a:lstStyle/>
-          <a:p>
-            <a:pPr marL="0" indent="0" algn="ctr">
-              <a:buNone/>
-            </a:pPr>
-            <a:r>
-              <a:rPr lang="en-US" sz="1000" dirty="0">
-                <a:solidFill>
-                  <a:srgbClr val="94A3B8"/>
-                </a:solidFill>
-                <a:latin typeface="Calibri" pitchFamily="34" charset="0"/>
-                <a:ea typeface="Calibri" pitchFamily="34" charset="-122"/>
-                <a:cs typeface="Calibri" pitchFamily="34" charset="-120"/>
-              </a:rPr>
-              <a:t>Which campaign drove most orders?</a:t>
-            </a:r>
-            <a:endParaRPr lang="en-US" sz="1000" dirty="0"/>
-          </a:p>
-        </p:txBody>
-      </p:sp>
-      <p:sp>
-        <p:nvSpPr>
-          <p:cNvPr id="9" name="Shape 7"/>
-          <p:cNvSpPr/>
-          <p:nvPr/>
-        </p:nvSpPr>
-        <p:spPr>
-          <a:xfrm>
-            <a:off x="6035040" y="3291840"/>
-            <a:ext cx="2377440" cy="411480"/>
-          </a:xfrm>
-          <a:prstGeom prst="rect">
-            <a:avLst/>
-          </a:prstGeom>
-          <a:solidFill>
-            <a:srgbClr val="1E2D4F"/>
+          <p:cNvPr id="14" name="Shape 12"/>
+          <p:cNvSpPr/>
+          <p:nvPr/>
+        </p:nvSpPr>
+        <p:spPr>
+          <a:xfrm>
+            <a:off x="3246120" y="1234440"/>
+            <a:ext cx="2743200" cy="54864"/>
+          </a:xfrm>
+          <a:prstGeom prst="rect">
+            <a:avLst/>
+          </a:prstGeom>
+          <a:solidFill>
+            <a:srgbClr val="8B5CF6"/>
           </a:solidFill>
           <a:ln w="12700">
             <a:solidFill>
-              <a:srgbClr val="3B82F6"/>
+              <a:srgbClr val="8B5CF6"/>
+            </a:solidFill>
+            <a:prstDash val="solid"/>
+          </a:ln>
+        </p:spPr>
+      </p:sp>
+      <p:sp>
+        <p:nvSpPr>
+          <p:cNvPr id="15" name="Text 13"/>
+          <p:cNvSpPr/>
+          <p:nvPr/>
+        </p:nvSpPr>
+        <p:spPr>
+          <a:xfrm>
+            <a:off x="3355848" y="1335024"/>
+            <a:ext cx="2560320" cy="201168"/>
+          </a:xfrm>
+          <a:prstGeom prst="rect">
+            <a:avLst/>
+          </a:prstGeom>
+          <a:noFill/>
+          <a:ln/>
+        </p:spPr>
+        <p:txBody>
+          <a:bodyPr wrap="square" rtlCol="0" anchor="ctr"/>
+          <a:lstStyle/>
+          <a:p>
+            <a:pPr marL="0" indent="0">
+              <a:buNone/>
+            </a:pPr>
+            <a:r>
+              <a:rPr lang="en-US" sz="800" b="1" kern="0" spc="100" dirty="0">
+                <a:solidFill>
+                  <a:srgbClr val="8B5CF6"/>
+                </a:solidFill>
+                <a:latin typeface="Calibri" pitchFamily="34" charset="0"/>
+                <a:ea typeface="Calibri" pitchFamily="34" charset="-122"/>
+                <a:cs typeface="Calibri" pitchFamily="34" charset="-120"/>
+              </a:rPr>
+              <a:t>POSTGRES  ·  PREVIOUSLY ASKED</a:t>
+            </a:r>
+            <a:endParaRPr lang="en-US" sz="800" dirty="0"/>
+          </a:p>
+        </p:txBody>
+      </p:sp>
+      <p:sp>
+        <p:nvSpPr>
+          <p:cNvPr id="16" name="Text 14"/>
+          <p:cNvSpPr/>
+          <p:nvPr/>
+        </p:nvSpPr>
+        <p:spPr>
+          <a:xfrm>
+            <a:off x="3355848" y="1591056"/>
+            <a:ext cx="2560320" cy="914400"/>
+          </a:xfrm>
+          <a:prstGeom prst="rect">
+            <a:avLst/>
+          </a:prstGeom>
+          <a:noFill/>
+          <a:ln/>
+        </p:spPr>
+        <p:txBody>
+          <a:bodyPr wrap="square" rtlCol="0" anchor="ctr"/>
+          <a:lstStyle/>
+          <a:p>
+            <a:pPr marL="0" indent="0">
+              <a:buNone/>
+            </a:pPr>
+            <a:r>
+              <a:rPr lang="en-US" sz="1400" b="1" dirty="0">
+                <a:solidFill>
+                  <a:srgbClr val="FFFFFF"/>
+                </a:solidFill>
+                <a:latin typeface="Trebuchet MS" pitchFamily="34" charset="0"/>
+                <a:ea typeface="Trebuchet MS" pitchFamily="34" charset="-122"/>
+                <a:cs typeface="Trebuchet MS" pitchFamily="34" charset="-120"/>
+              </a:rPr>
+              <a:t>Which sales rep had the highest revenue in 2024?</a:t>
+            </a:r>
+            <a:endParaRPr lang="en-US" sz="1400" dirty="0"/>
+          </a:p>
+        </p:txBody>
+      </p:sp>
+      <p:sp>
+        <p:nvSpPr>
+          <p:cNvPr id="17" name="Shape 15"/>
+          <p:cNvSpPr/>
+          <p:nvPr/>
+        </p:nvSpPr>
+        <p:spPr>
+          <a:xfrm>
+            <a:off x="3355848" y="2624328"/>
+            <a:ext cx="2523744" cy="22860"/>
+          </a:xfrm>
+          <a:prstGeom prst="rect">
+            <a:avLst/>
+          </a:prstGeom>
+          <a:solidFill>
+            <a:srgbClr val="1E3A5F"/>
+          </a:solidFill>
+          <a:ln w="12700">
+            <a:solidFill>
+              <a:srgbClr val="1E3A5F"/>
+            </a:solidFill>
+            <a:prstDash val="solid"/>
+          </a:ln>
+        </p:spPr>
+      </p:sp>
+      <p:sp>
+        <p:nvSpPr>
+          <p:cNvPr id="18" name="Text 16"/>
+          <p:cNvSpPr/>
+          <p:nvPr/>
+        </p:nvSpPr>
+        <p:spPr>
+          <a:xfrm>
+            <a:off x="3355848" y="2670048"/>
+            <a:ext cx="2560320" cy="182880"/>
+          </a:xfrm>
+          <a:prstGeom prst="rect">
+            <a:avLst/>
+          </a:prstGeom>
+          <a:noFill/>
+          <a:ln/>
+        </p:spPr>
+        <p:txBody>
+          <a:bodyPr wrap="square" rtlCol="0" anchor="ctr"/>
+          <a:lstStyle/>
+          <a:p>
+            <a:pPr marL="0" indent="0">
+              <a:buNone/>
+            </a:pPr>
+            <a:r>
+              <a:rPr lang="en-US" sz="800" b="1" kern="0" spc="100" dirty="0">
+                <a:solidFill>
+                  <a:srgbClr val="64748B"/>
+                </a:solidFill>
+                <a:latin typeface="Calibri" pitchFamily="34" charset="0"/>
+                <a:ea typeface="Calibri" pitchFamily="34" charset="-122"/>
+                <a:cs typeface="Calibri" pitchFamily="34" charset="-120"/>
+              </a:rPr>
+              <a:t>PIPELINE FLOW</a:t>
+            </a:r>
+            <a:endParaRPr lang="en-US" sz="800" dirty="0"/>
+          </a:p>
+        </p:txBody>
+      </p:sp>
+      <p:sp>
+        <p:nvSpPr>
+          <p:cNvPr id="19" name="Text 17"/>
+          <p:cNvSpPr/>
+          <p:nvPr/>
+        </p:nvSpPr>
+        <p:spPr>
+          <a:xfrm>
+            <a:off x="3355848" y="2871216"/>
+            <a:ext cx="2560320" cy="822960"/>
+          </a:xfrm>
+          <a:prstGeom prst="rect">
+            <a:avLst/>
+          </a:prstGeom>
+          <a:noFill/>
+          <a:ln/>
+        </p:spPr>
+        <p:txBody>
+          <a:bodyPr wrap="square" rtlCol="0" anchor="ctr"/>
+          <a:lstStyle/>
+          <a:p>
+            <a:pPr marL="0" indent="0">
+              <a:buNone/>
+            </a:pPr>
+            <a:r>
+              <a:rPr lang="en-US" sz="900" dirty="0">
+                <a:solidFill>
+                  <a:srgbClr val="94A3B8"/>
+                </a:solidFill>
+                <a:latin typeface="Calibri" pitchFamily="34" charset="0"/>
+                <a:ea typeface="Calibri" pitchFamily="34" charset="-122"/>
+                <a:cs typeface="Calibri" pitchFamily="34" charset="-120"/>
+              </a:rPr>
+              <a:t>query_kb HIT → cached SQL surfaced → HITL → executor → visualization (planner + discovery + optimizer skipped)</a:t>
+            </a:r>
+            <a:endParaRPr lang="en-US" sz="900" dirty="0"/>
+          </a:p>
+        </p:txBody>
+      </p:sp>
+      <p:sp>
+        <p:nvSpPr>
+          <p:cNvPr id="20" name="Shape 18"/>
+          <p:cNvSpPr/>
+          <p:nvPr/>
+        </p:nvSpPr>
+        <p:spPr>
+          <a:xfrm>
+            <a:off x="3355848" y="3730752"/>
+            <a:ext cx="2523744" cy="22860"/>
+          </a:xfrm>
+          <a:prstGeom prst="rect">
+            <a:avLst/>
+          </a:prstGeom>
+          <a:solidFill>
+            <a:srgbClr val="1E3A5F"/>
+          </a:solidFill>
+          <a:ln w="12700">
+            <a:solidFill>
+              <a:srgbClr val="1E3A5F"/>
+            </a:solidFill>
+            <a:prstDash val="solid"/>
+          </a:ln>
+        </p:spPr>
+      </p:sp>
+      <p:sp>
+        <p:nvSpPr>
+          <p:cNvPr id="21" name="Text 19"/>
+          <p:cNvSpPr/>
+          <p:nvPr/>
+        </p:nvSpPr>
+        <p:spPr>
+          <a:xfrm>
+            <a:off x="3355848" y="3776472"/>
+            <a:ext cx="2560320" cy="329184"/>
+          </a:xfrm>
+          <a:prstGeom prst="rect">
+            <a:avLst/>
+          </a:prstGeom>
+          <a:noFill/>
+          <a:ln/>
+        </p:spPr>
+        <p:txBody>
+          <a:bodyPr wrap="square" rtlCol="0" anchor="ctr"/>
+          <a:lstStyle/>
+          <a:p>
+            <a:pPr marL="0" indent="0">
+              <a:buNone/>
+            </a:pPr>
+            <a:r>
+              <a:rPr lang="en-US" sz="900" i="1" dirty="0">
+                <a:solidFill>
+                  <a:srgbClr val="8B5CF6"/>
+                </a:solidFill>
+                <a:latin typeface="Calibri" pitchFamily="34" charset="0"/>
+                <a:ea typeface="Calibri" pitchFamily="34" charset="-122"/>
+                <a:cs typeface="Calibri" pitchFamily="34" charset="-120"/>
+              </a:rPr>
+              <a:t>Query KB cache hit. Shows how the system learns.</a:t>
+            </a:r>
+            <a:endParaRPr lang="en-US" sz="900" dirty="0"/>
+          </a:p>
+        </p:txBody>
+      </p:sp>
+      <p:sp>
+        <p:nvSpPr>
+          <p:cNvPr id="22" name="Shape 20"/>
+          <p:cNvSpPr/>
+          <p:nvPr/>
+        </p:nvSpPr>
+        <p:spPr>
+          <a:xfrm>
+            <a:off x="6217920" y="1234440"/>
+            <a:ext cx="2743200" cy="3639312"/>
+          </a:xfrm>
+          <a:prstGeom prst="rect">
+            <a:avLst/>
+          </a:prstGeom>
+          <a:solidFill>
+            <a:srgbClr val="1E2D4F"/>
+          </a:solidFill>
+          <a:ln w="12700">
+            <a:solidFill>
+              <a:srgbClr val="EF4444"/>
             </a:solidFill>
             <a:prstDash val="solid"/>
           </a:ln>
@@ -4693,14 +5955,284 @@
       </p:sp>
       <p:sp>
         <p:nvSpPr>
-          <p:cNvPr id="10" name="Text 8"/>
-          <p:cNvSpPr/>
-          <p:nvPr/>
-        </p:nvSpPr>
-        <p:spPr>
-          <a:xfrm>
-            <a:off x="6035040" y="3291840"/>
-            <a:ext cx="2377440" cy="411480"/>
+          <p:cNvPr id="23" name="Shape 21"/>
+          <p:cNvSpPr/>
+          <p:nvPr/>
+        </p:nvSpPr>
+        <p:spPr>
+          <a:xfrm>
+            <a:off x="6217920" y="1234440"/>
+            <a:ext cx="2743200" cy="54864"/>
+          </a:xfrm>
+          <a:prstGeom prst="rect">
+            <a:avLst/>
+          </a:prstGeom>
+          <a:solidFill>
+            <a:srgbClr val="EF4444"/>
+          </a:solidFill>
+          <a:ln w="12700">
+            <a:solidFill>
+              <a:srgbClr val="EF4444"/>
+            </a:solidFill>
+            <a:prstDash val="solid"/>
+          </a:ln>
+        </p:spPr>
+      </p:sp>
+      <p:sp>
+        <p:nvSpPr>
+          <p:cNvPr id="24" name="Text 22"/>
+          <p:cNvSpPr/>
+          <p:nvPr/>
+        </p:nvSpPr>
+        <p:spPr>
+          <a:xfrm>
+            <a:off x="6327648" y="1335024"/>
+            <a:ext cx="2560320" cy="201168"/>
+          </a:xfrm>
+          <a:prstGeom prst="rect">
+            <a:avLst/>
+          </a:prstGeom>
+          <a:noFill/>
+          <a:ln/>
+        </p:spPr>
+        <p:txBody>
+          <a:bodyPr wrap="square" rtlCol="0" anchor="ctr"/>
+          <a:lstStyle/>
+          <a:p>
+            <a:pPr marL="0" indent="0">
+              <a:buNone/>
+            </a:pPr>
+            <a:r>
+              <a:rPr lang="en-US" sz="800" b="1" kern="0" spc="100" dirty="0">
+                <a:solidFill>
+                  <a:srgbClr val="EF4444"/>
+                </a:solidFill>
+                <a:latin typeface="Calibri" pitchFamily="34" charset="0"/>
+                <a:ea typeface="Calibri" pitchFamily="34" charset="-122"/>
+                <a:cs typeface="Calibri" pitchFamily="34" charset="-120"/>
+              </a:rPr>
+              <a:t>FAILURE CASE  ·  GUARDRAIL FIRES</a:t>
+            </a:r>
+            <a:endParaRPr lang="en-US" sz="800" dirty="0"/>
+          </a:p>
+        </p:txBody>
+      </p:sp>
+      <p:sp>
+        <p:nvSpPr>
+          <p:cNvPr id="25" name="Text 23"/>
+          <p:cNvSpPr/>
+          <p:nvPr/>
+        </p:nvSpPr>
+        <p:spPr>
+          <a:xfrm>
+            <a:off x="6327648" y="1591056"/>
+            <a:ext cx="2560320" cy="914400"/>
+          </a:xfrm>
+          <a:prstGeom prst="rect">
+            <a:avLst/>
+          </a:prstGeom>
+          <a:noFill/>
+          <a:ln/>
+        </p:spPr>
+        <p:txBody>
+          <a:bodyPr wrap="square" rtlCol="0" anchor="ctr"/>
+          <a:lstStyle/>
+          <a:p>
+            <a:pPr marL="0" indent="0">
+              <a:buNone/>
+            </a:pPr>
+            <a:r>
+              <a:rPr lang="en-US" sz="1400" b="1" dirty="0">
+                <a:solidFill>
+                  <a:srgbClr val="FFFFFF"/>
+                </a:solidFill>
+                <a:latin typeface="Trebuchet MS" pitchFamily="34" charset="0"/>
+                <a:ea typeface="Trebuchet MS" pitchFamily="34" charset="-122"/>
+                <a:cs typeface="Trebuchet MS" pitchFamily="34" charset="-120"/>
+              </a:rPr>
+              <a:t>Show me revenue for last month</a:t>
+            </a:r>
+            <a:endParaRPr lang="en-US" sz="1400" dirty="0"/>
+          </a:p>
+        </p:txBody>
+      </p:sp>
+      <p:sp>
+        <p:nvSpPr>
+          <p:cNvPr id="26" name="Shape 24"/>
+          <p:cNvSpPr/>
+          <p:nvPr/>
+        </p:nvSpPr>
+        <p:spPr>
+          <a:xfrm>
+            <a:off x="6327648" y="2624328"/>
+            <a:ext cx="2523744" cy="22860"/>
+          </a:xfrm>
+          <a:prstGeom prst="rect">
+            <a:avLst/>
+          </a:prstGeom>
+          <a:solidFill>
+            <a:srgbClr val="1E3A5F"/>
+          </a:solidFill>
+          <a:ln w="12700">
+            <a:solidFill>
+              <a:srgbClr val="1E3A5F"/>
+            </a:solidFill>
+            <a:prstDash val="solid"/>
+          </a:ln>
+        </p:spPr>
+      </p:sp>
+      <p:sp>
+        <p:nvSpPr>
+          <p:cNvPr id="27" name="Text 25"/>
+          <p:cNvSpPr/>
+          <p:nvPr/>
+        </p:nvSpPr>
+        <p:spPr>
+          <a:xfrm>
+            <a:off x="6327648" y="2670048"/>
+            <a:ext cx="2560320" cy="182880"/>
+          </a:xfrm>
+          <a:prstGeom prst="rect">
+            <a:avLst/>
+          </a:prstGeom>
+          <a:noFill/>
+          <a:ln/>
+        </p:spPr>
+        <p:txBody>
+          <a:bodyPr wrap="square" rtlCol="0" anchor="ctr"/>
+          <a:lstStyle/>
+          <a:p>
+            <a:pPr marL="0" indent="0">
+              <a:buNone/>
+            </a:pPr>
+            <a:r>
+              <a:rPr lang="en-US" sz="800" b="1" kern="0" spc="100" dirty="0">
+                <a:solidFill>
+                  <a:srgbClr val="64748B"/>
+                </a:solidFill>
+                <a:latin typeface="Calibri" pitchFamily="34" charset="0"/>
+                <a:ea typeface="Calibri" pitchFamily="34" charset="-122"/>
+                <a:cs typeface="Calibri" pitchFamily="34" charset="-120"/>
+              </a:rPr>
+              <a:t>PIPELINE FLOW</a:t>
+            </a:r>
+            <a:endParaRPr lang="en-US" sz="800" dirty="0"/>
+          </a:p>
+        </p:txBody>
+      </p:sp>
+      <p:sp>
+        <p:nvSpPr>
+          <p:cNvPr id="28" name="Text 26"/>
+          <p:cNvSpPr/>
+          <p:nvPr/>
+        </p:nvSpPr>
+        <p:spPr>
+          <a:xfrm>
+            <a:off x="6327648" y="2871216"/>
+            <a:ext cx="2560320" cy="822960"/>
+          </a:xfrm>
+          <a:prstGeom prst="rect">
+            <a:avLst/>
+          </a:prstGeom>
+          <a:noFill/>
+          <a:ln/>
+        </p:spPr>
+        <p:txBody>
+          <a:bodyPr wrap="square" rtlCol="0" anchor="ctr"/>
+          <a:lstStyle/>
+          <a:p>
+            <a:pPr marL="0" indent="0">
+              <a:buNone/>
+            </a:pPr>
+            <a:r>
+              <a:rPr lang="en-US" sz="900" dirty="0">
+                <a:solidFill>
+                  <a:srgbClr val="94A3B8"/>
+                </a:solidFill>
+                <a:latin typeface="Calibri" pitchFamily="34" charset="0"/>
+                <a:ea typeface="Calibri" pitchFamily="34" charset="-122"/>
+                <a:cs typeface="Calibri" pitchFamily="34" charset="-120"/>
+              </a:rPr>
+              <a:t>time_window_guard fires — data ends Dec 2024, 'last month' = March 2026 → blocked before any SQL is generated</a:t>
+            </a:r>
+            <a:endParaRPr lang="en-US" sz="900" dirty="0"/>
+          </a:p>
+        </p:txBody>
+      </p:sp>
+      <p:sp>
+        <p:nvSpPr>
+          <p:cNvPr id="29" name="Shape 27"/>
+          <p:cNvSpPr/>
+          <p:nvPr/>
+        </p:nvSpPr>
+        <p:spPr>
+          <a:xfrm>
+            <a:off x="6327648" y="3730752"/>
+            <a:ext cx="2523744" cy="22860"/>
+          </a:xfrm>
+          <a:prstGeom prst="rect">
+            <a:avLst/>
+          </a:prstGeom>
+          <a:solidFill>
+            <a:srgbClr val="1E3A5F"/>
+          </a:solidFill>
+          <a:ln w="12700">
+            <a:solidFill>
+              <a:srgbClr val="1E3A5F"/>
+            </a:solidFill>
+            <a:prstDash val="solid"/>
+          </a:ln>
+        </p:spPr>
+      </p:sp>
+      <p:sp>
+        <p:nvSpPr>
+          <p:cNvPr id="30" name="Text 28"/>
+          <p:cNvSpPr/>
+          <p:nvPr/>
+        </p:nvSpPr>
+        <p:spPr>
+          <a:xfrm>
+            <a:off x="6327648" y="3776472"/>
+            <a:ext cx="2560320" cy="329184"/>
+          </a:xfrm>
+          <a:prstGeom prst="rect">
+            <a:avLst/>
+          </a:prstGeom>
+          <a:noFill/>
+          <a:ln/>
+        </p:spPr>
+        <p:txBody>
+          <a:bodyPr wrap="square" rtlCol="0" anchor="ctr"/>
+          <a:lstStyle/>
+          <a:p>
+            <a:pPr marL="0" indent="0">
+              <a:buNone/>
+            </a:pPr>
+            <a:r>
+              <a:rPr lang="en-US" sz="900" i="1" dirty="0">
+                <a:solidFill>
+                  <a:srgbClr val="EF4444"/>
+                </a:solidFill>
+                <a:latin typeface="Calibri" pitchFamily="34" charset="0"/>
+                <a:ea typeface="Calibri" pitchFamily="34" charset="-122"/>
+                <a:cs typeface="Calibri" pitchFamily="34" charset="-120"/>
+              </a:rPr>
+              <a:t>Clear user-facing message. No SQL attempted.</a:t>
+            </a:r>
+            <a:endParaRPr lang="en-US" sz="900" dirty="0"/>
+          </a:p>
+        </p:txBody>
+      </p:sp>
+      <p:sp>
+        <p:nvSpPr>
+          <p:cNvPr id="31" name="Text 29"/>
+          <p:cNvSpPr/>
+          <p:nvPr/>
+        </p:nvSpPr>
+        <p:spPr>
+          <a:xfrm>
+            <a:off x="457200" y="4937760"/>
+            <a:ext cx="8229600" cy="164592"/>
           </a:xfrm>
           <a:prstGeom prst="rect">
             <a:avLst/>
@@ -4716,46 +6248,7 @@
               <a:buNone/>
             </a:pPr>
             <a:r>
-              <a:rPr lang="en-US" sz="1000" dirty="0">
-                <a:solidFill>
-                  <a:srgbClr val="94A3B8"/>
-                </a:solidFill>
-                <a:latin typeface="Calibri" pitchFamily="34" charset="0"/>
-                <a:ea typeface="Calibri" pitchFamily="34" charset="-122"/>
-                <a:cs typeface="Calibri" pitchFamily="34" charset="-120"/>
-              </a:rPr>
-              <a:t>Revenue by brand — last 6 months?</a:t>
-            </a:r>
-            <a:endParaRPr lang="en-US" sz="1000" dirty="0"/>
-          </a:p>
-        </p:txBody>
-      </p:sp>
-      <p:sp>
-        <p:nvSpPr>
-          <p:cNvPr id="11" name="Text 9"/>
-          <p:cNvSpPr/>
-          <p:nvPr/>
-        </p:nvSpPr>
-        <p:spPr>
-          <a:xfrm>
-            <a:off x="457200" y="4160520"/>
-            <a:ext cx="8229600" cy="274320"/>
-          </a:xfrm>
-          <a:prstGeom prst="rect">
-            <a:avLst/>
-          </a:prstGeom>
-          <a:noFill/>
-          <a:ln/>
-        </p:spPr>
-        <p:txBody>
-          <a:bodyPr wrap="square" rtlCol="0" anchor="ctr"/>
-          <a:lstStyle/>
-          <a:p>
-            <a:pPr marL="0" indent="0" algn="ctr">
-              <a:buNone/>
-            </a:pPr>
-            <a:r>
-              <a:rPr lang="en-US" sz="1000" i="1" dirty="0">
+              <a:rPr lang="en-US" sz="800" i="1" dirty="0">
                 <a:solidFill>
                   <a:srgbClr val="475569"/>
                 </a:solidFill>
@@ -4763,9 +6256,9 @@
                 <a:ea typeface="Calibri" pitchFamily="34" charset="-122"/>
                 <a:cs typeface="Calibri" pitchFamily="34" charset="-120"/>
               </a:rPr>
-              <a:t>Narrate: plan → approval interrupt → SQL → result table → chart</a:t>
-            </a:r>
-            <a:endParaRPr lang="en-US" sz="1000" dirty="0"/>
+              <a:t>Narrate: orchestrator routing decisions · HITL interrupt pause · SQL + result table → chart</a:t>
+            </a:r>
+            <a:endParaRPr lang="en-US" sz="800" dirty="0"/>
           </a:p>
         </p:txBody>
       </p:sp>
@@ -4804,28 +6297,42 @@
       </p:grpSpPr>
       <p:sp>
         <p:nvSpPr>
-          <p:cNvPr id="2" name="Shape 0"/>
-          <p:cNvSpPr/>
-          <p:nvPr/>
-        </p:nvSpPr>
-        <p:spPr>
-          <a:xfrm>
-            <a:off x="365760" y="731520"/>
-            <a:ext cx="54864" cy="3657600"/>
-          </a:xfrm>
-          <a:prstGeom prst="rect">
-            <a:avLst/>
-          </a:prstGeom>
-          <a:solidFill>
-            <a:srgbClr val="3B82F6"/>
-          </a:solidFill>
-          <a:ln w="12700">
-            <a:solidFill>
-              <a:srgbClr val="3B82F6"/>
-            </a:solidFill>
-            <a:prstDash val="solid"/>
-          </a:ln>
-        </p:spPr>
+          <p:cNvPr id="2" name="Text 0"/>
+          <p:cNvSpPr/>
+          <p:nvPr/>
+        </p:nvSpPr>
+        <p:spPr>
+          <a:xfrm>
+            <a:off x="457200" y="182880"/>
+            <a:ext cx="8229600" cy="237744"/>
+          </a:xfrm>
+          <a:prstGeom prst="rect">
+            <a:avLst/>
+          </a:prstGeom>
+          <a:noFill/>
+          <a:ln/>
+        </p:spPr>
+        <p:txBody>
+          <a:bodyPr wrap="square" rtlCol="0" anchor="ctr"/>
+          <a:lstStyle/>
+          <a:p>
+            <a:pPr marL="0" indent="0">
+              <a:buNone/>
+            </a:pPr>
+            <a:r>
+              <a:rPr lang="en-US" sz="1000" b="1" kern="0" spc="200" dirty="0">
+                <a:solidFill>
+                  <a:srgbClr val="3B82F6"/>
+                </a:solidFill>
+                <a:latin typeface="Calibri" pitchFamily="34" charset="0"/>
+                <a:ea typeface="Calibri" pitchFamily="34" charset="-122"/>
+                <a:cs typeface="Calibri" pitchFamily="34" charset="-120"/>
+              </a:rPr>
+              <a:t>NOT JUST A CHAIN OF API CALLS</a:t>
+            </a:r>
+            <a:endParaRPr lang="en-US" sz="1000" dirty="0"/>
+          </a:p>
+        </p:txBody>
       </p:sp>
       <p:sp>
         <p:nvSpPr>
@@ -4835,8 +6342,8 @@
         </p:nvSpPr>
         <p:spPr>
           <a:xfrm>
-            <a:off x="594360" y="777240"/>
-            <a:ext cx="2743200" cy="228600"/>
+            <a:off x="457200" y="457200"/>
+            <a:ext cx="8229600" cy="457200"/>
           </a:xfrm>
           <a:prstGeom prst="rect">
             <a:avLst/>
@@ -4852,46 +6359,7 @@
               <a:buNone/>
             </a:pPr>
             <a:r>
-              <a:rPr lang="en-US" sz="1000" b="1" kern="0" spc="200" dirty="0">
-                <a:solidFill>
-                  <a:srgbClr val="3B82F6"/>
-                </a:solidFill>
-                <a:latin typeface="Calibri" pitchFamily="34" charset="0"/>
-                <a:ea typeface="Calibri" pitchFamily="34" charset="-122"/>
-                <a:cs typeface="Calibri" pitchFamily="34" charset="-120"/>
-              </a:rPr>
-              <a:t>NOT JUST A CHAIN OF API CALLS</a:t>
-            </a:r>
-            <a:endParaRPr lang="en-US" sz="1000" dirty="0"/>
-          </a:p>
-        </p:txBody>
-      </p:sp>
-      <p:sp>
-        <p:nvSpPr>
-          <p:cNvPr id="4" name="Text 2"/>
-          <p:cNvSpPr/>
-          <p:nvPr/>
-        </p:nvSpPr>
-        <p:spPr>
-          <a:xfrm>
-            <a:off x="594360" y="1051560"/>
-            <a:ext cx="2834640" cy="1097280"/>
-          </a:xfrm>
-          <a:prstGeom prst="rect">
-            <a:avLst/>
-          </a:prstGeom>
-          <a:noFill/>
-          <a:ln/>
-        </p:spPr>
-        <p:txBody>
-          <a:bodyPr wrap="square" rtlCol="0" anchor="ctr"/>
-          <a:lstStyle/>
-          <a:p>
-            <a:pPr marL="0" indent="0">
-              <a:buNone/>
-            </a:pPr>
-            <a:r>
-              <a:rPr lang="en-US" sz="3400" b="1" dirty="0">
+              <a:rPr lang="en-US" sz="3000" b="1" dirty="0">
                 <a:solidFill>
                   <a:srgbClr val="FFFFFF"/>
                 </a:solidFill>
@@ -4899,54 +6367,37 @@
                 <a:ea typeface="Trebuchet MS" pitchFamily="34" charset="-122"/>
                 <a:cs typeface="Trebuchet MS" pitchFamily="34" charset="-120"/>
               </a:rPr>
-              <a:t>What Makes</a:t>
-            </a:r>
-            <a:endParaRPr lang="en-US" sz="3400" dirty="0"/>
-          </a:p>
+              <a:t>What Makes DataPilot Genuinely Agentic</a:t>
+            </a:r>
+            <a:endParaRPr lang="en-US" sz="3000" dirty="0"/>
+          </a:p>
+        </p:txBody>
+      </p:sp>
+      <p:sp>
+        <p:nvSpPr>
+          <p:cNvPr id="4" name="Text 2"/>
+          <p:cNvSpPr/>
+          <p:nvPr/>
+        </p:nvSpPr>
+        <p:spPr>
+          <a:xfrm>
+            <a:off x="457200" y="960120"/>
+            <a:ext cx="8229600" cy="237744"/>
+          </a:xfrm>
+          <a:prstGeom prst="rect">
+            <a:avLst/>
+          </a:prstGeom>
+          <a:noFill/>
+          <a:ln/>
+        </p:spPr>
+        <p:txBody>
+          <a:bodyPr wrap="square" rtlCol="0" anchor="ctr"/>
+          <a:lstStyle/>
           <a:p>
             <a:pPr marL="0" indent="0">
               <a:buNone/>
             </a:pPr>
             <a:r>
-              <a:rPr lang="en-US" sz="3400" b="1" dirty="0">
-                <a:solidFill>
-                  <a:srgbClr val="FFFFFF"/>
-                </a:solidFill>
-                <a:latin typeface="Trebuchet MS" pitchFamily="34" charset="0"/>
-                <a:ea typeface="Trebuchet MS" pitchFamily="34" charset="-122"/>
-                <a:cs typeface="Trebuchet MS" pitchFamily="34" charset="-120"/>
-              </a:rPr>
-              <a:t>DataPilot Agentic?</a:t>
-            </a:r>
-            <a:endParaRPr lang="en-US" sz="3400" dirty="0"/>
-          </a:p>
-        </p:txBody>
-      </p:sp>
-      <p:sp>
-        <p:nvSpPr>
-          <p:cNvPr id="5" name="Text 3"/>
-          <p:cNvSpPr/>
-          <p:nvPr/>
-        </p:nvSpPr>
-        <p:spPr>
-          <a:xfrm>
-            <a:off x="594360" y="2331720"/>
-            <a:ext cx="2743200" cy="457200"/>
-          </a:xfrm>
-          <a:prstGeom prst="rect">
-            <a:avLst/>
-          </a:prstGeom>
-          <a:noFill/>
-          <a:ln/>
-        </p:spPr>
-        <p:txBody>
-          <a:bodyPr wrap="square" rtlCol="0" anchor="ctr"/>
-          <a:lstStyle/>
-          <a:p>
-            <a:pPr marL="0" indent="0">
-              <a:buNone/>
-            </a:pPr>
-            <a:r>
               <a:rPr lang="en-US" sz="1200" dirty="0">
                 <a:solidFill>
                   <a:srgbClr val="64748B"/>
@@ -4955,7 +6406,7 @@
                 <a:ea typeface="Calibri" pitchFamily="34" charset="-122"/>
                 <a:cs typeface="Calibri" pitchFamily="34" charset="-120"/>
               </a:rPr>
-              <a:t>Four properties that define genuine agentic behavior</a:t>
+              <a:t>Real decisions made at runtime — not scripted logic, not a fixed pipeline</a:t>
             </a:r>
             <a:endParaRPr lang="en-US" sz="1200" dirty="0"/>
           </a:p>
@@ -4963,53 +6414,14 @@
       </p:sp>
       <p:sp>
         <p:nvSpPr>
-          <p:cNvPr id="6" name="Text 4"/>
-          <p:cNvSpPr/>
-          <p:nvPr/>
-        </p:nvSpPr>
-        <p:spPr>
-          <a:xfrm>
-            <a:off x="365760" y="3200400"/>
-            <a:ext cx="2926080" cy="1645920"/>
-          </a:xfrm>
-          <a:prstGeom prst="rect">
-            <a:avLst/>
-          </a:prstGeom>
-          <a:noFill/>
-          <a:ln/>
-        </p:spPr>
-        <p:txBody>
-          <a:bodyPr wrap="square" rtlCol="0" anchor="ctr"/>
-          <a:lstStyle/>
-          <a:p>
-            <a:pPr marL="0" indent="0" algn="l">
-              <a:buNone/>
-            </a:pPr>
-            <a:r>
-              <a:rPr lang="en-US" sz="12000" b="1" dirty="0">
-                <a:solidFill>
-                  <a:srgbClr val="1E2D4F"/>
-                </a:solidFill>
-                <a:latin typeface="Trebuchet MS" pitchFamily="34" charset="0"/>
-                <a:ea typeface="Trebuchet MS" pitchFamily="34" charset="-122"/>
-                <a:cs typeface="Trebuchet MS" pitchFamily="34" charset="-120"/>
-              </a:rPr>
-              <a:t>AI</a:t>
-            </a:r>
-            <a:endParaRPr lang="en-US" sz="12000" dirty="0"/>
-          </a:p>
-        </p:txBody>
-      </p:sp>
-      <p:sp>
-        <p:nvSpPr>
-          <p:cNvPr id="7" name="Shape 5"/>
-          <p:cNvSpPr/>
-          <p:nvPr/>
-        </p:nvSpPr>
-        <p:spPr>
-          <a:xfrm>
-            <a:off x="3657600" y="594360"/>
-            <a:ext cx="2286000" cy="1691640"/>
+          <p:cNvPr id="5" name="Shape 3"/>
+          <p:cNvSpPr/>
+          <p:nvPr/>
+        </p:nvSpPr>
+        <p:spPr>
+          <a:xfrm>
+            <a:off x="365760" y="1261872"/>
+            <a:ext cx="2578608" cy="1591056"/>
           </a:xfrm>
           <a:prstGeom prst="rect">
             <a:avLst/>
@@ -5019,7 +6431,7 @@
           </a:solidFill>
           <a:ln w="12700">
             <a:solidFill>
-              <a:srgbClr val="3B82F6"/>
+              <a:srgbClr val="06B6D4"/>
             </a:solidFill>
             <a:prstDash val="solid"/>
           </a:ln>
@@ -5034,24 +6446,24 @@
       </p:sp>
       <p:sp>
         <p:nvSpPr>
-          <p:cNvPr id="8" name="Shape 6"/>
-          <p:cNvSpPr/>
-          <p:nvPr/>
-        </p:nvSpPr>
-        <p:spPr>
-          <a:xfrm>
-            <a:off x="3657600" y="594360"/>
-            <a:ext cx="54864" cy="1691640"/>
-          </a:xfrm>
-          <a:prstGeom prst="rect">
-            <a:avLst/>
-          </a:prstGeom>
-          <a:solidFill>
-            <a:srgbClr val="3B82F6"/>
+          <p:cNvPr id="6" name="Shape 4"/>
+          <p:cNvSpPr/>
+          <p:nvPr/>
+        </p:nvSpPr>
+        <p:spPr>
+          <a:xfrm>
+            <a:off x="365760" y="1261872"/>
+            <a:ext cx="45720" cy="1591056"/>
+          </a:xfrm>
+          <a:prstGeom prst="rect">
+            <a:avLst/>
+          </a:prstGeom>
+          <a:solidFill>
+            <a:srgbClr val="06B6D4"/>
           </a:solidFill>
           <a:ln w="12700">
             <a:solidFill>
-              <a:srgbClr val="3B82F6"/>
+              <a:srgbClr val="06B6D4"/>
             </a:solidFill>
             <a:prstDash val="solid"/>
           </a:ln>
@@ -5059,14 +6471,14 @@
       </p:sp>
       <p:sp>
         <p:nvSpPr>
-          <p:cNvPr id="9" name="Text 7"/>
-          <p:cNvSpPr/>
-          <p:nvPr/>
-        </p:nvSpPr>
-        <p:spPr>
-          <a:xfrm>
-            <a:off x="3794760" y="685800"/>
-            <a:ext cx="2011680" cy="320040"/>
+          <p:cNvPr id="7" name="Text 5"/>
+          <p:cNvSpPr/>
+          <p:nvPr/>
+        </p:nvSpPr>
+        <p:spPr>
+          <a:xfrm>
+            <a:off x="475488" y="1353312"/>
+            <a:ext cx="2432304" cy="310896"/>
           </a:xfrm>
           <a:prstGeom prst="rect">
             <a:avLst/>
@@ -5082,7 +6494,7 @@
               <a:buNone/>
             </a:pPr>
             <a:r>
-              <a:rPr lang="en-US" sz="1300" b="1" dirty="0">
+              <a:rPr lang="en-US" sz="1200" b="1" dirty="0">
                 <a:solidFill>
                   <a:srgbClr val="FFFFFF"/>
                 </a:solidFill>
@@ -5090,22 +6502,22 @@
                 <a:ea typeface="Calibri" pitchFamily="34" charset="-122"/>
                 <a:cs typeface="Calibri" pitchFamily="34" charset="-120"/>
               </a:rPr>
-              <a:t>Autonomous Planning</a:t>
-            </a:r>
-            <a:endParaRPr lang="en-US" sz="1300" dirty="0"/>
-          </a:p>
-        </p:txBody>
-      </p:sp>
-      <p:sp>
-        <p:nvSpPr>
-          <p:cNvPr id="10" name="Text 8"/>
-          <p:cNvSpPr/>
-          <p:nvPr/>
-        </p:nvSpPr>
-        <p:spPr>
-          <a:xfrm>
-            <a:off x="3794760" y="1051560"/>
-            <a:ext cx="2011680" cy="1097280"/>
+              <a:t>LLM Orchestrator routing</a:t>
+            </a:r>
+            <a:endParaRPr lang="en-US" sz="1200" dirty="0"/>
+          </a:p>
+        </p:txBody>
+      </p:sp>
+      <p:sp>
+        <p:nvSpPr>
+          <p:cNvPr id="8" name="Text 6"/>
+          <p:cNvSpPr/>
+          <p:nvPr/>
+        </p:nvSpPr>
+        <p:spPr>
+          <a:xfrm>
+            <a:off x="475488" y="1719072"/>
+            <a:ext cx="2432304" cy="1042416"/>
           </a:xfrm>
           <a:prstGeom prst="rect">
             <a:avLst/>
@@ -5121,7 +6533,7 @@
               <a:buNone/>
             </a:pPr>
             <a:r>
-              <a:rPr lang="en-US" sz="1100" dirty="0">
+              <a:rPr lang="en-US" sz="1000" dirty="0">
                 <a:solidFill>
                   <a:srgbClr val="94A3B8"/>
                 </a:solidFill>
@@ -5129,22 +6541,22 @@
                 <a:ea typeface="Calibri" pitchFamily="34" charset="-122"/>
                 <a:cs typeface="Calibri" pitchFamily="34" charset="-120"/>
               </a:rPr>
-              <a:t>Planner classifies scope — in-scope, vague, or out-of-range — without any human input</a:t>
-            </a:r>
-            <a:endParaRPr lang="en-US" sz="1100" dirty="0"/>
-          </a:p>
-        </p:txBody>
-      </p:sp>
-      <p:sp>
-        <p:nvSpPr>
-          <p:cNvPr id="11" name="Shape 9"/>
-          <p:cNvSpPr/>
-          <p:nvPr/>
-        </p:nvSpPr>
-        <p:spPr>
-          <a:xfrm>
-            <a:off x="6217920" y="594360"/>
-            <a:ext cx="2286000" cy="1691640"/>
+              <a:t>After every agent completes, Gemini reads the full pipeline state and picks the next node. No Python if/else — the LLM reasons about gaps in the state and decides what to do next.</a:t>
+            </a:r>
+            <a:endParaRPr lang="en-US" sz="1000" dirty="0"/>
+          </a:p>
+        </p:txBody>
+      </p:sp>
+      <p:sp>
+        <p:nvSpPr>
+          <p:cNvPr id="9" name="Shape 7"/>
+          <p:cNvSpPr/>
+          <p:nvPr/>
+        </p:nvSpPr>
+        <p:spPr>
+          <a:xfrm>
+            <a:off x="3191256" y="1261872"/>
+            <a:ext cx="2578608" cy="1591056"/>
           </a:xfrm>
           <a:prstGeom prst="rect">
             <a:avLst/>
@@ -5169,14 +6581,14 @@
       </p:sp>
       <p:sp>
         <p:nvSpPr>
-          <p:cNvPr id="12" name="Shape 10"/>
-          <p:cNvSpPr/>
-          <p:nvPr/>
-        </p:nvSpPr>
-        <p:spPr>
-          <a:xfrm>
-            <a:off x="6217920" y="594360"/>
-            <a:ext cx="54864" cy="1691640"/>
+          <p:cNvPr id="10" name="Shape 8"/>
+          <p:cNvSpPr/>
+          <p:nvPr/>
+        </p:nvSpPr>
+        <p:spPr>
+          <a:xfrm>
+            <a:off x="3191256" y="1261872"/>
+            <a:ext cx="45720" cy="1591056"/>
           </a:xfrm>
           <a:prstGeom prst="rect">
             <a:avLst/>
@@ -5194,14 +6606,14 @@
       </p:sp>
       <p:sp>
         <p:nvSpPr>
-          <p:cNvPr id="13" name="Text 11"/>
-          <p:cNvSpPr/>
-          <p:nvPr/>
-        </p:nvSpPr>
-        <p:spPr>
-          <a:xfrm>
-            <a:off x="6355080" y="685800"/>
-            <a:ext cx="2011680" cy="320040"/>
+          <p:cNvPr id="11" name="Text 9"/>
+          <p:cNvSpPr/>
+          <p:nvPr/>
+        </p:nvSpPr>
+        <p:spPr>
+          <a:xfrm>
+            <a:off x="3300984" y="1353312"/>
+            <a:ext cx="2432304" cy="310896"/>
           </a:xfrm>
           <a:prstGeom prst="rect">
             <a:avLst/>
@@ -5217,7 +6629,7 @@
               <a:buNone/>
             </a:pPr>
             <a:r>
-              <a:rPr lang="en-US" sz="1300" b="1" dirty="0">
+              <a:rPr lang="en-US" sz="1200" b="1" dirty="0">
                 <a:solidFill>
                   <a:srgbClr val="FFFFFF"/>
                 </a:solidFill>
@@ -5225,22 +6637,22 @@
                 <a:ea typeface="Calibri" pitchFamily="34" charset="-122"/>
                 <a:cs typeface="Calibri" pitchFamily="34" charset="-120"/>
               </a:rPr>
-              <a:t>Multi-Step Reasoning</a:t>
-            </a:r>
-            <a:endParaRPr lang="en-US" sz="1300" dirty="0"/>
-          </a:p>
-        </p:txBody>
-      </p:sp>
-      <p:sp>
-        <p:nvSpPr>
-          <p:cNvPr id="14" name="Text 12"/>
-          <p:cNvSpPr/>
-          <p:nvPr/>
-        </p:nvSpPr>
-        <p:spPr>
-          <a:xfrm>
-            <a:off x="6355080" y="1051560"/>
-            <a:ext cx="2011680" cy="1097280"/>
+              <a:t>Query KB cache hit → pipeline skip</a:t>
+            </a:r>
+            <a:endParaRPr lang="en-US" sz="1200" dirty="0"/>
+          </a:p>
+        </p:txBody>
+      </p:sp>
+      <p:sp>
+        <p:nvSpPr>
+          <p:cNvPr id="12" name="Text 10"/>
+          <p:cNvSpPr/>
+          <p:nvPr/>
+        </p:nvSpPr>
+        <p:spPr>
+          <a:xfrm>
+            <a:off x="3300984" y="1719072"/>
+            <a:ext cx="2432304" cy="1042416"/>
           </a:xfrm>
           <a:prstGeom prst="rect">
             <a:avLst/>
@@ -5256,7 +6668,7 @@
               <a:buNone/>
             </a:pPr>
             <a:r>
-              <a:rPr lang="en-US" sz="1100" dirty="0">
+              <a:rPr lang="en-US" sz="1000" dirty="0">
                 <a:solidFill>
                   <a:srgbClr val="94A3B8"/>
                 </a:solidFill>
@@ -5264,22 +6676,22 @@
                 <a:ea typeface="Calibri" pitchFamily="34" charset="-122"/>
                 <a:cs typeface="Calibri" pitchFamily="34" charset="-120"/>
               </a:rPr>
-              <a:t>6-node LangGraph graph; each node decides independently; branches on KB hit, scope fail, or interrupt</a:t>
-            </a:r>
-            <a:endParaRPr lang="en-US" sz="1100" dirty="0"/>
-          </a:p>
-        </p:txBody>
-      </p:sp>
-      <p:sp>
-        <p:nvSpPr>
-          <p:cNvPr id="15" name="Shape 13"/>
-          <p:cNvSpPr/>
-          <p:nvPr/>
-        </p:nvSpPr>
-        <p:spPr>
-          <a:xfrm>
-            <a:off x="3657600" y="2514600"/>
-            <a:ext cx="2286000" cy="1691640"/>
+              <a:t>Orchestrator checks pgvector KB first. On a semantic + schema match, it surfaces the cached SQL and skips planner, discovery, and optimizer entirely. The system remembers.</a:t>
+            </a:r>
+            <a:endParaRPr lang="en-US" sz="1000" dirty="0"/>
+          </a:p>
+        </p:txBody>
+      </p:sp>
+      <p:sp>
+        <p:nvSpPr>
+          <p:cNvPr id="13" name="Shape 11"/>
+          <p:cNvSpPr/>
+          <p:nvPr/>
+        </p:nvSpPr>
+        <p:spPr>
+          <a:xfrm>
+            <a:off x="6016752" y="1261872"/>
+            <a:ext cx="2578608" cy="1591056"/>
           </a:xfrm>
           <a:prstGeom prst="rect">
             <a:avLst/>
@@ -5304,14 +6716,14 @@
       </p:sp>
       <p:sp>
         <p:nvSpPr>
-          <p:cNvPr id="16" name="Shape 14"/>
-          <p:cNvSpPr/>
-          <p:nvPr/>
-        </p:nvSpPr>
-        <p:spPr>
-          <a:xfrm>
-            <a:off x="3657600" y="2514600"/>
-            <a:ext cx="54864" cy="1691640"/>
+          <p:cNvPr id="14" name="Shape 12"/>
+          <p:cNvSpPr/>
+          <p:nvPr/>
+        </p:nvSpPr>
+        <p:spPr>
+          <a:xfrm>
+            <a:off x="6016752" y="1261872"/>
+            <a:ext cx="45720" cy="1591056"/>
           </a:xfrm>
           <a:prstGeom prst="rect">
             <a:avLst/>
@@ -5329,14 +6741,14 @@
       </p:sp>
       <p:sp>
         <p:nvSpPr>
-          <p:cNvPr id="17" name="Text 15"/>
-          <p:cNvSpPr/>
-          <p:nvPr/>
-        </p:nvSpPr>
-        <p:spPr>
-          <a:xfrm>
-            <a:off x="3794760" y="2606040"/>
-            <a:ext cx="2011680" cy="320040"/>
+          <p:cNvPr id="15" name="Text 13"/>
+          <p:cNvSpPr/>
+          <p:nvPr/>
+        </p:nvSpPr>
+        <p:spPr>
+          <a:xfrm>
+            <a:off x="6126480" y="1353312"/>
+            <a:ext cx="2432304" cy="310896"/>
           </a:xfrm>
           <a:prstGeom prst="rect">
             <a:avLst/>
@@ -5352,7 +6764,7 @@
               <a:buNone/>
             </a:pPr>
             <a:r>
-              <a:rPr lang="en-US" sz="1300" b="1" dirty="0">
+              <a:rPr lang="en-US" sz="1200" b="1" dirty="0">
                 <a:solidFill>
                   <a:srgbClr val="FFFFFF"/>
                 </a:solidFill>
@@ -5360,22 +6772,22 @@
                 <a:ea typeface="Calibri" pitchFamily="34" charset="-122"/>
                 <a:cs typeface="Calibri" pitchFamily="34" charset="-120"/>
               </a:rPr>
-              <a:t>Human-in-the-Loop</a:t>
-            </a:r>
-            <a:endParaRPr lang="en-US" sz="1300" dirty="0"/>
-          </a:p>
-        </p:txBody>
-      </p:sp>
-      <p:sp>
-        <p:nvSpPr>
-          <p:cNvPr id="18" name="Text 16"/>
-          <p:cNvSpPr/>
-          <p:nvPr/>
-        </p:nvSpPr>
-        <p:spPr>
-          <a:xfrm>
-            <a:off x="3794760" y="2971800"/>
-            <a:ext cx="2011680" cy="1097280"/>
+              <a:t>Human-in-the-loop with real consequences</a:t>
+            </a:r>
+            <a:endParaRPr lang="en-US" sz="1200" dirty="0"/>
+          </a:p>
+        </p:txBody>
+      </p:sp>
+      <p:sp>
+        <p:nvSpPr>
+          <p:cNvPr id="16" name="Text 14"/>
+          <p:cNvSpPr/>
+          <p:nvPr/>
+        </p:nvSpPr>
+        <p:spPr>
+          <a:xfrm>
+            <a:off x="6126480" y="1719072"/>
+            <a:ext cx="2432304" cy="1042416"/>
           </a:xfrm>
           <a:prstGeom prst="rect">
             <a:avLst/>
@@ -5391,7 +6803,7 @@
               <a:buNone/>
             </a:pPr>
             <a:r>
-              <a:rPr lang="en-US" sz="1100" dirty="0">
+              <a:rPr lang="en-US" sz="1000" dirty="0">
                 <a:solidFill>
                   <a:srgbClr val="94A3B8"/>
                 </a:solidFill>
@@ -5399,22 +6811,22 @@
                 <a:ea typeface="Calibri" pitchFamily="34" charset="-122"/>
                 <a:cs typeface="Calibri" pitchFamily="34" charset="-120"/>
               </a:rPr>
-              <a:t>Pauses for table + execution approval — a deliberate choice, not a limitation. Real control.</a:t>
-            </a:r>
-            <a:endParaRPr lang="en-US" sz="1100" dirty="0"/>
-          </a:p>
-        </p:txBody>
-      </p:sp>
-      <p:sp>
-        <p:nvSpPr>
-          <p:cNvPr id="19" name="Shape 17"/>
-          <p:cNvSpPr/>
-          <p:nvPr/>
-        </p:nvSpPr>
-        <p:spPr>
-          <a:xfrm>
-            <a:off x="6217920" y="2514600"/>
-            <a:ext cx="2286000" cy="1691640"/>
+              <a:t>Optimizer Gate interrupts for SQL + cost review. Decline once → Orchestrator routes back to Optimizer to regenerate a better query. Decline twice → pipeline stops gracefully.</a:t>
+            </a:r>
+            <a:endParaRPr lang="en-US" sz="1000" dirty="0"/>
+          </a:p>
+        </p:txBody>
+      </p:sp>
+      <p:sp>
+        <p:nvSpPr>
+          <p:cNvPr id="17" name="Shape 15"/>
+          <p:cNvSpPr/>
+          <p:nvPr/>
+        </p:nvSpPr>
+        <p:spPr>
+          <a:xfrm>
+            <a:off x="1773936" y="2962656"/>
+            <a:ext cx="2578608" cy="1591056"/>
           </a:xfrm>
           <a:prstGeom prst="rect">
             <a:avLst/>
@@ -5439,14 +6851,14 @@
       </p:sp>
       <p:sp>
         <p:nvSpPr>
-          <p:cNvPr id="20" name="Shape 18"/>
-          <p:cNvSpPr/>
-          <p:nvPr/>
-        </p:nvSpPr>
-        <p:spPr>
-          <a:xfrm>
-            <a:off x="6217920" y="2514600"/>
-            <a:ext cx="54864" cy="1691640"/>
+          <p:cNvPr id="18" name="Shape 16"/>
+          <p:cNvSpPr/>
+          <p:nvPr/>
+        </p:nvSpPr>
+        <p:spPr>
+          <a:xfrm>
+            <a:off x="1773936" y="2962656"/>
+            <a:ext cx="45720" cy="1591056"/>
           </a:xfrm>
           <a:prstGeom prst="rect">
             <a:avLst/>
@@ -5464,14 +6876,14 @@
       </p:sp>
       <p:sp>
         <p:nvSpPr>
-          <p:cNvPr id="21" name="Text 19"/>
-          <p:cNvSpPr/>
-          <p:nvPr/>
-        </p:nvSpPr>
-        <p:spPr>
-          <a:xfrm>
-            <a:off x="6355080" y="2606040"/>
-            <a:ext cx="2011680" cy="320040"/>
+          <p:cNvPr id="19" name="Text 17"/>
+          <p:cNvSpPr/>
+          <p:nvPr/>
+        </p:nvSpPr>
+        <p:spPr>
+          <a:xfrm>
+            <a:off x="1883664" y="3054096"/>
+            <a:ext cx="2432304" cy="310896"/>
           </a:xfrm>
           <a:prstGeom prst="rect">
             <a:avLst/>
@@ -5487,7 +6899,7 @@
               <a:buNone/>
             </a:pPr>
             <a:r>
-              <a:rPr lang="en-US" sz="1300" b="1" dirty="0">
+              <a:rPr lang="en-US" sz="1200" b="1" dirty="0">
                 <a:solidFill>
                   <a:srgbClr val="FFFFFF"/>
                 </a:solidFill>
@@ -5495,22 +6907,22 @@
                 <a:ea typeface="Calibri" pitchFamily="34" charset="-122"/>
                 <a:cs typeface="Calibri" pitchFamily="34" charset="-120"/>
               </a:rPr>
-              <a:t>Memory &amp; Learning</a:t>
-            </a:r>
-            <a:endParaRPr lang="en-US" sz="1300" dirty="0"/>
-          </a:p>
-        </p:txBody>
-      </p:sp>
-      <p:sp>
-        <p:nvSpPr>
-          <p:cNvPr id="22" name="Text 20"/>
-          <p:cNvSpPr/>
-          <p:nvPr/>
-        </p:nvSpPr>
-        <p:spPr>
-          <a:xfrm>
-            <a:off x="6355080" y="2971800"/>
-            <a:ext cx="2011680" cy="1097280"/>
+              <a:t>Relevance check reroute</a:t>
+            </a:r>
+            <a:endParaRPr lang="en-US" sz="1200" dirty="0"/>
+          </a:p>
+        </p:txBody>
+      </p:sp>
+      <p:sp>
+        <p:nvSpPr>
+          <p:cNvPr id="20" name="Text 18"/>
+          <p:cNvSpPr/>
+          <p:nvPr/>
+        </p:nvSpPr>
+        <p:spPr>
+          <a:xfrm>
+            <a:off x="1883664" y="3419856"/>
+            <a:ext cx="2432304" cy="1042416"/>
           </a:xfrm>
           <a:prstGeom prst="rect">
             <a:avLst/>
@@ -5526,7 +6938,7 @@
               <a:buNone/>
             </a:pPr>
             <a:r>
-              <a:rPr lang="en-US" sz="1100" dirty="0">
+              <a:rPr lang="en-US" sz="1000" dirty="0">
                 <a:solidFill>
                   <a:srgbClr val="94A3B8"/>
                 </a:solidFill>
@@ -5534,22 +6946,22 @@
                 <a:ea typeface="Calibri" pitchFamily="34" charset="-122"/>
                 <a:cs typeface="Calibri" pitchFamily="34" charset="-120"/>
               </a:rPr>
-              <a:t>pgvector Query KB stores past queries; embeddings match and surface similar patterns on next run</a:t>
-            </a:r>
-            <a:endParaRPr lang="en-US" sz="1100" dirty="0"/>
-          </a:p>
-        </p:txBody>
-      </p:sp>
-      <p:sp>
-        <p:nvSpPr>
-          <p:cNvPr id="23" name="Shape 21"/>
-          <p:cNvSpPr/>
-          <p:nvPr/>
-        </p:nvSpPr>
-        <p:spPr>
-          <a:xfrm>
-            <a:off x="3657600" y="4315968"/>
-            <a:ext cx="5120640" cy="594360"/>
+              <a:t>Validator asks Gemini: do these returned rows actually answer the question? If NO, Orchestrator routes back to Optimizer to rewrite the SQL — without any user intervention.</a:t>
+            </a:r>
+            <a:endParaRPr lang="en-US" sz="1000" dirty="0"/>
+          </a:p>
+        </p:txBody>
+      </p:sp>
+      <p:sp>
+        <p:nvSpPr>
+          <p:cNvPr id="21" name="Shape 19"/>
+          <p:cNvSpPr/>
+          <p:nvPr/>
+        </p:nvSpPr>
+        <p:spPr>
+          <a:xfrm>
+            <a:off x="4608576" y="2962656"/>
+            <a:ext cx="2578608" cy="1591056"/>
           </a:xfrm>
           <a:prstGeom prst="rect">
             <a:avLst/>
@@ -5559,7 +6971,7 @@
           </a:solidFill>
           <a:ln w="12700">
             <a:solidFill>
-              <a:srgbClr val="06B6D4"/>
+              <a:srgbClr val="EF4444"/>
             </a:solidFill>
             <a:prstDash val="solid"/>
           </a:ln>
@@ -5574,24 +6986,24 @@
       </p:sp>
       <p:sp>
         <p:nvSpPr>
-          <p:cNvPr id="24" name="Shape 22"/>
-          <p:cNvSpPr/>
-          <p:nvPr/>
-        </p:nvSpPr>
-        <p:spPr>
-          <a:xfrm>
-            <a:off x="3657600" y="4315968"/>
-            <a:ext cx="54864" cy="594360"/>
-          </a:xfrm>
-          <a:prstGeom prst="rect">
-            <a:avLst/>
-          </a:prstGeom>
-          <a:solidFill>
-            <a:srgbClr val="06B6D4"/>
+          <p:cNvPr id="22" name="Shape 20"/>
+          <p:cNvSpPr/>
+          <p:nvPr/>
+        </p:nvSpPr>
+        <p:spPr>
+          <a:xfrm>
+            <a:off x="4608576" y="2962656"/>
+            <a:ext cx="45720" cy="1591056"/>
+          </a:xfrm>
+          <a:prstGeom prst="rect">
+            <a:avLst/>
+          </a:prstGeom>
+          <a:solidFill>
+            <a:srgbClr val="EF4444"/>
           </a:solidFill>
           <a:ln w="12700">
             <a:solidFill>
-              <a:srgbClr val="06B6D4"/>
+              <a:srgbClr val="EF4444"/>
             </a:solidFill>
             <a:prstDash val="solid"/>
           </a:ln>
@@ -5599,14 +7011,14 @@
       </p:sp>
       <p:sp>
         <p:nvSpPr>
-          <p:cNvPr id="25" name="Text 23"/>
-          <p:cNvSpPr/>
-          <p:nvPr/>
-        </p:nvSpPr>
-        <p:spPr>
-          <a:xfrm>
-            <a:off x="3794760" y="4343400"/>
-            <a:ext cx="4846320" cy="256032"/>
+          <p:cNvPr id="23" name="Text 21"/>
+          <p:cNvSpPr/>
+          <p:nvPr/>
+        </p:nvSpPr>
+        <p:spPr>
+          <a:xfrm>
+            <a:off x="4718304" y="3054096"/>
+            <a:ext cx="2432304" cy="310896"/>
           </a:xfrm>
           <a:prstGeom prst="rect">
             <a:avLst/>
@@ -5622,7 +7034,7 @@
               <a:buNone/>
             </a:pPr>
             <a:r>
-              <a:rPr lang="en-US" sz="1300" b="1" dirty="0">
+              <a:rPr lang="en-US" sz="1200" b="1" dirty="0">
                 <a:solidFill>
                   <a:srgbClr val="FFFFFF"/>
                 </a:solidFill>
@@ -5630,22 +7042,22 @@
                 <a:ea typeface="Calibri" pitchFamily="34" charset="-122"/>
                 <a:cs typeface="Calibri" pitchFamily="34" charset="-120"/>
               </a:rPr>
-              <a:t>Orchestrator  —  LLM-Powered Dynamic Router</a:t>
-            </a:r>
-            <a:endParaRPr lang="en-US" sz="1300" dirty="0"/>
-          </a:p>
-        </p:txBody>
-      </p:sp>
-      <p:sp>
-        <p:nvSpPr>
-          <p:cNvPr id="26" name="Text 24"/>
-          <p:cNvSpPr/>
-          <p:nvPr/>
-        </p:nvSpPr>
-        <p:spPr>
-          <a:xfrm>
-            <a:off x="3794760" y="4608576"/>
-            <a:ext cx="4846320" cy="256032"/>
+              <a:t>Executor error recovery</a:t>
+            </a:r>
+            <a:endParaRPr lang="en-US" sz="1200" dirty="0"/>
+          </a:p>
+        </p:txBody>
+      </p:sp>
+      <p:sp>
+        <p:nvSpPr>
+          <p:cNvPr id="24" name="Text 22"/>
+          <p:cNvSpPr/>
+          <p:nvPr/>
+        </p:nvSpPr>
+        <p:spPr>
+          <a:xfrm>
+            <a:off x="4718304" y="3419856"/>
+            <a:ext cx="2432304" cy="1042416"/>
           </a:xfrm>
           <a:prstGeom prst="rect">
             <a:avLst/>
@@ -5669,105 +7081,7 @@
                 <a:ea typeface="Calibri" pitchFamily="34" charset="-122"/>
                 <a:cs typeface="Calibri" pitchFamily="34" charset="-120"/>
               </a:rPr>
-              <a:t>Gemini decides which node runs next — no hardcoded Python routing. Routes on KB hit, scope fail, cost block, retry, or END.</a:t>
-            </a:r>
-            <a:endParaRPr lang="en-US" sz="1000" dirty="0"/>
-          </a:p>
-        </p:txBody>
-      </p:sp>
-      <p:sp>
-        <p:nvSpPr>
-          <p:cNvPr id="27" name="Shape 25"/>
-          <p:cNvSpPr/>
-          <p:nvPr/>
-        </p:nvSpPr>
-        <p:spPr>
-          <a:xfrm>
-            <a:off x="0" y="4315968"/>
-            <a:ext cx="3520440" cy="594360"/>
-          </a:xfrm>
-          <a:prstGeom prst="rect">
-            <a:avLst/>
-          </a:prstGeom>
-          <a:solidFill>
-            <a:srgbClr val="0F1629"/>
-          </a:solidFill>
-          <a:ln w="12700">
-            <a:solidFill>
-              <a:srgbClr val="0F1629"/>
-            </a:solidFill>
-            <a:prstDash val="solid"/>
-          </a:ln>
-        </p:spPr>
-      </p:sp>
-      <p:sp>
-        <p:nvSpPr>
-          <p:cNvPr id="28" name="Text 26"/>
-          <p:cNvSpPr/>
-          <p:nvPr/>
-        </p:nvSpPr>
-        <p:spPr>
-          <a:xfrm>
-            <a:off x="45720" y="4315968"/>
-            <a:ext cx="3474720" cy="594360"/>
-          </a:xfrm>
-          <a:prstGeom prst="rect">
-            <a:avLst/>
-          </a:prstGeom>
-          <a:noFill/>
-          <a:ln/>
-        </p:spPr>
-        <p:txBody>
-          <a:bodyPr wrap="square" rtlCol="0" anchor="ctr"/>
-          <a:lstStyle/>
-          <a:p>
-            <a:pPr marL="0" indent="0" algn="ctr">
-              <a:buNone/>
-            </a:pPr>
-            <a:r>
-              <a:rPr lang="en-US" sz="1000" i="1" dirty="0">
-                <a:solidFill>
-                  <a:srgbClr val="3B82F6"/>
-                </a:solidFill>
-                <a:latin typeface="Calibri" pitchFamily="34" charset="0"/>
-                <a:ea typeface="Calibri" pitchFamily="34" charset="-122"/>
-                <a:cs typeface="Calibri" pitchFamily="34" charset="-120"/>
-              </a:rPr>
-              <a:t>"Each node decides.</a:t>
-            </a:r>
-            <a:endParaRPr lang="en-US" sz="1000" dirty="0"/>
-          </a:p>
-          <a:p>
-            <a:pPr marL="0" indent="0" algn="ctr">
-              <a:buNone/>
-            </a:pPr>
-            <a:r>
-              <a:rPr lang="en-US" sz="1000" i="1" dirty="0">
-                <a:solidFill>
-                  <a:srgbClr val="3B82F6"/>
-                </a:solidFill>
-                <a:latin typeface="Calibri" pitchFamily="34" charset="0"/>
-                <a:ea typeface="Calibri" pitchFamily="34" charset="-122"/>
-                <a:cs typeface="Calibri" pitchFamily="34" charset="-120"/>
-              </a:rPr>
-              <a:t>The graph remembers.</a:t>
-            </a:r>
-            <a:endParaRPr lang="en-US" sz="1000" dirty="0"/>
-          </a:p>
-          <a:p>
-            <a:pPr marL="0" indent="0" algn="ctr">
-              <a:buNone/>
-            </a:pPr>
-            <a:r>
-              <a:rPr lang="en-US" sz="1000" i="1" dirty="0">
-                <a:solidFill>
-                  <a:srgbClr val="3B82F6"/>
-                </a:solidFill>
-                <a:latin typeface="Calibri" pitchFamily="34" charset="0"/>
-                <a:ea typeface="Calibri" pitchFamily="34" charset="-122"/>
-                <a:cs typeface="Calibri" pitchFamily="34" charset="-120"/>
-              </a:rPr>
-              <a:t>You stay in control."</a:t>
+              <a:t>If the database rejects the SQL, the raw error is forwarded through Orchestrator to Optimizer. Optimizer rewrites and auto-approves, bypassing HITL re-prompt on the corrected attempt.</a:t>
             </a:r>
             <a:endParaRPr lang="en-US" sz="1000" dirty="0"/>
           </a:p>
@@ -5815,7 +7129,7 @@
         <p:spPr>
           <a:xfrm>
             <a:off x="365760" y="182880"/>
-            <a:ext cx="8229600" cy="411480"/>
+            <a:ext cx="8412480" cy="402336"/>
           </a:xfrm>
           <a:prstGeom prst="rect">
             <a:avLst/>
@@ -5853,8 +7167,8 @@
         </p:nvSpPr>
         <p:spPr>
           <a:xfrm>
-            <a:off x="365760" y="640080"/>
-            <a:ext cx="8229600" cy="256032"/>
+            <a:off x="365760" y="621792"/>
+            <a:ext cx="8412480" cy="246888"/>
           </a:xfrm>
           <a:prstGeom prst="rect">
             <a:avLst/>
@@ -5878,7 +7192,7 @@
                 <a:ea typeface="Calibri" pitchFamily="34" charset="-122"/>
                 <a:cs typeface="Calibri" pitchFamily="34" charset="-120"/>
               </a:rPr>
-              <a:t>Production-grade features across guardrails, observability, and deployment</a:t>
+              <a:t>Guardrails, observability, evals, and deployment — production-grade from day one</a:t>
             </a:r>
             <a:endParaRPr lang="en-US" sz="1200" dirty="0"/>
           </a:p>
@@ -5892,7 +7206,7 @@
         </p:nvSpPr>
         <p:spPr>
           <a:xfrm>
-            <a:off x="457200" y="1005840"/>
+            <a:off x="457200" y="932688"/>
             <a:ext cx="8229600" cy="22860"/>
           </a:xfrm>
           <a:prstGeom prst="rect">
@@ -5917,8 +7231,8 @@
         </p:nvSpPr>
         <p:spPr>
           <a:xfrm>
-            <a:off x="365760" y="1188720"/>
-            <a:ext cx="2377440" cy="1417320"/>
+            <a:off x="365760" y="1005840"/>
+            <a:ext cx="2377440" cy="1709928"/>
           </a:xfrm>
           <a:prstGeom prst="rect">
             <a:avLst/>
@@ -5949,7 +7263,7 @@
         </p:nvSpPr>
         <p:spPr>
           <a:xfrm>
-            <a:off x="365760" y="1188720"/>
+            <a:off x="365760" y="1005840"/>
             <a:ext cx="2377440" cy="54864"/>
           </a:xfrm>
           <a:prstGeom prst="rect">
@@ -5974,8 +7288,8 @@
         </p:nvSpPr>
         <p:spPr>
           <a:xfrm>
-            <a:off x="457200" y="1298448"/>
-            <a:ext cx="2194560" cy="274320"/>
+            <a:off x="457200" y="1097280"/>
+            <a:ext cx="2240280" cy="256032"/>
           </a:xfrm>
           <a:prstGeom prst="rect">
             <a:avLst/>
@@ -5991,7 +7305,7 @@
               <a:buNone/>
             </a:pPr>
             <a:r>
-              <a:rPr lang="en-US" sz="1400" b="1" dirty="0">
+              <a:rPr lang="en-US" sz="1300" b="1" dirty="0">
                 <a:solidFill>
                   <a:srgbClr val="FFFFFF"/>
                 </a:solidFill>
@@ -6001,7 +7315,7 @@
               </a:rPr>
               <a:t>Guardrails</a:t>
             </a:r>
-            <a:endParaRPr lang="en-US" sz="1400" dirty="0"/>
+            <a:endParaRPr lang="en-US" sz="1300" dirty="0"/>
           </a:p>
         </p:txBody>
       </p:sp>
@@ -6013,8 +7327,8 @@
         </p:nvSpPr>
         <p:spPr>
           <a:xfrm>
-            <a:off x="457200" y="1627632"/>
-            <a:ext cx="2194560" cy="274320"/>
+            <a:off x="457200" y="1399032"/>
+            <a:ext cx="2240280" cy="219456"/>
           </a:xfrm>
           <a:prstGeom prst="rect">
             <a:avLst/>
@@ -6031,7 +7345,7 @@
               <a:buChar char="•"/>
             </a:pPr>
             <a:r>
-              <a:rPr lang="en-US" sz="1100" dirty="0">
+              <a:rPr lang="en-US" sz="900" dirty="0">
                 <a:solidFill>
                   <a:srgbClr val="94A3B8"/>
                 </a:solidFill>
@@ -6039,9 +7353,9 @@
                 <a:ea typeface="Calibri" pitchFamily="34" charset="-122"/>
                 <a:cs typeface="Calibri" pitchFamily="34" charset="-120"/>
               </a:rPr>
-              <a:t>Time-window validation</a:t>
-            </a:r>
-            <a:endParaRPr lang="en-US" sz="1100" dirty="0"/>
+              <a:t>SQL Injection Prevention — only SELECT ever runs</a:t>
+            </a:r>
+            <a:endParaRPr lang="en-US" sz="900" dirty="0"/>
           </a:p>
         </p:txBody>
       </p:sp>
@@ -6053,8 +7367,8 @@
         </p:nvSpPr>
         <p:spPr>
           <a:xfrm>
-            <a:off x="457200" y="1929384"/>
-            <a:ext cx="2194560" cy="274320"/>
+            <a:off x="457200" y="1645920"/>
+            <a:ext cx="2240280" cy="219456"/>
           </a:xfrm>
           <a:prstGeom prst="rect">
             <a:avLst/>
@@ -6071,7 +7385,7 @@
               <a:buChar char="•"/>
             </a:pPr>
             <a:r>
-              <a:rPr lang="en-US" sz="1100" dirty="0">
+              <a:rPr lang="en-US" sz="900" dirty="0">
                 <a:solidFill>
                   <a:srgbClr val="94A3B8"/>
                 </a:solidFill>
@@ -6079,9 +7393,9 @@
                 <a:ea typeface="Calibri" pitchFamily="34" charset="-122"/>
                 <a:cs typeface="Calibri" pitchFamily="34" charset="-120"/>
               </a:rPr>
-              <a:t>Scope detection</a:t>
-            </a:r>
-            <a:endParaRPr lang="en-US" sz="1100" dirty="0"/>
+              <a:t>Date Range Validation — blocks queries outside data window</a:t>
+            </a:r>
+            <a:endParaRPr lang="en-US" sz="900" dirty="0"/>
           </a:p>
         </p:txBody>
       </p:sp>
@@ -6093,8 +7407,8 @@
         </p:nvSpPr>
         <p:spPr>
           <a:xfrm>
-            <a:off x="457200" y="2231136"/>
-            <a:ext cx="2194560" cy="274320"/>
+            <a:off x="457200" y="1892808"/>
+            <a:ext cx="2240280" cy="219456"/>
           </a:xfrm>
           <a:prstGeom prst="rect">
             <a:avLst/>
@@ -6111,7 +7425,7 @@
               <a:buChar char="•"/>
             </a:pPr>
             <a:r>
-              <a:rPr lang="en-US" sz="1100" dirty="0">
+              <a:rPr lang="en-US" sz="900" dirty="0">
                 <a:solidFill>
                   <a:srgbClr val="94A3B8"/>
                 </a:solidFill>
@@ -6119,22 +7433,90 @@
                 <a:ea typeface="Calibri" pitchFamily="34" charset="-122"/>
                 <a:cs typeface="Calibri" pitchFamily="34" charset="-120"/>
               </a:rPr>
-              <a:t>Out-of-range fast-fail before SQL</a:t>
-            </a:r>
-            <a:endParaRPr lang="en-US" sz="1100" dirty="0"/>
-          </a:p>
-        </p:txBody>
-      </p:sp>
-      <p:sp>
-        <p:nvSpPr>
-          <p:cNvPr id="11" name="Shape 9"/>
-          <p:cNvSpPr/>
-          <p:nvPr/>
-        </p:nvSpPr>
-        <p:spPr>
-          <a:xfrm>
-            <a:off x="2880360" y="1188720"/>
-            <a:ext cx="2377440" cy="1417320"/>
+              <a:t>Schema Hallucination Guard — every table &amp; column verified</a:t>
+            </a:r>
+            <a:endParaRPr lang="en-US" sz="900" dirty="0"/>
+          </a:p>
+        </p:txBody>
+      </p:sp>
+      <p:sp>
+        <p:nvSpPr>
+          <p:cNvPr id="11" name="Text 9"/>
+          <p:cNvSpPr/>
+          <p:nvPr/>
+        </p:nvSpPr>
+        <p:spPr>
+          <a:xfrm>
+            <a:off x="457200" y="2139696"/>
+            <a:ext cx="2240280" cy="219456"/>
+          </a:xfrm>
+          <a:prstGeom prst="rect">
+            <a:avLst/>
+          </a:prstGeom>
+          <a:noFill/>
+          <a:ln/>
+        </p:spPr>
+        <p:txBody>
+          <a:bodyPr wrap="square" rtlCol="0" anchor="ctr"/>
+          <a:lstStyle/>
+          <a:p>
+            <a:pPr>
+              <a:buSzPct val="100000"/>
+            </a:pPr>
+            <a:endParaRPr lang="en-US" sz="900" dirty="0"/>
+          </a:p>
+        </p:txBody>
+      </p:sp>
+      <p:sp>
+        <p:nvSpPr>
+          <p:cNvPr id="12" name="Text 10"/>
+          <p:cNvSpPr/>
+          <p:nvPr/>
+        </p:nvSpPr>
+        <p:spPr>
+          <a:xfrm>
+            <a:off x="457200" y="2157984"/>
+            <a:ext cx="2240280" cy="246888"/>
+          </a:xfrm>
+          <a:prstGeom prst="rect">
+            <a:avLst/>
+          </a:prstGeom>
+          <a:noFill/>
+          <a:ln/>
+        </p:spPr>
+        <p:txBody>
+          <a:bodyPr wrap="square" rtlCol="0" anchor="ctr"/>
+          <a:lstStyle/>
+          <a:p>
+            <a:pPr marL="342900" indent="-342900">
+              <a:buSzPct val="100000"/>
+              <a:buChar char="•"/>
+            </a:pPr>
+            <a:r>
+              <a:rPr lang="en-US" sz="900" dirty="0">
+                <a:solidFill>
+                  <a:srgbClr val="94A3B8"/>
+                </a:solidFill>
+                <a:latin typeface="Calibri" pitchFamily="34" charset="0"/>
+                <a:ea typeface="Calibri" pitchFamily="34" charset="-122"/>
+                <a:cs typeface="Calibri" pitchFamily="34" charset="-120"/>
+              </a:rPr>
+              <a:t>Cost Control — BQ dry-run; ceiling blocks expensive queries</a:t>
+            </a:r>
+            <a:endParaRPr lang="en-US" sz="900" dirty="0"/>
+          </a:p>
+        </p:txBody>
+      </p:sp>
+      <p:sp>
+        <p:nvSpPr>
+          <p:cNvPr id="13" name="Shape 11"/>
+          <p:cNvSpPr/>
+          <p:nvPr/>
+        </p:nvSpPr>
+        <p:spPr>
+          <a:xfrm>
+            <a:off x="2880360" y="1005840"/>
+            <a:ext cx="2377440" cy="1709928"/>
           </a:xfrm>
           <a:prstGeom prst="rect">
             <a:avLst/>
@@ -6159,13 +7541,13 @@
       </p:sp>
       <p:sp>
         <p:nvSpPr>
-          <p:cNvPr id="12" name="Shape 10"/>
-          <p:cNvSpPr/>
-          <p:nvPr/>
-        </p:nvSpPr>
-        <p:spPr>
-          <a:xfrm>
-            <a:off x="2880360" y="1188720"/>
+          <p:cNvPr id="14" name="Shape 12"/>
+          <p:cNvSpPr/>
+          <p:nvPr/>
+        </p:nvSpPr>
+        <p:spPr>
+          <a:xfrm>
+            <a:off x="2880360" y="1005840"/>
             <a:ext cx="2377440" cy="54864"/>
           </a:xfrm>
           <a:prstGeom prst="rect">
@@ -6184,14 +7566,14 @@
       </p:sp>
       <p:sp>
         <p:nvSpPr>
-          <p:cNvPr id="13" name="Text 11"/>
-          <p:cNvSpPr/>
-          <p:nvPr/>
-        </p:nvSpPr>
-        <p:spPr>
-          <a:xfrm>
-            <a:off x="2971800" y="1298448"/>
-            <a:ext cx="2194560" cy="274320"/>
+          <p:cNvPr id="15" name="Text 13"/>
+          <p:cNvSpPr/>
+          <p:nvPr/>
+        </p:nvSpPr>
+        <p:spPr>
+          <a:xfrm>
+            <a:off x="2971800" y="1097280"/>
+            <a:ext cx="2240280" cy="256032"/>
           </a:xfrm>
           <a:prstGeom prst="rect">
             <a:avLst/>
@@ -6207,7 +7589,7 @@
               <a:buNone/>
             </a:pPr>
             <a:r>
-              <a:rPr lang="en-US" sz="1400" b="1" dirty="0">
+              <a:rPr lang="en-US" sz="1300" b="1" dirty="0">
                 <a:solidFill>
                   <a:srgbClr val="FFFFFF"/>
                 </a:solidFill>
@@ -6217,20 +7599,109 @@
               </a:rPr>
               <a:t>Observability</a:t>
             </a:r>
-            <a:endParaRPr lang="en-US" sz="1400" dirty="0"/>
-          </a:p>
-        </p:txBody>
-      </p:sp>
-      <p:sp>
-        <p:nvSpPr>
-          <p:cNvPr id="14" name="Text 12"/>
-          <p:cNvSpPr/>
-          <p:nvPr/>
-        </p:nvSpPr>
-        <p:spPr>
-          <a:xfrm>
-            <a:off x="2971800" y="1627632"/>
-            <a:ext cx="2194560" cy="274320"/>
+            <a:endParaRPr lang="en-US" sz="1300" dirty="0"/>
+          </a:p>
+        </p:txBody>
+      </p:sp>
+      <p:sp>
+        <p:nvSpPr>
+          <p:cNvPr id="16" name="Text 14"/>
+          <p:cNvSpPr/>
+          <p:nvPr/>
+        </p:nvSpPr>
+        <p:spPr>
+          <a:xfrm>
+            <a:off x="2971800" y="1399032"/>
+            <a:ext cx="438912" cy="201168"/>
+          </a:xfrm>
+          <a:prstGeom prst="rect">
+            <a:avLst/>
+          </a:prstGeom>
+          <a:noFill/>
+          <a:ln/>
+        </p:spPr>
+        <p:txBody>
+          <a:bodyPr wrap="square" rtlCol="0" anchor="ctr"/>
+          <a:lstStyle/>
+          <a:p>
+            <a:pPr marL="0" indent="0">
+              <a:buNone/>
+            </a:pPr>
+            <a:endParaRPr lang="en-US" sz="1000" dirty="0"/>
+          </a:p>
+        </p:txBody>
+      </p:sp>
+      <p:sp>
+        <p:nvSpPr>
+          <p:cNvPr id="17" name="Text 15"/>
+          <p:cNvSpPr/>
+          <p:nvPr/>
+        </p:nvSpPr>
+        <p:spPr>
+          <a:xfrm>
+            <a:off x="4046706" y="1106424"/>
+            <a:ext cx="982494" cy="274320"/>
+          </a:xfrm>
+          <a:prstGeom prst="rect">
+            <a:avLst/>
+          </a:prstGeom>
+          <a:noFill/>
+          <a:ln/>
+        </p:spPr>
+        <p:txBody>
+          <a:bodyPr wrap="square" rtlCol="0" anchor="ctr"/>
+          <a:lstStyle/>
+          <a:p>
+            <a:pPr marL="0" indent="0">
+              <a:buNone/>
+            </a:pPr>
+            <a:r>
+              <a:rPr lang="en-US" sz="1100" b="1" dirty="0">
+                <a:solidFill>
+                  <a:srgbClr val="06B6D4"/>
+                </a:solidFill>
+                <a:latin typeface="Calibri" pitchFamily="34" charset="0"/>
+                <a:ea typeface="Calibri" pitchFamily="34" charset="-122"/>
+                <a:cs typeface="Calibri" pitchFamily="34" charset="-120"/>
+              </a:rPr>
+              <a:t>(</a:t>
+            </a:r>
+            <a:r>
+              <a:rPr lang="en-US" sz="1100" b="1" dirty="0" err="1">
+                <a:solidFill>
+                  <a:srgbClr val="06B6D4"/>
+                </a:solidFill>
+                <a:latin typeface="Calibri" pitchFamily="34" charset="0"/>
+                <a:ea typeface="Calibri" pitchFamily="34" charset="-122"/>
+                <a:cs typeface="Calibri" pitchFamily="34" charset="-120"/>
+              </a:rPr>
+              <a:t>Langfuse</a:t>
+            </a:r>
+            <a:r>
+              <a:rPr lang="en-US" sz="1100" b="1" dirty="0">
+                <a:solidFill>
+                  <a:srgbClr val="06B6D4"/>
+                </a:solidFill>
+                <a:latin typeface="Calibri" pitchFamily="34" charset="0"/>
+                <a:ea typeface="Calibri" pitchFamily="34" charset="-122"/>
+                <a:cs typeface="Calibri" pitchFamily="34" charset="-120"/>
+              </a:rPr>
+              <a:t>)</a:t>
+            </a:r>
+            <a:endParaRPr lang="en-US" sz="1100" dirty="0"/>
+          </a:p>
+        </p:txBody>
+      </p:sp>
+      <p:sp>
+        <p:nvSpPr>
+          <p:cNvPr id="18" name="Text 16"/>
+          <p:cNvSpPr/>
+          <p:nvPr/>
+        </p:nvSpPr>
+        <p:spPr>
+          <a:xfrm>
+            <a:off x="2971800" y="1431036"/>
+            <a:ext cx="2240280" cy="259690"/>
           </a:xfrm>
           <a:prstGeom prst="rect">
             <a:avLst/>
@@ -6247,7 +7718,7 @@
               <a:buChar char="•"/>
             </a:pPr>
             <a:r>
-              <a:rPr lang="en-US" sz="1100" dirty="0">
+              <a:rPr lang="en-US" sz="900" dirty="0">
                 <a:solidFill>
                   <a:srgbClr val="94A3B8"/>
                 </a:solidFill>
@@ -6255,22 +7726,22 @@
                 <a:ea typeface="Calibri" pitchFamily="34" charset="-122"/>
                 <a:cs typeface="Calibri" pitchFamily="34" charset="-120"/>
               </a:rPr>
-              <a:t>Structured logging (LOG_LEVEL)</a:t>
-            </a:r>
-            <a:endParaRPr lang="en-US" sz="1100" dirty="0"/>
-          </a:p>
-        </p:txBody>
-      </p:sp>
-      <p:sp>
-        <p:nvSpPr>
-          <p:cNvPr id="15" name="Text 13"/>
-          <p:cNvSpPr/>
-          <p:nvPr/>
-        </p:nvSpPr>
-        <p:spPr>
-          <a:xfrm>
-            <a:off x="2971800" y="1929384"/>
-            <a:ext cx="2194560" cy="274320"/>
+              <a:t>End-to-end traces: per-agent spans for every query</a:t>
+            </a:r>
+            <a:endParaRPr lang="en-US" sz="900" dirty="0"/>
+          </a:p>
+        </p:txBody>
+      </p:sp>
+      <p:sp>
+        <p:nvSpPr>
+          <p:cNvPr id="19" name="Text 17"/>
+          <p:cNvSpPr/>
+          <p:nvPr/>
+        </p:nvSpPr>
+        <p:spPr>
+          <a:xfrm>
+            <a:off x="2971800" y="1702613"/>
+            <a:ext cx="2240280" cy="259690"/>
           </a:xfrm>
           <a:prstGeom prst="rect">
             <a:avLst/>
@@ -6287,7 +7758,7 @@
               <a:buChar char="•"/>
             </a:pPr>
             <a:r>
-              <a:rPr lang="en-US" sz="1100" dirty="0">
+              <a:rPr lang="en-US" sz="900" dirty="0">
                 <a:solidFill>
                   <a:srgbClr val="94A3B8"/>
                 </a:solidFill>
@@ -6295,22 +7766,22 @@
                 <a:ea typeface="Calibri" pitchFamily="34" charset="-122"/>
                 <a:cs typeface="Calibri" pitchFamily="34" charset="-120"/>
               </a:rPr>
-              <a:t>Exponential backoff retries</a:t>
-            </a:r>
-            <a:endParaRPr lang="en-US" sz="1100" dirty="0"/>
-          </a:p>
-        </p:txBody>
-      </p:sp>
-      <p:sp>
-        <p:nvSpPr>
-          <p:cNvPr id="16" name="Text 14"/>
-          <p:cNvSpPr/>
-          <p:nvPr/>
-        </p:nvSpPr>
-        <p:spPr>
-          <a:xfrm>
-            <a:off x="2971800" y="2231136"/>
-            <a:ext cx="2194560" cy="274320"/>
+              <a:t>Remote prompt versioning (production label, 5-min cache)</a:t>
+            </a:r>
+            <a:endParaRPr lang="en-US" sz="900" dirty="0"/>
+          </a:p>
+        </p:txBody>
+      </p:sp>
+      <p:sp>
+        <p:nvSpPr>
+          <p:cNvPr id="20" name="Text 18"/>
+          <p:cNvSpPr/>
+          <p:nvPr/>
+        </p:nvSpPr>
+        <p:spPr>
+          <a:xfrm>
+            <a:off x="2971800" y="1974190"/>
+            <a:ext cx="2240280" cy="265176"/>
           </a:xfrm>
           <a:prstGeom prst="rect">
             <a:avLst/>
@@ -6327,7 +7798,7 @@
               <a:buChar char="•"/>
             </a:pPr>
             <a:r>
-              <a:rPr lang="en-US" sz="1100" dirty="0">
+              <a:rPr lang="en-US" sz="900" dirty="0">
                 <a:solidFill>
                   <a:srgbClr val="94A3B8"/>
                 </a:solidFill>
@@ -6335,22 +7806,102 @@
                 <a:ea typeface="Calibri" pitchFamily="34" charset="-122"/>
                 <a:cs typeface="Calibri" pitchFamily="34" charset="-120"/>
               </a:rPr>
-              <a:t>Supabase transient-I/O retry</a:t>
-            </a:r>
-            <a:endParaRPr lang="en-US" sz="1100" dirty="0"/>
-          </a:p>
-        </p:txBody>
-      </p:sp>
-      <p:sp>
-        <p:nvSpPr>
-          <p:cNvPr id="17" name="Shape 15"/>
-          <p:cNvSpPr/>
-          <p:nvPr/>
-        </p:nvSpPr>
-        <p:spPr>
-          <a:xfrm>
-            <a:off x="5394960" y="1188720"/>
-            <a:ext cx="2377440" cy="1417320"/>
+              <a:t>Session tracking: thread_id → Langfuse session</a:t>
+            </a:r>
+            <a:endParaRPr lang="en-US" sz="900" dirty="0"/>
+          </a:p>
+        </p:txBody>
+      </p:sp>
+      <p:sp>
+        <p:nvSpPr>
+          <p:cNvPr id="21" name="Text 19"/>
+          <p:cNvSpPr/>
+          <p:nvPr/>
+        </p:nvSpPr>
+        <p:spPr>
+          <a:xfrm>
+            <a:off x="2971800" y="2275942"/>
+            <a:ext cx="2240280" cy="164591"/>
+          </a:xfrm>
+          <a:prstGeom prst="rect">
+            <a:avLst/>
+          </a:prstGeom>
+          <a:noFill/>
+          <a:ln/>
+        </p:spPr>
+        <p:txBody>
+          <a:bodyPr wrap="square" rtlCol="0" anchor="ctr"/>
+          <a:lstStyle/>
+          <a:p>
+            <a:pPr marL="342900" indent="-342900">
+              <a:buSzPct val="100000"/>
+              <a:buChar char="•"/>
+            </a:pPr>
+            <a:r>
+              <a:rPr lang="en-US" sz="900" dirty="0">
+                <a:solidFill>
+                  <a:srgbClr val="94A3B8"/>
+                </a:solidFill>
+                <a:latin typeface="Calibri" pitchFamily="34" charset="0"/>
+                <a:ea typeface="Calibri" pitchFamily="34" charset="-122"/>
+                <a:cs typeface="Calibri" pitchFamily="34" charset="-120"/>
+              </a:rPr>
+              <a:t>LLM call logs: input, output, latency, cost per call</a:t>
+            </a:r>
+            <a:endParaRPr lang="en-US" sz="900" dirty="0"/>
+          </a:p>
+        </p:txBody>
+      </p:sp>
+      <p:sp>
+        <p:nvSpPr>
+          <p:cNvPr id="22" name="Text 20"/>
+          <p:cNvSpPr/>
+          <p:nvPr/>
+        </p:nvSpPr>
+        <p:spPr>
+          <a:xfrm>
+            <a:off x="2971800" y="2496313"/>
+            <a:ext cx="2240280" cy="219455"/>
+          </a:xfrm>
+          <a:prstGeom prst="rect">
+            <a:avLst/>
+          </a:prstGeom>
+          <a:noFill/>
+          <a:ln/>
+        </p:spPr>
+        <p:txBody>
+          <a:bodyPr wrap="square" rtlCol="0" anchor="ctr"/>
+          <a:lstStyle/>
+          <a:p>
+            <a:pPr marL="342900" indent="-342900">
+              <a:buSzPct val="100000"/>
+              <a:buChar char="•"/>
+            </a:pPr>
+            <a:r>
+              <a:rPr lang="en-US" sz="900" dirty="0">
+                <a:solidFill>
+                  <a:srgbClr val="94A3B8"/>
+                </a:solidFill>
+                <a:latin typeface="Calibri" pitchFamily="34" charset="0"/>
+                <a:ea typeface="Calibri" pitchFamily="34" charset="-122"/>
+                <a:cs typeface="Calibri" pitchFamily="34" charset="-120"/>
+              </a:rPr>
+              <a:t>Custom spans: BQ dry-run bytes + Postgres table size</a:t>
+            </a:r>
+            <a:endParaRPr lang="en-US" sz="900" dirty="0"/>
+          </a:p>
+        </p:txBody>
+      </p:sp>
+      <p:sp>
+        <p:nvSpPr>
+          <p:cNvPr id="23" name="Shape 21"/>
+          <p:cNvSpPr/>
+          <p:nvPr/>
+        </p:nvSpPr>
+        <p:spPr>
+          <a:xfrm>
+            <a:off x="5394960" y="1005840"/>
+            <a:ext cx="2377440" cy="1709928"/>
           </a:xfrm>
           <a:prstGeom prst="rect">
             <a:avLst/>
@@ -6375,13 +7926,13 @@
       </p:sp>
       <p:sp>
         <p:nvSpPr>
-          <p:cNvPr id="18" name="Shape 16"/>
-          <p:cNvSpPr/>
-          <p:nvPr/>
-        </p:nvSpPr>
-        <p:spPr>
-          <a:xfrm>
-            <a:off x="5394960" y="1188720"/>
+          <p:cNvPr id="24" name="Shape 22"/>
+          <p:cNvSpPr/>
+          <p:nvPr/>
+        </p:nvSpPr>
+        <p:spPr>
+          <a:xfrm>
+            <a:off x="5394960" y="1005840"/>
             <a:ext cx="2377440" cy="54864"/>
           </a:xfrm>
           <a:prstGeom prst="rect">
@@ -6400,14 +7951,14 @@
       </p:sp>
       <p:sp>
         <p:nvSpPr>
-          <p:cNvPr id="19" name="Text 17"/>
-          <p:cNvSpPr/>
-          <p:nvPr/>
-        </p:nvSpPr>
-        <p:spPr>
-          <a:xfrm>
-            <a:off x="5486400" y="1298448"/>
-            <a:ext cx="2194560" cy="274320"/>
+          <p:cNvPr id="25" name="Text 23"/>
+          <p:cNvSpPr/>
+          <p:nvPr/>
+        </p:nvSpPr>
+        <p:spPr>
+          <a:xfrm>
+            <a:off x="5486400" y="1097280"/>
+            <a:ext cx="2240280" cy="256032"/>
           </a:xfrm>
           <a:prstGeom prst="rect">
             <a:avLst/>
@@ -6423,7 +7974,7 @@
               <a:buNone/>
             </a:pPr>
             <a:r>
-              <a:rPr lang="en-US" sz="1400" b="1" dirty="0">
+              <a:rPr lang="en-US" sz="1300" b="1" dirty="0">
                 <a:solidFill>
                   <a:srgbClr val="FFFFFF"/>
                 </a:solidFill>
@@ -6431,22 +7982,22 @@
                 <a:ea typeface="Trebuchet MS" pitchFamily="34" charset="-122"/>
                 <a:cs typeface="Trebuchet MS" pitchFamily="34" charset="-120"/>
               </a:rPr>
-              <a:t>Evals &amp; Testing</a:t>
-            </a:r>
-            <a:endParaRPr lang="en-US" sz="1400" dirty="0"/>
-          </a:p>
-        </p:txBody>
-      </p:sp>
-      <p:sp>
-        <p:nvSpPr>
-          <p:cNvPr id="20" name="Text 18"/>
-          <p:cNvSpPr/>
-          <p:nvPr/>
-        </p:nvSpPr>
-        <p:spPr>
-          <a:xfrm>
-            <a:off x="5486400" y="1627632"/>
-            <a:ext cx="2194560" cy="274320"/>
+              <a:t>Evals &amp; Tests</a:t>
+            </a:r>
+            <a:endParaRPr lang="en-US" sz="1300" dirty="0"/>
+          </a:p>
+        </p:txBody>
+      </p:sp>
+      <p:sp>
+        <p:nvSpPr>
+          <p:cNvPr id="26" name="Text 24"/>
+          <p:cNvSpPr/>
+          <p:nvPr/>
+        </p:nvSpPr>
+        <p:spPr>
+          <a:xfrm>
+            <a:off x="5486400" y="1399032"/>
+            <a:ext cx="2240280" cy="219456"/>
           </a:xfrm>
           <a:prstGeom prst="rect">
             <a:avLst/>
@@ -6463,7 +8014,7 @@
               <a:buChar char="•"/>
             </a:pPr>
             <a:r>
-              <a:rPr lang="en-US" sz="1100" dirty="0">
+              <a:rPr lang="en-US" sz="900" dirty="0">
                 <a:solidFill>
                   <a:srgbClr val="94A3B8"/>
                 </a:solidFill>
@@ -6471,22 +8022,22 @@
                 <a:ea typeface="Calibri" pitchFamily="34" charset="-122"/>
                 <a:cs typeface="Calibri" pitchFamily="34" charset="-120"/>
               </a:rPr>
-              <a:t>DATAPILOT_SKIP_INTERRUPTS flag</a:t>
-            </a:r>
-            <a:endParaRPr lang="en-US" sz="1100" dirty="0"/>
-          </a:p>
-        </p:txBody>
-      </p:sp>
-      <p:sp>
-        <p:nvSpPr>
-          <p:cNvPr id="21" name="Text 19"/>
-          <p:cNvSpPr/>
-          <p:nvPr/>
-        </p:nvSpPr>
-        <p:spPr>
-          <a:xfrm>
-            <a:off x="5486400" y="1929384"/>
-            <a:ext cx="2194560" cy="274320"/>
+              <a:t>"ignore prev instructions…" → injection guard ✓</a:t>
+            </a:r>
+            <a:endParaRPr lang="en-US" sz="900" dirty="0"/>
+          </a:p>
+        </p:txBody>
+      </p:sp>
+      <p:sp>
+        <p:nvSpPr>
+          <p:cNvPr id="27" name="Text 25"/>
+          <p:cNvSpPr/>
+          <p:nvPr/>
+        </p:nvSpPr>
+        <p:spPr>
+          <a:xfrm>
+            <a:off x="5486400" y="1645920"/>
+            <a:ext cx="2240280" cy="219456"/>
           </a:xfrm>
           <a:prstGeom prst="rect">
             <a:avLst/>
@@ -6503,7 +8054,7 @@
               <a:buChar char="•"/>
             </a:pPr>
             <a:r>
-              <a:rPr lang="en-US" sz="1100" dirty="0">
+              <a:rPr lang="en-US" sz="900" dirty="0">
                 <a:solidFill>
                   <a:srgbClr val="94A3B8"/>
                 </a:solidFill>
@@ -6511,22 +8062,22 @@
                 <a:ea typeface="Calibri" pitchFamily="34" charset="-122"/>
                 <a:cs typeface="Calibri" pitchFamily="34" charset="-120"/>
               </a:rPr>
-              <a:t>MemorySaver fallback</a:t>
-            </a:r>
-            <a:endParaRPr lang="en-US" sz="1100" dirty="0"/>
-          </a:p>
-        </p:txBody>
-      </p:sp>
-      <p:sp>
-        <p:nvSpPr>
-          <p:cNvPr id="22" name="Text 20"/>
-          <p:cNvSpPr/>
-          <p:nvPr/>
-        </p:nvSpPr>
-        <p:spPr>
-          <a:xfrm>
-            <a:off x="5486400" y="2231136"/>
-            <a:ext cx="2194560" cy="274320"/>
+              <a:t>"last month revenue" → time-window guard ✓</a:t>
+            </a:r>
+            <a:endParaRPr lang="en-US" sz="900" dirty="0"/>
+          </a:p>
+        </p:txBody>
+      </p:sp>
+      <p:sp>
+        <p:nvSpPr>
+          <p:cNvPr id="28" name="Text 26"/>
+          <p:cNvSpPr/>
+          <p:nvPr/>
+        </p:nvSpPr>
+        <p:spPr>
+          <a:xfrm>
+            <a:off x="5486400" y="1892808"/>
+            <a:ext cx="2240280" cy="219456"/>
           </a:xfrm>
           <a:prstGeom prst="rect">
             <a:avLst/>
@@ -6543,7 +8094,7 @@
               <a:buChar char="•"/>
             </a:pPr>
             <a:r>
-              <a:rPr lang="en-US" sz="1100" dirty="0">
+              <a:rPr lang="en-US" sz="900" dirty="0">
                 <a:solidFill>
                   <a:srgbClr val="94A3B8"/>
                 </a:solidFill>
@@ -6551,22 +8102,102 @@
                 <a:ea typeface="Calibri" pitchFamily="34" charset="-122"/>
                 <a:cs typeface="Calibri" pitchFamily="34" charset="-120"/>
               </a:rPr>
-              <a:t>Env-flag behavior toggles</a:t>
-            </a:r>
-            <a:endParaRPr lang="en-US" sz="1100" dirty="0"/>
-          </a:p>
-        </p:txBody>
-      </p:sp>
-      <p:sp>
-        <p:nvSpPr>
-          <p:cNvPr id="23" name="Shape 21"/>
-          <p:cNvSpPr/>
-          <p:nvPr/>
-        </p:nvSpPr>
-        <p:spPr>
-          <a:xfrm>
-            <a:off x="1600200" y="2697480"/>
-            <a:ext cx="2377440" cy="1417320"/>
+              <a:t>"Capital of France?" → LLM: out_of_scope ✓</a:t>
+            </a:r>
+            <a:endParaRPr lang="en-US" sz="900" dirty="0"/>
+          </a:p>
+        </p:txBody>
+      </p:sp>
+      <p:sp>
+        <p:nvSpPr>
+          <p:cNvPr id="29" name="Text 27"/>
+          <p:cNvSpPr/>
+          <p:nvPr/>
+        </p:nvSpPr>
+        <p:spPr>
+          <a:xfrm>
+            <a:off x="5486400" y="2139696"/>
+            <a:ext cx="2240280" cy="219456"/>
+          </a:xfrm>
+          <a:prstGeom prst="rect">
+            <a:avLst/>
+          </a:prstGeom>
+          <a:noFill/>
+          <a:ln/>
+        </p:spPr>
+        <p:txBody>
+          <a:bodyPr wrap="square" rtlCol="0" anchor="ctr"/>
+          <a:lstStyle/>
+          <a:p>
+            <a:pPr marL="342900" indent="-342900">
+              <a:buSzPct val="100000"/>
+              <a:buChar char="•"/>
+            </a:pPr>
+            <a:r>
+              <a:rPr lang="en-US" sz="900" dirty="0">
+                <a:solidFill>
+                  <a:srgbClr val="94A3B8"/>
+                </a:solidFill>
+                <a:latin typeface="Calibri" pitchFamily="34" charset="0"/>
+                <a:ea typeface="Calibri" pitchFamily="34" charset="-122"/>
+                <a:cs typeface="Calibri" pitchFamily="34" charset="-120"/>
+              </a:rPr>
+              <a:t>"Show me everything" → LLM: needs_clarification ✓</a:t>
+            </a:r>
+            <a:endParaRPr lang="en-US" sz="900" dirty="0"/>
+          </a:p>
+        </p:txBody>
+      </p:sp>
+      <p:sp>
+        <p:nvSpPr>
+          <p:cNvPr id="30" name="Text 28"/>
+          <p:cNvSpPr/>
+          <p:nvPr/>
+        </p:nvSpPr>
+        <p:spPr>
+          <a:xfrm>
+            <a:off x="5486400" y="2386584"/>
+            <a:ext cx="2240280" cy="219456"/>
+          </a:xfrm>
+          <a:prstGeom prst="rect">
+            <a:avLst/>
+          </a:prstGeom>
+          <a:noFill/>
+          <a:ln/>
+        </p:spPr>
+        <p:txBody>
+          <a:bodyPr wrap="square" rtlCol="0" anchor="ctr"/>
+          <a:lstStyle/>
+          <a:p>
+            <a:pPr marL="342900" indent="-342900">
+              <a:buSzPct val="100000"/>
+              <a:buChar char="•"/>
+            </a:pPr>
+            <a:r>
+              <a:rPr lang="en-US" sz="900" dirty="0">
+                <a:solidFill>
+                  <a:srgbClr val="94A3B8"/>
+                </a:solidFill>
+                <a:latin typeface="Calibri" pitchFamily="34" charset="0"/>
+                <a:ea typeface="Calibri" pitchFamily="34" charset="-122"/>
+                <a:cs typeface="Calibri" pitchFamily="34" charset="-120"/>
+              </a:rPr>
+              <a:t>Inconsistent result columns → validator fails ✓</a:t>
+            </a:r>
+            <a:endParaRPr lang="en-US" sz="900" dirty="0"/>
+          </a:p>
+        </p:txBody>
+      </p:sp>
+      <p:sp>
+        <p:nvSpPr>
+          <p:cNvPr id="31" name="Shape 29"/>
+          <p:cNvSpPr/>
+          <p:nvPr/>
+        </p:nvSpPr>
+        <p:spPr>
+          <a:xfrm>
+            <a:off x="1600200" y="2834640"/>
+            <a:ext cx="2377440" cy="1709928"/>
           </a:xfrm>
           <a:prstGeom prst="rect">
             <a:avLst/>
@@ -6591,13 +8222,13 @@
       </p:sp>
       <p:sp>
         <p:nvSpPr>
-          <p:cNvPr id="24" name="Shape 22"/>
-          <p:cNvSpPr/>
-          <p:nvPr/>
-        </p:nvSpPr>
-        <p:spPr>
-          <a:xfrm>
-            <a:off x="1600200" y="2697480"/>
+          <p:cNvPr id="32" name="Shape 30"/>
+          <p:cNvSpPr/>
+          <p:nvPr/>
+        </p:nvSpPr>
+        <p:spPr>
+          <a:xfrm>
+            <a:off x="1600200" y="2834640"/>
             <a:ext cx="2377440" cy="54864"/>
           </a:xfrm>
           <a:prstGeom prst="rect">
@@ -6616,14 +8247,14 @@
       </p:sp>
       <p:sp>
         <p:nvSpPr>
-          <p:cNvPr id="25" name="Text 23"/>
-          <p:cNvSpPr/>
-          <p:nvPr/>
-        </p:nvSpPr>
-        <p:spPr>
-          <a:xfrm>
-            <a:off x="1691640" y="2807208"/>
-            <a:ext cx="2194560" cy="274320"/>
+          <p:cNvPr id="33" name="Text 31"/>
+          <p:cNvSpPr/>
+          <p:nvPr/>
+        </p:nvSpPr>
+        <p:spPr>
+          <a:xfrm>
+            <a:off x="1691640" y="2926080"/>
+            <a:ext cx="2240280" cy="256032"/>
           </a:xfrm>
           <a:prstGeom prst="rect">
             <a:avLst/>
@@ -6639,7 +8270,7 @@
               <a:buNone/>
             </a:pPr>
             <a:r>
-              <a:rPr lang="en-US" sz="1400" b="1" dirty="0">
+              <a:rPr lang="en-US" sz="1300" b="1" dirty="0">
                 <a:solidFill>
                   <a:srgbClr val="FFFFFF"/>
                 </a:solidFill>
@@ -6649,20 +8280,20 @@
               </a:rPr>
               <a:t>Cloud Deployment</a:t>
             </a:r>
-            <a:endParaRPr lang="en-US" sz="1400" dirty="0"/>
-          </a:p>
-        </p:txBody>
-      </p:sp>
-      <p:sp>
-        <p:nvSpPr>
-          <p:cNvPr id="26" name="Text 24"/>
-          <p:cNvSpPr/>
-          <p:nvPr/>
-        </p:nvSpPr>
-        <p:spPr>
-          <a:xfrm>
-            <a:off x="1691640" y="3136392"/>
-            <a:ext cx="2194560" cy="274320"/>
+            <a:endParaRPr lang="en-US" sz="1300" dirty="0"/>
+          </a:p>
+        </p:txBody>
+      </p:sp>
+      <p:sp>
+        <p:nvSpPr>
+          <p:cNvPr id="34" name="Text 32"/>
+          <p:cNvSpPr/>
+          <p:nvPr/>
+        </p:nvSpPr>
+        <p:spPr>
+          <a:xfrm>
+            <a:off x="1691640" y="3227832"/>
+            <a:ext cx="2240280" cy="219456"/>
           </a:xfrm>
           <a:prstGeom prst="rect">
             <a:avLst/>
@@ -6679,7 +8310,7 @@
               <a:buChar char="•"/>
             </a:pPr>
             <a:r>
-              <a:rPr lang="en-US" sz="1100" dirty="0">
+              <a:rPr lang="en-US" sz="900" dirty="0">
                 <a:solidFill>
                   <a:srgbClr val="94A3B8"/>
                 </a:solidFill>
@@ -6687,22 +8318,22 @@
                 <a:ea typeface="Calibri" pitchFamily="34" charset="-122"/>
                 <a:cs typeface="Calibri" pitchFamily="34" charset="-120"/>
               </a:rPr>
-              <a:t>BigQuery + GCP service account</a:t>
-            </a:r>
-            <a:endParaRPr lang="en-US" sz="1100" dirty="0"/>
-          </a:p>
-        </p:txBody>
-      </p:sp>
-      <p:sp>
-        <p:nvSpPr>
-          <p:cNvPr id="27" name="Text 25"/>
-          <p:cNvSpPr/>
-          <p:nvPr/>
-        </p:nvSpPr>
-        <p:spPr>
-          <a:xfrm>
-            <a:off x="1691640" y="3438144"/>
-            <a:ext cx="2194560" cy="274320"/>
+              <a:t>Gpt-5.4-mini— LLM for all agent reasoning</a:t>
+            </a:r>
+            <a:endParaRPr lang="en-US" sz="900" dirty="0"/>
+          </a:p>
+        </p:txBody>
+      </p:sp>
+      <p:sp>
+        <p:nvSpPr>
+          <p:cNvPr id="35" name="Text 33"/>
+          <p:cNvSpPr/>
+          <p:nvPr/>
+        </p:nvSpPr>
+        <p:spPr>
+          <a:xfrm>
+            <a:off x="1691640" y="3474720"/>
+            <a:ext cx="2240280" cy="219456"/>
           </a:xfrm>
           <a:prstGeom prst="rect">
             <a:avLst/>
@@ -6719,7 +8350,7 @@
               <a:buChar char="•"/>
             </a:pPr>
             <a:r>
-              <a:rPr lang="en-US" sz="1100" dirty="0">
+              <a:rPr lang="en-US" sz="900" dirty="0">
                 <a:solidFill>
                   <a:srgbClr val="94A3B8"/>
                 </a:solidFill>
@@ -6727,22 +8358,22 @@
                 <a:ea typeface="Calibri" pitchFamily="34" charset="-122"/>
                 <a:cs typeface="Calibri" pitchFamily="34" charset="-120"/>
               </a:rPr>
-              <a:t>Supabase Postgres checkpointer</a:t>
-            </a:r>
-            <a:endParaRPr lang="en-US" sz="1100" dirty="0"/>
-          </a:p>
-        </p:txBody>
-      </p:sp>
-      <p:sp>
-        <p:nvSpPr>
-          <p:cNvPr id="28" name="Text 26"/>
-          <p:cNvSpPr/>
-          <p:nvPr/>
-        </p:nvSpPr>
-        <p:spPr>
-          <a:xfrm>
-            <a:off x="1691640" y="3739896"/>
-            <a:ext cx="2194560" cy="274320"/>
+              <a:t>Google BigQuery — warehouse + dry-run cost API</a:t>
+            </a:r>
+            <a:endParaRPr lang="en-US" sz="900" dirty="0"/>
+          </a:p>
+        </p:txBody>
+      </p:sp>
+      <p:sp>
+        <p:nvSpPr>
+          <p:cNvPr id="36" name="Text 34"/>
+          <p:cNvSpPr/>
+          <p:nvPr/>
+        </p:nvSpPr>
+        <p:spPr>
+          <a:xfrm>
+            <a:off x="1691640" y="3721608"/>
+            <a:ext cx="2240280" cy="219456"/>
           </a:xfrm>
           <a:prstGeom prst="rect">
             <a:avLst/>
@@ -6759,7 +8390,7 @@
               <a:buChar char="•"/>
             </a:pPr>
             <a:r>
-              <a:rPr lang="en-US" sz="1100" dirty="0">
+              <a:rPr lang="en-US" sz="900" dirty="0">
                 <a:solidFill>
                   <a:srgbClr val="94A3B8"/>
                 </a:solidFill>
@@ -6767,22 +8398,90 @@
                 <a:ea typeface="Calibri" pitchFamily="34" charset="-122"/>
                 <a:cs typeface="Calibri" pitchFamily="34" charset="-120"/>
               </a:rPr>
-              <a:t>Vercel-ready env vars (incl. B64 SA key)</a:t>
-            </a:r>
-            <a:endParaRPr lang="en-US" sz="1100" dirty="0"/>
-          </a:p>
-        </p:txBody>
-      </p:sp>
-      <p:sp>
-        <p:nvSpPr>
-          <p:cNvPr id="29" name="Shape 27"/>
-          <p:cNvSpPr/>
-          <p:nvPr/>
-        </p:nvSpPr>
-        <p:spPr>
-          <a:xfrm>
-            <a:off x="4800600" y="2697480"/>
-            <a:ext cx="2377440" cy="1417320"/>
+              <a:t>Supabase Postgres — auth, checkpointer, pgvector KB</a:t>
+            </a:r>
+            <a:endParaRPr lang="en-US" sz="900" dirty="0"/>
+          </a:p>
+        </p:txBody>
+      </p:sp>
+      <p:sp>
+        <p:nvSpPr>
+          <p:cNvPr id="37" name="Text 35"/>
+          <p:cNvSpPr/>
+          <p:nvPr/>
+        </p:nvSpPr>
+        <p:spPr>
+          <a:xfrm>
+            <a:off x="1691640" y="3968496"/>
+            <a:ext cx="2240280" cy="219456"/>
+          </a:xfrm>
+          <a:prstGeom prst="rect">
+            <a:avLst/>
+          </a:prstGeom>
+          <a:noFill/>
+          <a:ln/>
+        </p:spPr>
+        <p:txBody>
+          <a:bodyPr wrap="square" rtlCol="0" anchor="ctr"/>
+          <a:lstStyle/>
+          <a:p>
+            <a:pPr>
+              <a:buSzPct val="100000"/>
+            </a:pPr>
+            <a:endParaRPr lang="en-US" sz="900" dirty="0"/>
+          </a:p>
+        </p:txBody>
+      </p:sp>
+      <p:sp>
+        <p:nvSpPr>
+          <p:cNvPr id="38" name="Text 36"/>
+          <p:cNvSpPr/>
+          <p:nvPr/>
+        </p:nvSpPr>
+        <p:spPr>
+          <a:xfrm>
+            <a:off x="1691640" y="3976726"/>
+            <a:ext cx="2240280" cy="307238"/>
+          </a:xfrm>
+          <a:prstGeom prst="rect">
+            <a:avLst/>
+          </a:prstGeom>
+          <a:noFill/>
+          <a:ln/>
+        </p:spPr>
+        <p:txBody>
+          <a:bodyPr wrap="square" rtlCol="0" anchor="ctr"/>
+          <a:lstStyle/>
+          <a:p>
+            <a:pPr marL="342900" indent="-342900">
+              <a:buSzPct val="100000"/>
+              <a:buChar char="•"/>
+            </a:pPr>
+            <a:r>
+              <a:rPr lang="en-US" sz="900" dirty="0">
+                <a:solidFill>
+                  <a:srgbClr val="94A3B8"/>
+                </a:solidFill>
+                <a:latin typeface="Calibri" pitchFamily="34" charset="0"/>
+                <a:ea typeface="Calibri" pitchFamily="34" charset="-122"/>
+                <a:cs typeface="Calibri" pitchFamily="34" charset="-120"/>
+              </a:rPr>
+              <a:t>Vercel — App deployment</a:t>
+            </a:r>
+            <a:endParaRPr lang="en-US" sz="900" dirty="0"/>
+          </a:p>
+        </p:txBody>
+      </p:sp>
+      <p:sp>
+        <p:nvSpPr>
+          <p:cNvPr id="39" name="Shape 37"/>
+          <p:cNvSpPr/>
+          <p:nvPr/>
+        </p:nvSpPr>
+        <p:spPr>
+          <a:xfrm>
+            <a:off x="4800600" y="2834640"/>
+            <a:ext cx="2377440" cy="1709928"/>
           </a:xfrm>
           <a:prstGeom prst="rect">
             <a:avLst/>
@@ -6807,13 +8506,13 @@
       </p:sp>
       <p:sp>
         <p:nvSpPr>
-          <p:cNvPr id="30" name="Shape 28"/>
-          <p:cNvSpPr/>
-          <p:nvPr/>
-        </p:nvSpPr>
-        <p:spPr>
-          <a:xfrm>
-            <a:off x="4800600" y="2697480"/>
+          <p:cNvPr id="40" name="Shape 38"/>
+          <p:cNvSpPr/>
+          <p:nvPr/>
+        </p:nvSpPr>
+        <p:spPr>
+          <a:xfrm>
+            <a:off x="4800600" y="2834640"/>
             <a:ext cx="2377440" cy="54864"/>
           </a:xfrm>
           <a:prstGeom prst="rect">
@@ -6832,14 +8531,14 @@
       </p:sp>
       <p:sp>
         <p:nvSpPr>
-          <p:cNvPr id="31" name="Text 29"/>
-          <p:cNvSpPr/>
-          <p:nvPr/>
-        </p:nvSpPr>
-        <p:spPr>
-          <a:xfrm>
-            <a:off x="4892040" y="2807208"/>
-            <a:ext cx="2194560" cy="274320"/>
+          <p:cNvPr id="41" name="Text 39"/>
+          <p:cNvSpPr/>
+          <p:nvPr/>
+        </p:nvSpPr>
+        <p:spPr>
+          <a:xfrm>
+            <a:off x="4892040" y="2926080"/>
+            <a:ext cx="2240280" cy="256032"/>
           </a:xfrm>
           <a:prstGeom prst="rect">
             <a:avLst/>
@@ -6855,7 +8554,7 @@
               <a:buNone/>
             </a:pPr>
             <a:r>
-              <a:rPr lang="en-US" sz="1400" b="1" dirty="0">
+              <a:rPr lang="en-US" sz="1300" b="1" dirty="0">
                 <a:solidFill>
                   <a:srgbClr val="FFFFFF"/>
                 </a:solidFill>
@@ -6865,20 +8564,20 @@
               </a:rPr>
               <a:t>Scalability</a:t>
             </a:r>
-            <a:endParaRPr lang="en-US" sz="1400" dirty="0"/>
-          </a:p>
-        </p:txBody>
-      </p:sp>
-      <p:sp>
-        <p:nvSpPr>
-          <p:cNvPr id="32" name="Text 30"/>
-          <p:cNvSpPr/>
-          <p:nvPr/>
-        </p:nvSpPr>
-        <p:spPr>
-          <a:xfrm>
-            <a:off x="4892040" y="3136392"/>
-            <a:ext cx="2194560" cy="274320"/>
+            <a:endParaRPr lang="en-US" sz="1300" dirty="0"/>
+          </a:p>
+        </p:txBody>
+      </p:sp>
+      <p:sp>
+        <p:nvSpPr>
+          <p:cNvPr id="42" name="Text 40"/>
+          <p:cNvSpPr/>
+          <p:nvPr/>
+        </p:nvSpPr>
+        <p:spPr>
+          <a:xfrm>
+            <a:off x="4892040" y="3227832"/>
+            <a:ext cx="2240280" cy="219456"/>
           </a:xfrm>
           <a:prstGeom prst="rect">
             <a:avLst/>
@@ -6895,7 +8594,7 @@
               <a:buChar char="•"/>
             </a:pPr>
             <a:r>
-              <a:rPr lang="en-US" sz="1100" dirty="0">
+              <a:rPr lang="en-US" sz="900" dirty="0">
                 <a:solidFill>
                   <a:srgbClr val="94A3B8"/>
                 </a:solidFill>
@@ -6903,22 +8602,22 @@
                 <a:ea typeface="Calibri" pitchFamily="34" charset="-122"/>
                 <a:cs typeface="Calibri" pitchFamily="34" charset="-120"/>
               </a:rPr>
-              <a:t>Stateless FastAPI backend</a:t>
-            </a:r>
-            <a:endParaRPr lang="en-US" sz="1100" dirty="0"/>
-          </a:p>
-        </p:txBody>
-      </p:sp>
-      <p:sp>
-        <p:nvSpPr>
-          <p:cNvPr id="33" name="Text 31"/>
-          <p:cNvSpPr/>
-          <p:nvPr/>
-        </p:nvSpPr>
-        <p:spPr>
-          <a:xfrm>
-            <a:off x="4892040" y="3438144"/>
-            <a:ext cx="2194560" cy="274320"/>
+              <a:t>Stateless FastAPI — each request independent</a:t>
+            </a:r>
+            <a:endParaRPr lang="en-US" sz="900" dirty="0"/>
+          </a:p>
+        </p:txBody>
+      </p:sp>
+      <p:sp>
+        <p:nvSpPr>
+          <p:cNvPr id="43" name="Text 41"/>
+          <p:cNvSpPr/>
+          <p:nvPr/>
+        </p:nvSpPr>
+        <p:spPr>
+          <a:xfrm>
+            <a:off x="4892040" y="3474720"/>
+            <a:ext cx="2240280" cy="219456"/>
           </a:xfrm>
           <a:prstGeom prst="rect">
             <a:avLst/>
@@ -6935,7 +8634,7 @@
               <a:buChar char="•"/>
             </a:pPr>
             <a:r>
-              <a:rPr lang="en-US" sz="1100" dirty="0">
+              <a:rPr lang="en-US" sz="900" dirty="0">
                 <a:solidFill>
                   <a:srgbClr val="94A3B8"/>
                 </a:solidFill>
@@ -6943,22 +8642,22 @@
                 <a:ea typeface="Calibri" pitchFamily="34" charset="-122"/>
                 <a:cs typeface="Calibri" pitchFamily="34" charset="-120"/>
               </a:rPr>
-              <a:t>Async LangGraph execution</a:t>
-            </a:r>
-            <a:endParaRPr lang="en-US" sz="1100" dirty="0"/>
-          </a:p>
-        </p:txBody>
-      </p:sp>
-      <p:sp>
-        <p:nvSpPr>
-          <p:cNvPr id="34" name="Text 32"/>
-          <p:cNvSpPr/>
-          <p:nvPr/>
-        </p:nvSpPr>
-        <p:spPr>
-          <a:xfrm>
-            <a:off x="4892040" y="3739896"/>
-            <a:ext cx="2194560" cy="274320"/>
+              <a:t>Async LangGraph — non-blocking agent execution</a:t>
+            </a:r>
+            <a:endParaRPr lang="en-US" sz="900" dirty="0"/>
+          </a:p>
+        </p:txBody>
+      </p:sp>
+      <p:sp>
+        <p:nvSpPr>
+          <p:cNvPr id="44" name="Text 42"/>
+          <p:cNvSpPr/>
+          <p:nvPr/>
+        </p:nvSpPr>
+        <p:spPr>
+          <a:xfrm>
+            <a:off x="4892040" y="3721608"/>
+            <a:ext cx="2240280" cy="219456"/>
           </a:xfrm>
           <a:prstGeom prst="rect">
             <a:avLst/>
@@ -6975,7 +8674,7 @@
               <a:buChar char="•"/>
             </a:pPr>
             <a:r>
-              <a:rPr lang="en-US" sz="1100" dirty="0">
+              <a:rPr lang="en-US" sz="900" dirty="0">
                 <a:solidFill>
                   <a:srgbClr val="94A3B8"/>
                 </a:solidFill>
@@ -6983,22 +8682,102 @@
                 <a:ea typeface="Calibri" pitchFamily="34" charset="-122"/>
                 <a:cs typeface="Calibri" pitchFamily="34" charset="-120"/>
               </a:rPr>
-              <a:t>SSE streaming — no blocking waits</a:t>
-            </a:r>
-            <a:endParaRPr lang="en-US" sz="1100" dirty="0"/>
-          </a:p>
-        </p:txBody>
-      </p:sp>
-      <p:sp>
-        <p:nvSpPr>
-          <p:cNvPr id="35" name="Shape 33"/>
-          <p:cNvSpPr/>
-          <p:nvPr/>
-        </p:nvSpPr>
-        <p:spPr>
-          <a:xfrm>
-            <a:off x="457200" y="4297680"/>
-            <a:ext cx="8229600" cy="548640"/>
+              <a:t>SSE streaming — agent traces to UI in real time</a:t>
+            </a:r>
+            <a:endParaRPr lang="en-US" sz="900" dirty="0"/>
+          </a:p>
+        </p:txBody>
+      </p:sp>
+      <p:sp>
+        <p:nvSpPr>
+          <p:cNvPr id="45" name="Text 43"/>
+          <p:cNvSpPr/>
+          <p:nvPr/>
+        </p:nvSpPr>
+        <p:spPr>
+          <a:xfrm>
+            <a:off x="4892040" y="3968496"/>
+            <a:ext cx="2240280" cy="219456"/>
+          </a:xfrm>
+          <a:prstGeom prst="rect">
+            <a:avLst/>
+          </a:prstGeom>
+          <a:noFill/>
+          <a:ln/>
+        </p:spPr>
+        <p:txBody>
+          <a:bodyPr wrap="square" rtlCol="0" anchor="ctr"/>
+          <a:lstStyle/>
+          <a:p>
+            <a:pPr marL="342900" indent="-342900">
+              <a:buSzPct val="100000"/>
+              <a:buChar char="•"/>
+            </a:pPr>
+            <a:r>
+              <a:rPr lang="en-US" sz="900" dirty="0">
+                <a:solidFill>
+                  <a:srgbClr val="94A3B8"/>
+                </a:solidFill>
+                <a:latin typeface="Calibri" pitchFamily="34" charset="0"/>
+                <a:ea typeface="Calibri" pitchFamily="34" charset="-122"/>
+                <a:cs typeface="Calibri" pitchFamily="34" charset="-120"/>
+              </a:rPr>
+              <a:t>Postgres checkpointer — threads survive restarts</a:t>
+            </a:r>
+            <a:endParaRPr lang="en-US" sz="900" dirty="0"/>
+          </a:p>
+        </p:txBody>
+      </p:sp>
+      <p:sp>
+        <p:nvSpPr>
+          <p:cNvPr id="46" name="Text 44"/>
+          <p:cNvSpPr/>
+          <p:nvPr/>
+        </p:nvSpPr>
+        <p:spPr>
+          <a:xfrm>
+            <a:off x="4892040" y="4215384"/>
+            <a:ext cx="2240280" cy="219456"/>
+          </a:xfrm>
+          <a:prstGeom prst="rect">
+            <a:avLst/>
+          </a:prstGeom>
+          <a:noFill/>
+          <a:ln/>
+        </p:spPr>
+        <p:txBody>
+          <a:bodyPr wrap="square" rtlCol="0" anchor="ctr"/>
+          <a:lstStyle/>
+          <a:p>
+            <a:pPr marL="342900" indent="-342900">
+              <a:buSzPct val="100000"/>
+              <a:buChar char="•"/>
+            </a:pPr>
+            <a:r>
+              <a:rPr lang="en-US" sz="900" dirty="0">
+                <a:solidFill>
+                  <a:srgbClr val="94A3B8"/>
+                </a:solidFill>
+                <a:latin typeface="Calibri" pitchFamily="34" charset="0"/>
+                <a:ea typeface="Calibri" pitchFamily="34" charset="-122"/>
+                <a:cs typeface="Calibri" pitchFamily="34" charset="-120"/>
+              </a:rPr>
+              <a:t>pgvector KB cache — repeated patterns skip LLM calls</a:t>
+            </a:r>
+            <a:endParaRPr lang="en-US" sz="900" dirty="0"/>
+          </a:p>
+        </p:txBody>
+      </p:sp>
+      <p:sp>
+        <p:nvSpPr>
+          <p:cNvPr id="47" name="Shape 45"/>
+          <p:cNvSpPr/>
+          <p:nvPr/>
+        </p:nvSpPr>
+        <p:spPr>
+          <a:xfrm>
+            <a:off x="457200" y="4626864"/>
+            <a:ext cx="8229600" cy="384048"/>
           </a:xfrm>
           <a:prstGeom prst="rect">
             <a:avLst/>
@@ -7023,14 +8802,14 @@
       </p:sp>
       <p:sp>
         <p:nvSpPr>
-          <p:cNvPr id="36" name="Text 34"/>
-          <p:cNvSpPr/>
-          <p:nvPr/>
-        </p:nvSpPr>
-        <p:spPr>
-          <a:xfrm>
-            <a:off x="457200" y="4297680"/>
-            <a:ext cx="8229600" cy="548640"/>
+          <p:cNvPr id="48" name="Text 46"/>
+          <p:cNvSpPr/>
+          <p:nvPr/>
+        </p:nvSpPr>
+        <p:spPr>
+          <a:xfrm>
+            <a:off x="457200" y="4626864"/>
+            <a:ext cx="8229600" cy="384048"/>
           </a:xfrm>
           <a:prstGeom prst="rect">
             <a:avLst/>
@@ -7046,7 +8825,7 @@
               <a:buNone/>
             </a:pPr>
             <a:r>
-              <a:rPr lang="en-US" sz="1100" dirty="0">
+              <a:rPr lang="en-US" sz="1000" dirty="0">
                 <a:solidFill>
                   <a:srgbClr val="94A3B8"/>
                 </a:solidFill>
@@ -7057,7 +8836,7 @@
               <a:t>Query KB: </a:t>
             </a:r>
             <a:r>
-              <a:rPr lang="en-US" sz="1100" b="1" dirty="0">
+              <a:rPr lang="en-US" sz="1000" b="1" dirty="0">
                 <a:solidFill>
                   <a:srgbClr val="06B6D4"/>
                 </a:solidFill>
@@ -7068,7 +8847,7 @@
               <a:t>pgvector</a:t>
             </a:r>
             <a:r>
-              <a:rPr lang="en-US" sz="1100" dirty="0">
+              <a:rPr lang="en-US" sz="1000" dirty="0">
                 <a:solidFill>
                   <a:srgbClr val="94A3B8"/>
                 </a:solidFill>
@@ -7079,7 +8858,7 @@
               <a:t> + </a:t>
             </a:r>
             <a:r>
-              <a:rPr lang="en-US" sz="1100" b="1" dirty="0">
+              <a:rPr lang="en-US" sz="1000" b="1" dirty="0">
                 <a:solidFill>
                   <a:srgbClr val="06B6D4"/>
                 </a:solidFill>
@@ -7087,10 +8866,10 @@
                 <a:ea typeface="Calibri" pitchFamily="34" charset="-122"/>
                 <a:cs typeface="Calibri" pitchFamily="34" charset="-120"/>
               </a:rPr>
-              <a:t>gemini-embedding-001</a:t>
-            </a:r>
-            <a:r>
-              <a:rPr lang="en-US" sz="1100" dirty="0">
+              <a:t>text-embedding-3-small</a:t>
+            </a:r>
+            <a:r>
+              <a:rPr lang="en-US" sz="1000" dirty="0">
                 <a:solidFill>
                   <a:srgbClr val="94A3B8"/>
                 </a:solidFill>
@@ -7100,7 +8879,7 @@
               </a:rPr>
               <a:t> · dialect-aware · schema fingerprint matching · configurable similarity threshold</a:t>
             </a:r>
-            <a:endParaRPr lang="en-US" sz="1100" dirty="0"/>
+            <a:endParaRPr lang="en-US" sz="1000" dirty="0"/>
           </a:p>
         </p:txBody>
       </p:sp>
@@ -7249,7 +9028,7 @@
         <p:spPr>
           <a:xfrm>
             <a:off x="365760" y="1234440"/>
-            <a:ext cx="3840480" cy="822960"/>
+            <a:ext cx="3931920" cy="914400"/>
           </a:xfrm>
           <a:prstGeom prst="rect">
             <a:avLst/>
@@ -7281,7 +9060,7 @@
         <p:spPr>
           <a:xfrm>
             <a:off x="365760" y="1234440"/>
-            <a:ext cx="45720" cy="822960"/>
+            <a:ext cx="45720" cy="914400"/>
           </a:xfrm>
           <a:prstGeom prst="rect">
             <a:avLst/>
@@ -7305,7 +9084,7 @@
         </p:nvSpPr>
         <p:spPr>
           <a:xfrm>
-            <a:off x="502920" y="1463040"/>
+            <a:off x="502920" y="1490472"/>
             <a:ext cx="274320" cy="274320"/>
           </a:xfrm>
           <a:prstGeom prst="ellipse">
@@ -7330,7 +9109,7 @@
         </p:nvSpPr>
         <p:spPr>
           <a:xfrm>
-            <a:off x="502920" y="1463040"/>
+            <a:off x="502920" y="1490472"/>
             <a:ext cx="274320" cy="274320"/>
           </a:xfrm>
           <a:prstGeom prst="rect">
@@ -7370,33 +9149,28 @@
         <p:spPr>
           <a:xfrm>
             <a:off x="868680" y="1307592"/>
-            <a:ext cx="3200400" cy="685800"/>
-          </a:xfrm>
-          <a:prstGeom prst="rect">
-            <a:avLst/>
-          </a:prstGeom>
-          <a:noFill/>
-          <a:ln/>
-        </p:spPr>
-        <p:txBody>
-          <a:bodyPr wrap="square" rtlCol="0" anchor="ctr"/>
-          <a:lstStyle/>
-          <a:p>
-            <a:pPr marL="0" indent="0">
-              <a:buNone/>
-            </a:pPr>
-            <a:r>
-              <a:rPr lang="en-US" sz="1200" dirty="0">
-                <a:solidFill>
-                  <a:srgbClr val="CBD5E1"/>
-                </a:solidFill>
-                <a:latin typeface="Calibri" pitchFamily="34" charset="0"/>
-                <a:ea typeface="Calibri" pitchFamily="34" charset="-122"/>
-                <a:cs typeface="Calibri" pitchFamily="34" charset="-120"/>
-              </a:rPr>
-              <a:t>LangGraph thread_id / conversation_id SSE handshake was the trickiest part — async state sync across interrupts</a:t>
-            </a:r>
-            <a:endParaRPr lang="en-US" sz="1200" dirty="0"/>
+            <a:ext cx="3291840" cy="768096"/>
+          </a:xfrm>
+          <a:prstGeom prst="rect">
+            <a:avLst/>
+          </a:prstGeom>
+          <a:noFill/>
+          <a:ln/>
+        </p:spPr>
+        <p:txBody>
+          <a:bodyPr wrap="square" rtlCol="0" anchor="ctr"/>
+          <a:lstStyle/>
+          <a:p>
+            <a:r>
+              <a:rPr lang="en-US" sz="1100" dirty="0">
+                <a:solidFill>
+                  <a:schemeClr val="bg1">
+                    <a:lumMod val="85000"/>
+                  </a:schemeClr>
+                </a:solidFill>
+              </a:rPr>
+              <a:t>LLM routing needs guardrails: loop protection + precise prompts = stable agents</a:t>
+            </a:r>
           </a:p>
         </p:txBody>
       </p:sp>
@@ -7408,8 +9182,8 @@
         </p:nvSpPr>
         <p:spPr>
           <a:xfrm>
-            <a:off x="365760" y="2240280"/>
-            <a:ext cx="3840480" cy="822960"/>
+            <a:off x="365760" y="2258568"/>
+            <a:ext cx="3931920" cy="914400"/>
           </a:xfrm>
           <a:prstGeom prst="rect">
             <a:avLst/>
@@ -7440,8 +9214,8 @@
         </p:nvSpPr>
         <p:spPr>
           <a:xfrm>
-            <a:off x="365760" y="2240280"/>
-            <a:ext cx="45720" cy="822960"/>
+            <a:off x="365760" y="2258568"/>
+            <a:ext cx="45720" cy="914400"/>
           </a:xfrm>
           <a:prstGeom prst="rect">
             <a:avLst/>
@@ -7465,7 +9239,7 @@
         </p:nvSpPr>
         <p:spPr>
           <a:xfrm>
-            <a:off x="502920" y="2468880"/>
+            <a:off x="502920" y="2514600"/>
             <a:ext cx="274320" cy="274320"/>
           </a:xfrm>
           <a:prstGeom prst="ellipse">
@@ -7490,7 +9264,7 @@
         </p:nvSpPr>
         <p:spPr>
           <a:xfrm>
-            <a:off x="502920" y="2468880"/>
+            <a:off x="502920" y="2514600"/>
             <a:ext cx="274320" cy="274320"/>
           </a:xfrm>
           <a:prstGeom prst="rect">
@@ -7529,8 +9303,8 @@
         </p:nvSpPr>
         <p:spPr>
           <a:xfrm>
-            <a:off x="868680" y="2313432"/>
-            <a:ext cx="3200400" cy="685800"/>
+            <a:off x="868680" y="2331720"/>
+            <a:ext cx="3291840" cy="768096"/>
           </a:xfrm>
           <a:prstGeom prst="rect">
             <a:avLst/>
@@ -7546,7 +9320,7 @@
               <a:buNone/>
             </a:pPr>
             <a:r>
-              <a:rPr lang="en-US" sz="1200" dirty="0">
+              <a:rPr lang="en-US" sz="1100" dirty="0">
                 <a:solidFill>
                   <a:srgbClr val="CBD5E1"/>
                 </a:solidFill>
@@ -7554,9 +9328,9 @@
                 <a:ea typeface="Calibri" pitchFamily="34" charset="-122"/>
                 <a:cs typeface="Calibri" pitchFamily="34" charset="-120"/>
               </a:rPr>
-              <a:t>metadata.json data_range must stay in sync with actual warehouse data or guardrails mislead the model</a:t>
-            </a:r>
-            <a:endParaRPr lang="en-US" sz="1200" dirty="0"/>
+              <a:t>LangGraph interrupt + async SSE handshake was the hardest integration — thread_id must align exactly across graph checkpoint, resume API, and frontend SSE subscription. One mismatch = silent hang.</a:t>
+            </a:r>
+            <a:endParaRPr lang="en-US" sz="1100" dirty="0"/>
           </a:p>
         </p:txBody>
       </p:sp>
@@ -7568,8 +9342,8 @@
         </p:nvSpPr>
         <p:spPr>
           <a:xfrm>
-            <a:off x="365760" y="3246120"/>
-            <a:ext cx="3840480" cy="822960"/>
+            <a:off x="365760" y="3282696"/>
+            <a:ext cx="3931920" cy="914400"/>
           </a:xfrm>
           <a:prstGeom prst="rect">
             <a:avLst/>
@@ -7600,8 +9374,8 @@
         </p:nvSpPr>
         <p:spPr>
           <a:xfrm>
-            <a:off x="365760" y="3246120"/>
-            <a:ext cx="45720" cy="822960"/>
+            <a:off x="365760" y="3282696"/>
+            <a:ext cx="45720" cy="914400"/>
           </a:xfrm>
           <a:prstGeom prst="rect">
             <a:avLst/>
@@ -7625,7 +9399,7 @@
         </p:nvSpPr>
         <p:spPr>
           <a:xfrm>
-            <a:off x="502920" y="3474720"/>
+            <a:off x="502920" y="3538728"/>
             <a:ext cx="274320" cy="274320"/>
           </a:xfrm>
           <a:prstGeom prst="ellipse">
@@ -7650,7 +9424,7 @@
         </p:nvSpPr>
         <p:spPr>
           <a:xfrm>
-            <a:off x="502920" y="3474720"/>
+            <a:off x="502920" y="3538728"/>
             <a:ext cx="274320" cy="274320"/>
           </a:xfrm>
           <a:prstGeom prst="rect">
@@ -7689,8 +9463,8 @@
         </p:nvSpPr>
         <p:spPr>
           <a:xfrm>
-            <a:off x="868680" y="3319272"/>
-            <a:ext cx="3200400" cy="685800"/>
+            <a:off x="868680" y="3355848"/>
+            <a:ext cx="3291840" cy="768096"/>
           </a:xfrm>
           <a:prstGeom prst="rect">
             <a:avLst/>
@@ -7706,7 +9480,7 @@
               <a:buNone/>
             </a:pPr>
             <a:r>
-              <a:rPr lang="en-US" sz="1200" dirty="0">
+              <a:rPr lang="en-US" sz="1100" dirty="0">
                 <a:solidFill>
                   <a:srgbClr val="CBD5E1"/>
                 </a:solidFill>
@@ -7714,9 +9488,9 @@
                 <a:ea typeface="Calibri" pitchFamily="34" charset="-122"/>
                 <a:cs typeface="Calibri" pitchFamily="34" charset="-120"/>
               </a:rPr>
-              <a:t>pgvector KB cache: dialect + schema fingerprint matching is subtle but critical for hit rate — wrong fingerprint = always a miss</a:t>
-            </a:r>
-            <a:endParaRPr lang="en-US" sz="1200" dirty="0"/>
+              <a:t>pgvector similarity alone yields false cache hits across different schemas. Compound key (dialect + schema fingerprint + embedding) eliminated false positives and fixed hit precision.</a:t>
+            </a:r>
+            <a:endParaRPr lang="en-US" sz="1100" dirty="0"/>
           </a:p>
         </p:txBody>
       </p:sp>
@@ -7768,7 +9542,7 @@
         <p:spPr>
           <a:xfrm>
             <a:off x="4773168" y="1234440"/>
-            <a:ext cx="27432" cy="2834640"/>
+            <a:ext cx="27432" cy="2788920"/>
           </a:xfrm>
           <a:prstGeom prst="rect">
             <a:avLst/>
@@ -7818,7 +9592,7 @@
         <p:spPr>
           <a:xfrm>
             <a:off x="4983480" y="1261872"/>
-            <a:ext cx="3657600" cy="347472"/>
+            <a:ext cx="3657600" cy="384048"/>
           </a:xfrm>
           <a:prstGeom prst="rect">
             <a:avLst/>
@@ -7834,7 +9608,7 @@
               <a:buNone/>
             </a:pPr>
             <a:r>
-              <a:rPr lang="en-US" sz="1200" dirty="0">
+              <a:rPr lang="en-US" sz="1100" dirty="0">
                 <a:solidFill>
                   <a:srgbClr val="CBD5E1"/>
                 </a:solidFill>
@@ -7842,9 +9616,9 @@
                 <a:ea typeface="Calibri" pitchFamily="34" charset="-122"/>
                 <a:cs typeface="Calibri" pitchFamily="34" charset="-120"/>
               </a:rPr>
-              <a:t>Arbitrary data source connectors — connect any warehouse URL</a:t>
-            </a:r>
-            <a:endParaRPr lang="en-US" sz="1200" dirty="0"/>
+              <a:t>Arbitrary warehouse connector — plug in any URL, auto-introspect schema, start asking</a:t>
+            </a:r>
+            <a:endParaRPr lang="en-US" sz="1100" dirty="0"/>
           </a:p>
         </p:txBody>
       </p:sp>
@@ -7856,7 +9630,7 @@
         </p:nvSpPr>
         <p:spPr>
           <a:xfrm>
-            <a:off x="4690872" y="1965960"/>
+            <a:off x="4690872" y="1975104"/>
             <a:ext cx="182880" cy="182880"/>
           </a:xfrm>
           <a:prstGeom prst="ellipse">
@@ -7881,8 +9655,8 @@
         </p:nvSpPr>
         <p:spPr>
           <a:xfrm>
-            <a:off x="4983480" y="1947672"/>
-            <a:ext cx="3657600" cy="347472"/>
+            <a:off x="4983480" y="1956816"/>
+            <a:ext cx="3657600" cy="384048"/>
           </a:xfrm>
           <a:prstGeom prst="rect">
             <a:avLst/>
@@ -7898,7 +9672,7 @@
               <a:buNone/>
             </a:pPr>
             <a:r>
-              <a:rPr lang="en-US" sz="1200" dirty="0">
+              <a:rPr lang="en-US" sz="1100" dirty="0">
                 <a:solidFill>
                   <a:srgbClr val="CBD5E1"/>
                 </a:solidFill>
@@ -7906,9 +9680,9 @@
                 <a:ea typeface="Calibri" pitchFamily="34" charset="-122"/>
                 <a:cs typeface="Calibri" pitchFamily="34" charset="-120"/>
               </a:rPr>
-              <a:t>Evals &amp; testing suite for agent decision quality</a:t>
-            </a:r>
-            <a:endParaRPr lang="en-US" sz="1200" dirty="0"/>
+              <a:t>Scheduled agentic reports — cron-triggered pipeline runs (e.g., top products every Monday)</a:t>
+            </a:r>
+            <a:endParaRPr lang="en-US" sz="1100" dirty="0"/>
           </a:p>
         </p:txBody>
       </p:sp>
@@ -7920,7 +9694,7 @@
         </p:nvSpPr>
         <p:spPr>
           <a:xfrm>
-            <a:off x="4690872" y="2651760"/>
+            <a:off x="4690872" y="2670048"/>
             <a:ext cx="182880" cy="182880"/>
           </a:xfrm>
           <a:prstGeom prst="ellipse">
@@ -7945,8 +9719,8 @@
         </p:nvSpPr>
         <p:spPr>
           <a:xfrm>
-            <a:off x="4983480" y="2633472"/>
-            <a:ext cx="3657600" cy="347472"/>
+            <a:off x="4983480" y="2651760"/>
+            <a:ext cx="3657600" cy="384048"/>
           </a:xfrm>
           <a:prstGeom prst="rect">
             <a:avLst/>
@@ -7962,7 +9736,7 @@
               <a:buNone/>
             </a:pPr>
             <a:r>
-              <a:rPr lang="en-US" sz="1200" dirty="0">
+              <a:rPr lang="en-US" sz="1100" dirty="0">
                 <a:solidFill>
                   <a:srgbClr val="CBD5E1"/>
                 </a:solidFill>
@@ -7970,21 +9744,49 @@
                 <a:ea typeface="Calibri" pitchFamily="34" charset="-122"/>
                 <a:cs typeface="Calibri" pitchFamily="34" charset="-120"/>
               </a:rPr>
-              <a:t>Multi-tenant support with per-org schema isolation</a:t>
-            </a:r>
-            <a:endParaRPr lang="en-US" sz="1200" dirty="0"/>
-          </a:p>
-        </p:txBody>
-      </p:sp>
-      <p:sp>
-        <p:nvSpPr>
-          <p:cNvPr id="28" name="Shape 26"/>
-          <p:cNvSpPr/>
-          <p:nvPr/>
-        </p:nvSpPr>
-        <p:spPr>
-          <a:xfrm>
-            <a:off x="0" y="4297680"/>
+              <a:t>Collaborative queries — share results with teammates; branch into follow-up questions</a:t>
+            </a:r>
+            <a:endParaRPr lang="en-US" sz="1100" dirty="0"/>
+          </a:p>
+        </p:txBody>
+      </p:sp>
+      <p:sp>
+        <p:nvSpPr>
+          <p:cNvPr id="29" name="Text 27"/>
+          <p:cNvSpPr/>
+          <p:nvPr/>
+        </p:nvSpPr>
+        <p:spPr>
+          <a:xfrm>
+            <a:off x="4983480" y="3346704"/>
+            <a:ext cx="3657600" cy="384048"/>
+          </a:xfrm>
+          <a:prstGeom prst="rect">
+            <a:avLst/>
+          </a:prstGeom>
+          <a:noFill/>
+          <a:ln/>
+        </p:spPr>
+        <p:txBody>
+          <a:bodyPr wrap="square" rtlCol="0" anchor="ctr"/>
+          <a:lstStyle/>
+          <a:p>
+            <a:pPr marL="0" indent="0">
+              <a:buNone/>
+            </a:pPr>
+            <a:endParaRPr lang="en-US" sz="1100" dirty="0"/>
+          </a:p>
+        </p:txBody>
+      </p:sp>
+      <p:sp>
+        <p:nvSpPr>
+          <p:cNvPr id="30" name="Shape 28"/>
+          <p:cNvSpPr/>
+          <p:nvPr/>
+        </p:nvSpPr>
+        <p:spPr>
+          <a:xfrm>
+            <a:off x="0" y="4315968"/>
             <a:ext cx="9144000" cy="502920"/>
           </a:xfrm>
           <a:prstGeom prst="rect">
@@ -8003,7 +9805,7 @@
       </p:sp>
       <p:sp>
         <p:nvSpPr>
-          <p:cNvPr id="29" name="Text 27"/>
+          <p:cNvPr id="31" name="Text 29"/>
           <p:cNvSpPr/>
           <p:nvPr/>
         </p:nvSpPr>
@@ -8034,7 +9836,7 @@
                 <a:ea typeface="Trebuchet MS" pitchFamily="34" charset="-122"/>
                 <a:cs typeface="Trebuchet MS" pitchFamily="34" charset="-120"/>
               </a:rPr>
-              <a:t>6</a:t>
+              <a:t>9</a:t>
             </a:r>
             <a:endParaRPr lang="en-US" sz="3200" dirty="0"/>
           </a:p>
@@ -8042,7 +9844,7 @@
       </p:sp>
       <p:sp>
         <p:nvSpPr>
-          <p:cNvPr id="30" name="Text 28"/>
+          <p:cNvPr id="32" name="Text 30"/>
           <p:cNvSpPr/>
           <p:nvPr/>
         </p:nvSpPr>
@@ -8073,7 +9875,7 @@
                 <a:ea typeface="Calibri" pitchFamily="34" charset="-122"/>
                 <a:cs typeface="Calibri" pitchFamily="34" charset="-120"/>
               </a:rPr>
-              <a:t>Agent Nodes</a:t>
+              <a:t>Graph Nodes</a:t>
             </a:r>
             <a:endParaRPr lang="en-US" sz="1100" dirty="0"/>
           </a:p>
@@ -8081,7 +9883,7 @@
       </p:sp>
       <p:sp>
         <p:nvSpPr>
-          <p:cNvPr id="31" name="Text 29"/>
+          <p:cNvPr id="33" name="Text 31"/>
           <p:cNvSpPr/>
           <p:nvPr/>
         </p:nvSpPr>
@@ -8120,7 +9922,7 @@
       </p:sp>
       <p:sp>
         <p:nvSpPr>
-          <p:cNvPr id="32" name="Text 30"/>
+          <p:cNvPr id="34" name="Text 32"/>
           <p:cNvSpPr/>
           <p:nvPr/>
         </p:nvSpPr>
@@ -8159,7 +9961,7 @@
       </p:sp>
       <p:sp>
         <p:nvSpPr>
-          <p:cNvPr id="33" name="Text 31"/>
+          <p:cNvPr id="35" name="Text 33"/>
           <p:cNvSpPr/>
           <p:nvPr/>
         </p:nvSpPr>
@@ -8198,7 +10000,7 @@
       </p:sp>
       <p:sp>
         <p:nvSpPr>
-          <p:cNvPr id="34" name="Text 32"/>
+          <p:cNvPr id="36" name="Text 34"/>
           <p:cNvSpPr/>
           <p:nvPr/>
         </p:nvSpPr>
